--- a/book/slides/pptx/ch09-external-sort.pptx
+++ b/book/slides/pptx/ch09-external-sort.pptx
@@ -5,7 +5,7 @@
     <p:sldMasterId id="2147483648" r:id="rId1"/>
   </p:sldMasterIdLst>
   <p:notesMasterIdLst>
-    <p:notesMasterId r:id="rId34"/>
+    <p:notesMasterId r:id="rId33"/>
   </p:notesMasterIdLst>
   <p:sldIdLst>
     <p:sldId id="256" r:id="rId2"/>
@@ -39,7 +39,6 @@
     <p:sldId id="284" r:id="rId30"/>
     <p:sldId id="285" r:id="rId31"/>
     <p:sldId id="286" r:id="rId32"/>
-    <p:sldId id="287" r:id="rId33"/>
   </p:sldIdLst>
   <p:sldSz cx="12192000" cy="6858000"/>
   <p:notesSz cx="6858000" cy="9144000"/>
@@ -172,7 +171,7 @@
 </p:notes>
 </file>
 
-<file path=ppt/notesSlides/notesSlide15.xml><?xml version="1.0" encoding="utf-8"?>
+<file path=ppt/notesSlides/notesSlide16.xml><?xml version="1.0" encoding="utf-8"?>
 <p:notes xmlns:a="http://schemas.openxmlformats.org/drawingml/2006/main" xmlns:r="http://schemas.openxmlformats.org/officeDocument/2006/relationships" xmlns:p="http://schemas.openxmlformats.org/presentationml/2006/main">
   <p:cSld>
     <p:spTree>
@@ -1058,7 +1057,7 @@
                 <a:ea typeface="Noto Sans CJK SC"/>
                 <a:cs typeface="Segoe UI"/>
               </a:rPr>
-              <a:t>1 / 32</a:t>
+              <a:t>1 / 31</a:t>
             </a:r>
           </a:p>
         </p:txBody>
@@ -2955,7 +2954,7 @@
                 <a:ea typeface="Noto Sans CJK SC"/>
                 <a:cs typeface="Segoe UI"/>
               </a:rPr>
-              <a:t>10 / 32</a:t>
+              <a:t>10 / 31</a:t>
             </a:r>
           </a:p>
         </p:txBody>
@@ -3377,7 +3376,7 @@
                 <a:ea typeface="Noto Sans CJK SC"/>
                 <a:cs typeface="Segoe UI"/>
               </a:rPr>
-              <a:t>11 / 32</a:t>
+              <a:t>11 / 31</a:t>
             </a:r>
           </a:p>
         </p:txBody>
@@ -3871,7 +3870,7 @@
                 <a:ea typeface="Noto Sans CJK SC"/>
                 <a:cs typeface="Segoe UI"/>
               </a:rPr>
-              <a:t>12 / 32</a:t>
+              <a:t>12 / 31</a:t>
             </a:r>
           </a:p>
         </p:txBody>
@@ -4410,7 +4409,7 @@
                 <a:ea typeface="Noto Sans CJK SC"/>
                 <a:cs typeface="Segoe UI"/>
               </a:rPr>
-              <a:t>13 / 32</a:t>
+              <a:t>13 / 31</a:t>
             </a:r>
           </a:p>
         </p:txBody>
@@ -4774,7 +4773,7 @@
                 <a:ea typeface="Noto Sans CJK SC"/>
                 <a:cs typeface="Segoe UI"/>
               </a:rPr>
-              <a:t>14 / 32</a:t>
+              <a:t>14 / 31</a:t>
             </a:r>
           </a:p>
         </p:txBody>
@@ -5015,7 +5014,7 @@
                 <a:ea typeface="Noto Sans CJK SC"/>
                 <a:cs typeface="Segoe UI"/>
               </a:rPr>
-              <a:t>15 / 32</a:t>
+              <a:t>15 / 31</a:t>
             </a:r>
           </a:p>
         </p:txBody>
@@ -5079,7 +5078,7 @@
                 <a:ea typeface="Noto Sans CJK SC"/>
                 <a:cs typeface="Segoe UI"/>
               </a:rPr>
-              <a:t>赢者树的重构（续）</a:t>
+              <a:t>赢者树的重构</a:t>
             </a:r>
           </a:p>
         </p:txBody>
@@ -5119,8 +5118,8 @@
         </p:nvSpPr>
         <p:spPr>
           <a:xfrm>
-            <a:off x="566928" y="1743304"/>
-            <a:ext cx="11058144" cy="3973372"/>
+            <a:off x="566928" y="1258306"/>
+            <a:ext cx="11058144" cy="4943368"/>
           </a:xfrm>
           <a:prstGeom prst="roundRect">
             <a:avLst>
@@ -5149,7 +5148,7 @@
               <a:buNone/>
             </a:pPr>
             <a:r>
-              <a:rPr lang="zh-CN" sz="1216" dirty="0">
+              <a:rPr lang="zh-CN" sz="823" dirty="0">
                 <a:solidFill>
                   <a:srgbClr val="6B6B66"/>
                 </a:solidFill>
@@ -5168,7 +5167,7 @@
               <a:buNone/>
             </a:pPr>
             <a:r>
-              <a:rPr lang="zh-CN" sz="1560" dirty="0">
+              <a:rPr lang="zh-CN" sz="1056" dirty="0">
                 <a:solidFill>
                   <a:srgbClr val="2C6B57"/>
                 </a:solidFill>
@@ -5179,7 +5178,7 @@
               <a:t>void</a:t>
             </a:r>
             <a:r>
-              <a:rPr lang="zh-CN" sz="1560" dirty="0">
+              <a:rPr lang="zh-CN" sz="1056" dirty="0">
                 <a:solidFill>
                   <a:srgbClr val="1A1A18"/>
                 </a:solidFill>
@@ -5190,7 +5189,7 @@
               <a:t> replace(std::</a:t>
             </a:r>
             <a:r>
-              <a:rPr lang="zh-CN" sz="1560" dirty="0">
+              <a:rPr lang="zh-CN" sz="1056" dirty="0">
                 <a:solidFill>
                   <a:srgbClr val="2C6B57"/>
                 </a:solidFill>
@@ -5201,7 +5200,7 @@
               <a:t>size_t</a:t>
             </a:r>
             <a:r>
-              <a:rPr lang="zh-CN" sz="1560" dirty="0">
+              <a:rPr lang="zh-CN" sz="1056" dirty="0">
                 <a:solidFill>
                   <a:srgbClr val="1A1A18"/>
                 </a:solidFill>
@@ -5212,7 +5211,7 @@
               <a:t> player, </a:t>
             </a:r>
             <a:r>
-              <a:rPr lang="zh-CN" sz="1560" dirty="0">
+              <a:rPr lang="zh-CN" sz="1056" dirty="0">
                 <a:solidFill>
                   <a:srgbClr val="2C6B57"/>
                 </a:solidFill>
@@ -5223,7 +5222,7 @@
               <a:t>int</a:t>
             </a:r>
             <a:r>
-              <a:rPr lang="zh-CN" sz="1560" dirty="0">
+              <a:rPr lang="zh-CN" sz="1056" dirty="0">
                 <a:solidFill>
                   <a:srgbClr val="1A1A18"/>
                 </a:solidFill>
@@ -5242,7 +5241,7 @@
               <a:buNone/>
             </a:pPr>
             <a:r>
-              <a:rPr lang="zh-CN" sz="1560" dirty="0">
+              <a:rPr lang="zh-CN" sz="1056" dirty="0">
                 <a:solidFill>
                   <a:srgbClr val="1A1A18"/>
                 </a:solidFill>
@@ -5253,7 +5252,7 @@
               <a:t>    </a:t>
             </a:r>
             <a:r>
-              <a:rPr lang="zh-CN" sz="1560" dirty="0">
+              <a:rPr lang="zh-CN" sz="1056" dirty="0">
                 <a:solidFill>
                   <a:srgbClr val="8A4B2A"/>
                 </a:solidFill>
@@ -5264,7 +5263,7 @@
               <a:t>if</a:t>
             </a:r>
             <a:r>
-              <a:rPr lang="zh-CN" sz="1560" dirty="0">
+              <a:rPr lang="zh-CN" sz="1056" dirty="0">
                 <a:solidFill>
                   <a:srgbClr val="1A1A18"/>
                 </a:solidFill>
@@ -5283,7 +5282,7 @@
               <a:buNone/>
             </a:pPr>
             <a:r>
-              <a:rPr lang="zh-CN" sz="1560" dirty="0">
+              <a:rPr lang="zh-CN" sz="1056" dirty="0">
                 <a:solidFill>
                   <a:srgbClr val="1A1A18"/>
                 </a:solidFill>
@@ -5294,7 +5293,7 @@
               <a:t>        </a:t>
             </a:r>
             <a:r>
-              <a:rPr lang="zh-CN" sz="1560" dirty="0">
+              <a:rPr lang="zh-CN" sz="1056" dirty="0">
                 <a:solidFill>
                   <a:srgbClr val="8A4B2A"/>
                 </a:solidFill>
@@ -5305,7 +5304,7 @@
               <a:t>throw</a:t>
             </a:r>
             <a:r>
-              <a:rPr lang="zh-CN" sz="1560" dirty="0">
+              <a:rPr lang="zh-CN" sz="1056" dirty="0">
                 <a:solidFill>
                   <a:srgbClr val="1A1A18"/>
                 </a:solidFill>
@@ -5316,7 +5315,7 @@
               <a:t> std::out_of_range(</a:t>
             </a:r>
             <a:r>
-              <a:rPr lang="zh-CN" sz="1560" dirty="0">
+              <a:rPr lang="zh-CN" sz="1056" dirty="0">
                 <a:solidFill>
                   <a:srgbClr val="7A5C1E"/>
                 </a:solidFill>
@@ -5327,7 +5326,7 @@
               <a:t>"tournament player"</a:t>
             </a:r>
             <a:r>
-              <a:rPr lang="zh-CN" sz="1560" dirty="0">
+              <a:rPr lang="zh-CN" sz="1056" dirty="0">
                 <a:solidFill>
                   <a:srgbClr val="1A1A18"/>
                 </a:solidFill>
@@ -5346,7 +5345,7 @@
               <a:buNone/>
             </a:pPr>
             <a:r>
-              <a:rPr lang="zh-CN" sz="1560" dirty="0">
+              <a:rPr lang="zh-CN" sz="1056" dirty="0">
                 <a:solidFill>
                   <a:srgbClr val="1A1A18"/>
                 </a:solidFill>
@@ -5365,7 +5364,7 @@
               <a:buNone/>
             </a:pPr>
             <a:r>
-              <a:rPr lang="zh-CN" sz="1560" dirty="0">
+              <a:rPr lang="zh-CN" sz="1056" dirty="0">
                 <a:solidFill>
                   <a:srgbClr val="1A1A18"/>
                 </a:solidFill>
@@ -5384,7 +5383,7 @@
               <a:buNone/>
             </a:pPr>
             <a:r>
-              <a:rPr lang="zh-CN" sz="1560" dirty="0">
+              <a:rPr lang="zh-CN" sz="1056" dirty="0">
                 <a:solidFill>
                   <a:srgbClr val="1A1A18"/>
                 </a:solidFill>
@@ -5395,7 +5394,7 @@
               <a:t>    std::</a:t>
             </a:r>
             <a:r>
-              <a:rPr lang="zh-CN" sz="1560" dirty="0">
+              <a:rPr lang="zh-CN" sz="1056" dirty="0">
                 <a:solidFill>
                   <a:srgbClr val="2C6B57"/>
                 </a:solidFill>
@@ -5406,7 +5405,7 @@
               <a:t>size_t</a:t>
             </a:r>
             <a:r>
-              <a:rPr lang="zh-CN" sz="1560" dirty="0">
+              <a:rPr lang="zh-CN" sz="1056" dirty="0">
                 <a:solidFill>
                   <a:srgbClr val="1A1A18"/>
                 </a:solidFill>
@@ -5425,7 +5424,7 @@
               <a:buNone/>
             </a:pPr>
             <a:r>
-              <a:rPr lang="zh-CN" sz="1560" dirty="0">
+              <a:rPr lang="zh-CN" sz="1056" dirty="0">
                 <a:solidFill>
                   <a:srgbClr val="1A1A18"/>
                 </a:solidFill>
@@ -5444,7 +5443,7 @@
               <a:buNone/>
             </a:pPr>
             <a:r>
-              <a:rPr lang="zh-CN" sz="1560" dirty="0">
+              <a:rPr lang="zh-CN" sz="1056" dirty="0">
                 <a:solidFill>
                   <a:srgbClr val="1A1A18"/>
                 </a:solidFill>
@@ -5455,7 +5454,7 @@
               <a:t>    </a:t>
             </a:r>
             <a:r>
-              <a:rPr lang="zh-CN" sz="1560" dirty="0">
+              <a:rPr lang="zh-CN" sz="1056" dirty="0">
                 <a:solidFill>
                   <a:srgbClr val="8A4B2A"/>
                 </a:solidFill>
@@ -5466,7 +5465,7 @@
               <a:t>while</a:t>
             </a:r>
             <a:r>
-              <a:rPr lang="zh-CN" sz="1560" dirty="0">
+              <a:rPr lang="zh-CN" sz="1056" dirty="0">
                 <a:solidFill>
                   <a:srgbClr val="1A1A18"/>
                 </a:solidFill>
@@ -5477,7 +5476,7 @@
               <a:t> (node &gt; </a:t>
             </a:r>
             <a:r>
-              <a:rPr lang="zh-CN" sz="1560" dirty="0">
+              <a:rPr lang="zh-CN" sz="1056" dirty="0">
                 <a:solidFill>
                   <a:srgbClr val="4A5AA8"/>
                 </a:solidFill>
@@ -5488,7 +5487,7 @@
               <a:t>1</a:t>
             </a:r>
             <a:r>
-              <a:rPr lang="zh-CN" sz="1560" dirty="0">
+              <a:rPr lang="zh-CN" sz="1056" dirty="0">
                 <a:solidFill>
                   <a:srgbClr val="1A1A18"/>
                 </a:solidFill>
@@ -5507,7 +5506,7 @@
               <a:buNone/>
             </a:pPr>
             <a:r>
-              <a:rPr lang="zh-CN" sz="1560" dirty="0">
+              <a:rPr lang="zh-CN" sz="1056" dirty="0">
                 <a:solidFill>
                   <a:srgbClr val="1A1A18"/>
                 </a:solidFill>
@@ -5518,7 +5517,7 @@
               <a:t>        node /= </a:t>
             </a:r>
             <a:r>
-              <a:rPr lang="zh-CN" sz="1560" dirty="0">
+              <a:rPr lang="zh-CN" sz="1056" dirty="0">
                 <a:solidFill>
                   <a:srgbClr val="4A5AA8"/>
                 </a:solidFill>
@@ -5529,7 +5528,7 @@
               <a:t>2</a:t>
             </a:r>
             <a:r>
-              <a:rPr lang="zh-CN" sz="1560" dirty="0">
+              <a:rPr lang="zh-CN" sz="1056" dirty="0">
                 <a:solidFill>
                   <a:srgbClr val="1A1A18"/>
                 </a:solidFill>
@@ -5548,7 +5547,7 @@
               <a:buNone/>
             </a:pPr>
             <a:r>
-              <a:rPr lang="zh-CN" sz="1560" dirty="0">
+              <a:rPr lang="zh-CN" sz="1056" dirty="0">
                 <a:solidFill>
                   <a:srgbClr val="1A1A18"/>
                 </a:solidFill>
@@ -5559,7 +5558,7 @@
               <a:t>        tree_[node] = detail::TournamentOps::better(players_, tree_[node * </a:t>
             </a:r>
             <a:r>
-              <a:rPr lang="zh-CN" sz="1560" dirty="0">
+              <a:rPr lang="zh-CN" sz="1056" dirty="0">
                 <a:solidFill>
                   <a:srgbClr val="4A5AA8"/>
                 </a:solidFill>
@@ -5570,7 +5569,7 @@
               <a:t>2</a:t>
             </a:r>
             <a:r>
-              <a:rPr lang="zh-CN" sz="1560" dirty="0">
+              <a:rPr lang="zh-CN" sz="1056" dirty="0">
                 <a:solidFill>
                   <a:srgbClr val="1A1A18"/>
                 </a:solidFill>
@@ -5589,7 +5588,7 @@
               <a:buNone/>
             </a:pPr>
             <a:r>
-              <a:rPr lang="zh-CN" sz="1560" dirty="0">
+              <a:rPr lang="zh-CN" sz="1056" dirty="0">
                 <a:solidFill>
                   <a:srgbClr val="1A1A18"/>
                 </a:solidFill>
@@ -5600,7 +5599,7 @@
               <a:t>                                                    tree_[node * </a:t>
             </a:r>
             <a:r>
-              <a:rPr lang="zh-CN" sz="1560" dirty="0">
+              <a:rPr lang="zh-CN" sz="1056" dirty="0">
                 <a:solidFill>
                   <a:srgbClr val="4A5AA8"/>
                 </a:solidFill>
@@ -5611,7 +5610,7 @@
               <a:t>2</a:t>
             </a:r>
             <a:r>
-              <a:rPr lang="zh-CN" sz="1560" dirty="0">
+              <a:rPr lang="zh-CN" sz="1056" dirty="0">
                 <a:solidFill>
                   <a:srgbClr val="1A1A18"/>
                 </a:solidFill>
@@ -5622,7 +5621,7 @@
               <a:t> + </a:t>
             </a:r>
             <a:r>
-              <a:rPr lang="zh-CN" sz="1560" dirty="0">
+              <a:rPr lang="zh-CN" sz="1056" dirty="0">
                 <a:solidFill>
                   <a:srgbClr val="4A5AA8"/>
                 </a:solidFill>
@@ -5633,7 +5632,7 @@
               <a:t>1</a:t>
             </a:r>
             <a:r>
-              <a:rPr lang="zh-CN" sz="1560" dirty="0">
+              <a:rPr lang="zh-CN" sz="1056" dirty="0">
                 <a:solidFill>
                   <a:srgbClr val="1A1A18"/>
                 </a:solidFill>
@@ -5652,7 +5651,7 @@
               <a:buNone/>
             </a:pPr>
             <a:r>
-              <a:rPr lang="zh-CN" sz="1560" dirty="0">
+              <a:rPr lang="zh-CN" sz="1056" dirty="0">
                 <a:solidFill>
                   <a:srgbClr val="1A1A18"/>
                 </a:solidFill>
@@ -5671,7 +5670,488 @@
               <a:buNone/>
             </a:pPr>
             <a:r>
-              <a:rPr lang="zh-CN" sz="1560" dirty="0">
+              <a:rPr lang="zh-CN" sz="1056" dirty="0">
+                <a:solidFill>
+                  <a:srgbClr val="1A1A18"/>
+                </a:solidFill>
+                <a:latin typeface="Noto Sans Mono CJK SC"/>
+                <a:ea typeface="Noto Sans Mono CJK SC"/>
+                <a:cs typeface="Noto Sans Mono CJK SC"/>
+              </a:rPr>
+              <a:t>}</a:t>
+            </a:r>
+          </a:p>
+          <a:p>
+            <a:pPr marL="0" indent="0" lvl="0">
+              <a:lnSpc>
+                <a:spcPct val="104000"/>
+              </a:lnSpc>
+              <a:buNone/>
+            </a:pPr>
+            <a:r>
+              <a:rPr lang="zh-CN" sz="1056" dirty="0">
+                <a:solidFill>
+                  <a:srgbClr val="1A1A18"/>
+                </a:solidFill>
+                <a:latin typeface="Noto Sans Mono CJK SC"/>
+                <a:ea typeface="Noto Sans Mono CJK SC"/>
+                <a:cs typeface="Noto Sans Mono CJK SC"/>
+              </a:rPr>
+              <a:t> </a:t>
+            </a:r>
+          </a:p>
+          <a:p>
+            <a:pPr marL="0" indent="0" lvl="0">
+              <a:lnSpc>
+                <a:spcPct val="104000"/>
+              </a:lnSpc>
+              <a:buNone/>
+            </a:pPr>
+            <a:r>
+              <a:rPr lang="zh-CN" sz="1056" dirty="0">
+                <a:solidFill>
+                  <a:srgbClr val="2C6B57"/>
+                </a:solidFill>
+                <a:latin typeface="Noto Sans Mono CJK SC"/>
+                <a:ea typeface="Noto Sans Mono CJK SC"/>
+                <a:cs typeface="Noto Sans Mono CJK SC"/>
+              </a:rPr>
+              <a:t>void</a:t>
+            </a:r>
+            <a:r>
+              <a:rPr lang="zh-CN" sz="1056" dirty="0">
+                <a:solidFill>
+                  <a:srgbClr val="1A1A18"/>
+                </a:solidFill>
+                <a:latin typeface="Noto Sans Mono CJK SC"/>
+                <a:ea typeface="Noto Sans Mono CJK SC"/>
+                <a:cs typeface="Noto Sans Mono CJK SC"/>
+              </a:rPr>
+              <a:t> replace(std::</a:t>
+            </a:r>
+            <a:r>
+              <a:rPr lang="zh-CN" sz="1056" dirty="0">
+                <a:solidFill>
+                  <a:srgbClr val="2C6B57"/>
+                </a:solidFill>
+                <a:latin typeface="Noto Sans Mono CJK SC"/>
+                <a:ea typeface="Noto Sans Mono CJK SC"/>
+                <a:cs typeface="Noto Sans Mono CJK SC"/>
+              </a:rPr>
+              <a:t>size_t</a:t>
+            </a:r>
+            <a:r>
+              <a:rPr lang="zh-CN" sz="1056" dirty="0">
+                <a:solidFill>
+                  <a:srgbClr val="1A1A18"/>
+                </a:solidFill>
+                <a:latin typeface="Noto Sans Mono CJK SC"/>
+                <a:ea typeface="Noto Sans Mono CJK SC"/>
+                <a:cs typeface="Noto Sans Mono CJK SC"/>
+              </a:rPr>
+              <a:t> player, </a:t>
+            </a:r>
+            <a:r>
+              <a:rPr lang="zh-CN" sz="1056" dirty="0">
+                <a:solidFill>
+                  <a:srgbClr val="2C6B57"/>
+                </a:solidFill>
+                <a:latin typeface="Noto Sans Mono CJK SC"/>
+                <a:ea typeface="Noto Sans Mono CJK SC"/>
+                <a:cs typeface="Noto Sans Mono CJK SC"/>
+              </a:rPr>
+              <a:t>int</a:t>
+            </a:r>
+            <a:r>
+              <a:rPr lang="zh-CN" sz="1056" dirty="0">
+                <a:solidFill>
+                  <a:srgbClr val="1A1A18"/>
+                </a:solidFill>
+                <a:latin typeface="Noto Sans Mono CJK SC"/>
+                <a:ea typeface="Noto Sans Mono CJK SC"/>
+                <a:cs typeface="Noto Sans Mono CJK SC"/>
+              </a:rPr>
+              <a:t> value) {</a:t>
+            </a:r>
+          </a:p>
+          <a:p>
+            <a:pPr marL="0" indent="0" lvl="0">
+              <a:lnSpc>
+                <a:spcPct val="104000"/>
+              </a:lnSpc>
+              <a:buNone/>
+            </a:pPr>
+            <a:r>
+              <a:rPr lang="zh-CN" sz="1056" dirty="0">
+                <a:solidFill>
+                  <a:srgbClr val="1A1A18"/>
+                </a:solidFill>
+                <a:latin typeface="Noto Sans Mono CJK SC"/>
+                <a:ea typeface="Noto Sans Mono CJK SC"/>
+                <a:cs typeface="Noto Sans Mono CJK SC"/>
+              </a:rPr>
+              <a:t>    </a:t>
+            </a:r>
+            <a:r>
+              <a:rPr lang="zh-CN" sz="1056" dirty="0">
+                <a:solidFill>
+                  <a:srgbClr val="8A4B2A"/>
+                </a:solidFill>
+                <a:latin typeface="Noto Sans Mono CJK SC"/>
+                <a:ea typeface="Noto Sans Mono CJK SC"/>
+                <a:cs typeface="Noto Sans Mono CJK SC"/>
+              </a:rPr>
+              <a:t>if</a:t>
+            </a:r>
+            <a:r>
+              <a:rPr lang="zh-CN" sz="1056" dirty="0">
+                <a:solidFill>
+                  <a:srgbClr val="1A1A18"/>
+                </a:solidFill>
+                <a:latin typeface="Noto Sans Mono CJK SC"/>
+                <a:ea typeface="Noto Sans Mono CJK SC"/>
+                <a:cs typeface="Noto Sans Mono CJK SC"/>
+              </a:rPr>
+              <a:t> (player &gt;= players_.size()) {</a:t>
+            </a:r>
+          </a:p>
+          <a:p>
+            <a:pPr marL="0" indent="0" lvl="0">
+              <a:lnSpc>
+                <a:spcPct val="104000"/>
+              </a:lnSpc>
+              <a:buNone/>
+            </a:pPr>
+            <a:r>
+              <a:rPr lang="zh-CN" sz="1056" dirty="0">
+                <a:solidFill>
+                  <a:srgbClr val="1A1A18"/>
+                </a:solidFill>
+                <a:latin typeface="Noto Sans Mono CJK SC"/>
+                <a:ea typeface="Noto Sans Mono CJK SC"/>
+                <a:cs typeface="Noto Sans Mono CJK SC"/>
+              </a:rPr>
+              <a:t>        </a:t>
+            </a:r>
+            <a:r>
+              <a:rPr lang="zh-CN" sz="1056" dirty="0">
+                <a:solidFill>
+                  <a:srgbClr val="8A4B2A"/>
+                </a:solidFill>
+                <a:latin typeface="Noto Sans Mono CJK SC"/>
+                <a:ea typeface="Noto Sans Mono CJK SC"/>
+                <a:cs typeface="Noto Sans Mono CJK SC"/>
+              </a:rPr>
+              <a:t>throw</a:t>
+            </a:r>
+            <a:r>
+              <a:rPr lang="zh-CN" sz="1056" dirty="0">
+                <a:solidFill>
+                  <a:srgbClr val="1A1A18"/>
+                </a:solidFill>
+                <a:latin typeface="Noto Sans Mono CJK SC"/>
+                <a:ea typeface="Noto Sans Mono CJK SC"/>
+                <a:cs typeface="Noto Sans Mono CJK SC"/>
+              </a:rPr>
+              <a:t> std::out_of_range(</a:t>
+            </a:r>
+            <a:r>
+              <a:rPr lang="zh-CN" sz="1056" dirty="0">
+                <a:solidFill>
+                  <a:srgbClr val="7A5C1E"/>
+                </a:solidFill>
+                <a:latin typeface="Noto Sans Mono CJK SC"/>
+                <a:ea typeface="Noto Sans Mono CJK SC"/>
+                <a:cs typeface="Noto Sans Mono CJK SC"/>
+              </a:rPr>
+              <a:t>"tournament player"</a:t>
+            </a:r>
+            <a:r>
+              <a:rPr lang="zh-CN" sz="1056" dirty="0">
+                <a:solidFill>
+                  <a:srgbClr val="1A1A18"/>
+                </a:solidFill>
+                <a:latin typeface="Noto Sans Mono CJK SC"/>
+                <a:ea typeface="Noto Sans Mono CJK SC"/>
+                <a:cs typeface="Noto Sans Mono CJK SC"/>
+              </a:rPr>
+              <a:t>);</a:t>
+            </a:r>
+          </a:p>
+          <a:p>
+            <a:pPr marL="0" indent="0" lvl="0">
+              <a:lnSpc>
+                <a:spcPct val="104000"/>
+              </a:lnSpc>
+              <a:buNone/>
+            </a:pPr>
+            <a:r>
+              <a:rPr lang="zh-CN" sz="1056" dirty="0">
+                <a:solidFill>
+                  <a:srgbClr val="1A1A18"/>
+                </a:solidFill>
+                <a:latin typeface="Noto Sans Mono CJK SC"/>
+                <a:ea typeface="Noto Sans Mono CJK SC"/>
+                <a:cs typeface="Noto Sans Mono CJK SC"/>
+              </a:rPr>
+              <a:t>    }</a:t>
+            </a:r>
+          </a:p>
+          <a:p>
+            <a:pPr marL="0" indent="0" lvl="0">
+              <a:lnSpc>
+                <a:spcPct val="104000"/>
+              </a:lnSpc>
+              <a:buNone/>
+            </a:pPr>
+            <a:r>
+              <a:rPr lang="zh-CN" sz="1056" dirty="0">
+                <a:solidFill>
+                  <a:srgbClr val="1A1A18"/>
+                </a:solidFill>
+                <a:latin typeface="Noto Sans Mono CJK SC"/>
+                <a:ea typeface="Noto Sans Mono CJK SC"/>
+                <a:cs typeface="Noto Sans Mono CJK SC"/>
+              </a:rPr>
+              <a:t>    players_[player] = value;</a:t>
+            </a:r>
+          </a:p>
+          <a:p>
+            <a:pPr marL="0" indent="0" lvl="0">
+              <a:lnSpc>
+                <a:spcPct val="104000"/>
+              </a:lnSpc>
+              <a:buNone/>
+            </a:pPr>
+            <a:r>
+              <a:rPr lang="zh-CN" sz="1056" dirty="0">
+                <a:solidFill>
+                  <a:srgbClr val="1A1A18"/>
+                </a:solidFill>
+                <a:latin typeface="Noto Sans Mono CJK SC"/>
+                <a:ea typeface="Noto Sans Mono CJK SC"/>
+                <a:cs typeface="Noto Sans Mono CJK SC"/>
+              </a:rPr>
+              <a:t>    subtree_winner_[leaf_base_ + player] = player;</a:t>
+            </a:r>
+          </a:p>
+          <a:p>
+            <a:pPr marL="0" indent="0" lvl="0">
+              <a:lnSpc>
+                <a:spcPct val="104000"/>
+              </a:lnSpc>
+              <a:buNone/>
+            </a:pPr>
+            <a:r>
+              <a:rPr lang="zh-CN" sz="1056" dirty="0">
+                <a:solidFill>
+                  <a:srgbClr val="1A1A18"/>
+                </a:solidFill>
+                <a:latin typeface="Noto Sans Mono CJK SC"/>
+                <a:ea typeface="Noto Sans Mono CJK SC"/>
+                <a:cs typeface="Noto Sans Mono CJK SC"/>
+              </a:rPr>
+              <a:t>    </a:t>
+            </a:r>
+            <a:r>
+              <a:rPr lang="zh-CN" sz="1056" dirty="0">
+                <a:solidFill>
+                  <a:srgbClr val="8A4B2A"/>
+                </a:solidFill>
+                <a:latin typeface="Noto Sans Mono CJK SC"/>
+                <a:ea typeface="Noto Sans Mono CJK SC"/>
+                <a:cs typeface="Noto Sans Mono CJK SC"/>
+              </a:rPr>
+              <a:t>for</a:t>
+            </a:r>
+            <a:r>
+              <a:rPr lang="zh-CN" sz="1056" dirty="0">
+                <a:solidFill>
+                  <a:srgbClr val="1A1A18"/>
+                </a:solidFill>
+                <a:latin typeface="Noto Sans Mono CJK SC"/>
+                <a:ea typeface="Noto Sans Mono CJK SC"/>
+                <a:cs typeface="Noto Sans Mono CJK SC"/>
+              </a:rPr>
+              <a:t> (std::</a:t>
+            </a:r>
+            <a:r>
+              <a:rPr lang="zh-CN" sz="1056" dirty="0">
+                <a:solidFill>
+                  <a:srgbClr val="2C6B57"/>
+                </a:solidFill>
+                <a:latin typeface="Noto Sans Mono CJK SC"/>
+                <a:ea typeface="Noto Sans Mono CJK SC"/>
+                <a:cs typeface="Noto Sans Mono CJK SC"/>
+              </a:rPr>
+              <a:t>size_t</a:t>
+            </a:r>
+            <a:r>
+              <a:rPr lang="zh-CN" sz="1056" dirty="0">
+                <a:solidFill>
+                  <a:srgbClr val="1A1A18"/>
+                </a:solidFill>
+                <a:latin typeface="Noto Sans Mono CJK SC"/>
+                <a:ea typeface="Noto Sans Mono CJK SC"/>
+                <a:cs typeface="Noto Sans Mono CJK SC"/>
+              </a:rPr>
+              <a:t> node = (leaf_base_ + player) / </a:t>
+            </a:r>
+            <a:r>
+              <a:rPr lang="zh-CN" sz="1056" dirty="0">
+                <a:solidFill>
+                  <a:srgbClr val="4A5AA8"/>
+                </a:solidFill>
+                <a:latin typeface="Noto Sans Mono CJK SC"/>
+                <a:ea typeface="Noto Sans Mono CJK SC"/>
+                <a:cs typeface="Noto Sans Mono CJK SC"/>
+              </a:rPr>
+              <a:t>2</a:t>
+            </a:r>
+            <a:r>
+              <a:rPr lang="zh-CN" sz="1056" dirty="0">
+                <a:solidFill>
+                  <a:srgbClr val="1A1A18"/>
+                </a:solidFill>
+                <a:latin typeface="Noto Sans Mono CJK SC"/>
+                <a:ea typeface="Noto Sans Mono CJK SC"/>
+                <a:cs typeface="Noto Sans Mono CJK SC"/>
+              </a:rPr>
+              <a:t>; node &gt; </a:t>
+            </a:r>
+            <a:r>
+              <a:rPr lang="zh-CN" sz="1056" dirty="0">
+                <a:solidFill>
+                  <a:srgbClr val="4A5AA8"/>
+                </a:solidFill>
+                <a:latin typeface="Noto Sans Mono CJK SC"/>
+                <a:ea typeface="Noto Sans Mono CJK SC"/>
+                <a:cs typeface="Noto Sans Mono CJK SC"/>
+              </a:rPr>
+              <a:t>0</a:t>
+            </a:r>
+            <a:r>
+              <a:rPr lang="zh-CN" sz="1056" dirty="0">
+                <a:solidFill>
+                  <a:srgbClr val="1A1A18"/>
+                </a:solidFill>
+                <a:latin typeface="Noto Sans Mono CJK SC"/>
+                <a:ea typeface="Noto Sans Mono CJK SC"/>
+                <a:cs typeface="Noto Sans Mono CJK SC"/>
+              </a:rPr>
+              <a:t>; node /= </a:t>
+            </a:r>
+            <a:r>
+              <a:rPr lang="zh-CN" sz="1056" dirty="0">
+                <a:solidFill>
+                  <a:srgbClr val="4A5AA8"/>
+                </a:solidFill>
+                <a:latin typeface="Noto Sans Mono CJK SC"/>
+                <a:ea typeface="Noto Sans Mono CJK SC"/>
+                <a:cs typeface="Noto Sans Mono CJK SC"/>
+              </a:rPr>
+              <a:t>2</a:t>
+            </a:r>
+            <a:r>
+              <a:rPr lang="zh-CN" sz="1056" dirty="0">
+                <a:solidFill>
+                  <a:srgbClr val="1A1A18"/>
+                </a:solidFill>
+                <a:latin typeface="Noto Sans Mono CJK SC"/>
+                <a:ea typeface="Noto Sans Mono CJK SC"/>
+                <a:cs typeface="Noto Sans Mono CJK SC"/>
+              </a:rPr>
+              <a:t>) {</a:t>
+            </a:r>
+          </a:p>
+          <a:p>
+            <a:pPr marL="0" indent="0" lvl="0">
+              <a:lnSpc>
+                <a:spcPct val="104000"/>
+              </a:lnSpc>
+              <a:buNone/>
+            </a:pPr>
+            <a:r>
+              <a:rPr lang="zh-CN" sz="1056" dirty="0">
+                <a:solidFill>
+                  <a:srgbClr val="1A1A18"/>
+                </a:solidFill>
+                <a:latin typeface="Noto Sans Mono CJK SC"/>
+                <a:ea typeface="Noto Sans Mono CJK SC"/>
+                <a:cs typeface="Noto Sans Mono CJK SC"/>
+              </a:rPr>
+              <a:t>        replay_node(node);</a:t>
+            </a:r>
+          </a:p>
+          <a:p>
+            <a:pPr marL="0" indent="0" lvl="0">
+              <a:lnSpc>
+                <a:spcPct val="104000"/>
+              </a:lnSpc>
+              <a:buNone/>
+            </a:pPr>
+            <a:r>
+              <a:rPr lang="zh-CN" sz="1056" dirty="0">
+                <a:solidFill>
+                  <a:srgbClr val="1A1A18"/>
+                </a:solidFill>
+                <a:latin typeface="Noto Sans Mono CJK SC"/>
+                <a:ea typeface="Noto Sans Mono CJK SC"/>
+                <a:cs typeface="Noto Sans Mono CJK SC"/>
+              </a:rPr>
+              <a:t>    }</a:t>
+            </a:r>
+          </a:p>
+          <a:p>
+            <a:pPr marL="0" indent="0" lvl="0">
+              <a:lnSpc>
+                <a:spcPct val="104000"/>
+              </a:lnSpc>
+              <a:buNone/>
+            </a:pPr>
+            <a:r>
+              <a:rPr lang="zh-CN" sz="1056" dirty="0">
+                <a:solidFill>
+                  <a:srgbClr val="1A1A18"/>
+                </a:solidFill>
+                <a:latin typeface="Noto Sans Mono CJK SC"/>
+                <a:ea typeface="Noto Sans Mono CJK SC"/>
+                <a:cs typeface="Noto Sans Mono CJK SC"/>
+              </a:rPr>
+              <a:t>    champion_ = subtree_winner_[</a:t>
+            </a:r>
+            <a:r>
+              <a:rPr lang="zh-CN" sz="1056" dirty="0">
+                <a:solidFill>
+                  <a:srgbClr val="4A5AA8"/>
+                </a:solidFill>
+                <a:latin typeface="Noto Sans Mono CJK SC"/>
+                <a:ea typeface="Noto Sans Mono CJK SC"/>
+                <a:cs typeface="Noto Sans Mono CJK SC"/>
+              </a:rPr>
+              <a:t>1</a:t>
+            </a:r>
+            <a:r>
+              <a:rPr lang="zh-CN" sz="1056" dirty="0">
+                <a:solidFill>
+                  <a:srgbClr val="1A1A18"/>
+                </a:solidFill>
+                <a:latin typeface="Noto Sans Mono CJK SC"/>
+                <a:ea typeface="Noto Sans Mono CJK SC"/>
+                <a:cs typeface="Noto Sans Mono CJK SC"/>
+              </a:rPr>
+              <a:t>];</a:t>
+            </a:r>
+          </a:p>
+          <a:p>
+            <a:pPr marL="0" indent="0" lvl="0">
+              <a:lnSpc>
+                <a:spcPct val="104000"/>
+              </a:lnSpc>
+              <a:buNone/>
+            </a:pPr>
+            <a:r>
+              <a:rPr lang="zh-CN" sz="1056" dirty="0">
                 <a:solidFill>
                   <a:srgbClr val="1A1A18"/>
                 </a:solidFill>
@@ -5763,7 +6243,7 @@
                 <a:ea typeface="Noto Sans CJK SC"/>
                 <a:cs typeface="Segoe UI"/>
               </a:rPr>
-              <a:t>16 / 32</a:t>
+              <a:t>16 / 31</a:t>
             </a:r>
           </a:p>
         </p:txBody>
@@ -5827,7 +6307,7 @@
                 <a:ea typeface="Noto Sans CJK SC"/>
                 <a:cs typeface="Segoe UI"/>
               </a:rPr>
-              <a:t>赢者树的重构（续）</a:t>
+              <a:t>四路归并：赢家路径怎样更新</a:t>
             </a:r>
           </a:p>
         </p:txBody>
@@ -5861,14 +6341,78 @@
       </p:sp>
       <p:sp>
         <p:nvSpPr>
-          <p:cNvPr id="4" name="代码"/>
+          <p:cNvPr id="4" name="正文"/>
           <p:cNvSpPr txBox="1"/>
           <p:nvPr/>
         </p:nvSpPr>
         <p:spPr>
           <a:xfrm>
-            <a:off x="566928" y="2012188"/>
-            <a:ext cx="11058144" cy="3434486"/>
+            <a:off x="566928" y="1946148"/>
+            <a:ext cx="11058144" cy="398221"/>
+          </a:xfrm>
+          <a:prstGeom prst="rect">
+            <a:avLst/>
+          </a:prstGeom>
+          <a:noFill/>
+        </p:spPr>
+        <p:txBody>
+          <a:bodyPr wrap="square" lIns="0" tIns="0" rIns="0" bIns="0">
+            <a:noAutofit/>
+          </a:bodyPr>
+          <a:lstStyle/>
+          <a:p>
+            <a:pPr marL="0" indent="0" lvl="0">
+              <a:lnSpc>
+                <a:spcPct val="100000"/>
+              </a:lnSpc>
+              <a:buNone/>
+            </a:pPr>
+            <a:r>
+              <a:rPr lang="zh-CN" sz="2340" dirty="0">
+                <a:solidFill>
+                  <a:srgbClr val="1A1A18"/>
+                </a:solidFill>
+                <a:latin typeface="Segoe UI"/>
+                <a:ea typeface="Noto Sans CJK SC"/>
+                <a:cs typeface="Segoe UI"/>
+              </a:rPr>
+              <a:t>四路当前值为 </a:t>
+            </a:r>
+            <a:r>
+              <a:rPr lang="zh-CN" sz="2340" dirty="0">
+                <a:solidFill>
+                  <a:srgbClr val="2C6B57"/>
+                </a:solidFill>
+                <a:latin typeface="Noto Sans Mono CJK SC"/>
+                <a:ea typeface="Noto Sans Mono CJK SC"/>
+                <a:cs typeface="Noto Sans Mono CJK SC"/>
+              </a:rPr>
+              <a:t>[4, 7, 2, 9]</a:t>
+            </a:r>
+            <a:r>
+              <a:rPr lang="zh-CN" sz="2340" dirty="0">
+                <a:solidFill>
+                  <a:srgbClr val="1A1A18"/>
+                </a:solidFill>
+                <a:latin typeface="Segoe UI"/>
+                <a:ea typeface="Noto Sans CJK SC"/>
+                <a:cs typeface="Segoe UI"/>
+              </a:rPr>
+              <a:t>：</a:t>
+            </a:r>
+          </a:p>
+        </p:txBody>
+      </p:sp>
+      <p:sp>
+        <p:nvSpPr>
+          <p:cNvPr id="5" name="代码"/>
+          <p:cNvSpPr txBox="1"/>
+          <p:nvPr/>
+        </p:nvSpPr>
+        <p:spPr>
+          <a:xfrm>
+            <a:off x="566928" y="2476449"/>
+            <a:ext cx="11058144" cy="1548384"/>
           </a:xfrm>
           <a:prstGeom prst="roundRect">
             <a:avLst>
@@ -5905,7 +6449,7 @@
                 <a:ea typeface="Noto Sans Mono CJK SC"/>
                 <a:cs typeface="Noto Sans Mono CJK SC"/>
               </a:rPr>
-              <a:t> </a:t>
+              <a:t>首轮: min(4,7)=4, min(2,9)=2, min(4,2)=2</a:t>
             </a:r>
           </a:p>
           <a:p>
@@ -5918,14 +6462,22 @@
             <a:r>
               <a:rPr lang="zh-CN" sz="1560" dirty="0">
                 <a:solidFill>
-                  <a:srgbClr val="2C6B57"/>
-                </a:solidFill>
-                <a:latin typeface="Noto Sans Mono CJK SC"/>
-                <a:ea typeface="Noto Sans Mono CJK SC"/>
-                <a:cs typeface="Noto Sans Mono CJK SC"/>
-              </a:rPr>
-              <a:t>void</a:t>
-            </a:r>
+                  <a:srgbClr val="1A1A18"/>
+                </a:solidFill>
+                <a:latin typeface="Noto Sans Mono CJK SC"/>
+                <a:ea typeface="Noto Sans Mono CJK SC"/>
+                <a:cs typeface="Noto Sans Mono CJK SC"/>
+              </a:rPr>
+              <a:t>输出: 第 2 路的 2</a:t>
+            </a:r>
+          </a:p>
+          <a:p>
+            <a:pPr marL="0" indent="0" lvl="0">
+              <a:lnSpc>
+                <a:spcPct val="104000"/>
+              </a:lnSpc>
+              <a:buNone/>
+            </a:pPr>
             <a:r>
               <a:rPr lang="zh-CN" sz="1560" dirty="0">
                 <a:solidFill>
@@ -5935,19 +6487,35 @@
                 <a:ea typeface="Noto Sans Mono CJK SC"/>
                 <a:cs typeface="Noto Sans Mono CJK SC"/>
               </a:rPr>
-              <a:t> replace(std::</a:t>
-            </a:r>
+              <a:t>补入: 第 2 路变成 8，候选 [4,7,8,9]</a:t>
+            </a:r>
+          </a:p>
+          <a:p>
+            <a:pPr marL="0" indent="0" lvl="0">
+              <a:lnSpc>
+                <a:spcPct val="104000"/>
+              </a:lnSpc>
+              <a:buNone/>
+            </a:pPr>
             <a:r>
               <a:rPr lang="zh-CN" sz="1560" dirty="0">
                 <a:solidFill>
-                  <a:srgbClr val="2C6B57"/>
-                </a:solidFill>
-                <a:latin typeface="Noto Sans Mono CJK SC"/>
-                <a:ea typeface="Noto Sans Mono CJK SC"/>
-                <a:cs typeface="Noto Sans Mono CJK SC"/>
-              </a:rPr>
-              <a:t>size_t</a:t>
-            </a:r>
+                  <a:srgbClr val="1A1A18"/>
+                </a:solidFill>
+                <a:latin typeface="Noto Sans Mono CJK SC"/>
+                <a:ea typeface="Noto Sans Mono CJK SC"/>
+                <a:cs typeface="Noto Sans Mono CJK SC"/>
+              </a:rPr>
+              <a:t>重赛: 只重算“第 2 路叶子 → 根”的两场</a:t>
+            </a:r>
+          </a:p>
+          <a:p>
+            <a:pPr marL="0" indent="0" lvl="0">
+              <a:lnSpc>
+                <a:spcPct val="104000"/>
+              </a:lnSpc>
+              <a:buNone/>
+            </a:pPr>
             <a:r>
               <a:rPr lang="zh-CN" sz="1560" dirty="0">
                 <a:solidFill>
@@ -5957,431 +6525,21 @@
                 <a:ea typeface="Noto Sans Mono CJK SC"/>
                 <a:cs typeface="Noto Sans Mono CJK SC"/>
               </a:rPr>
-              <a:t> player, </a:t>
-            </a:r>
-            <a:r>
-              <a:rPr lang="zh-CN" sz="1560" dirty="0">
-                <a:solidFill>
-                  <a:srgbClr val="2C6B57"/>
-                </a:solidFill>
-                <a:latin typeface="Noto Sans Mono CJK SC"/>
-                <a:ea typeface="Noto Sans Mono CJK SC"/>
-                <a:cs typeface="Noto Sans Mono CJK SC"/>
-              </a:rPr>
-              <a:t>int</a:t>
-            </a:r>
-            <a:r>
-              <a:rPr lang="zh-CN" sz="1560" dirty="0">
-                <a:solidFill>
-                  <a:srgbClr val="1A1A18"/>
-                </a:solidFill>
-                <a:latin typeface="Noto Sans Mono CJK SC"/>
-                <a:ea typeface="Noto Sans Mono CJK SC"/>
-                <a:cs typeface="Noto Sans Mono CJK SC"/>
-              </a:rPr>
-              <a:t> value) {</a:t>
-            </a:r>
-          </a:p>
-          <a:p>
-            <a:pPr marL="0" indent="0" lvl="0">
-              <a:lnSpc>
-                <a:spcPct val="104000"/>
-              </a:lnSpc>
-              <a:buNone/>
-            </a:pPr>
-            <a:r>
-              <a:rPr lang="zh-CN" sz="1560" dirty="0">
-                <a:solidFill>
-                  <a:srgbClr val="1A1A18"/>
-                </a:solidFill>
-                <a:latin typeface="Noto Sans Mono CJK SC"/>
-                <a:ea typeface="Noto Sans Mono CJK SC"/>
-                <a:cs typeface="Noto Sans Mono CJK SC"/>
-              </a:rPr>
-              <a:t>    </a:t>
-            </a:r>
-            <a:r>
-              <a:rPr lang="zh-CN" sz="1560" dirty="0">
-                <a:solidFill>
-                  <a:srgbClr val="8A4B2A"/>
-                </a:solidFill>
-                <a:latin typeface="Noto Sans Mono CJK SC"/>
-                <a:ea typeface="Noto Sans Mono CJK SC"/>
-                <a:cs typeface="Noto Sans Mono CJK SC"/>
-              </a:rPr>
-              <a:t>if</a:t>
-            </a:r>
-            <a:r>
-              <a:rPr lang="zh-CN" sz="1560" dirty="0">
-                <a:solidFill>
-                  <a:srgbClr val="1A1A18"/>
-                </a:solidFill>
-                <a:latin typeface="Noto Sans Mono CJK SC"/>
-                <a:ea typeface="Noto Sans Mono CJK SC"/>
-                <a:cs typeface="Noto Sans Mono CJK SC"/>
-              </a:rPr>
-              <a:t> (player &gt;= players_.size()) {</a:t>
-            </a:r>
-          </a:p>
-          <a:p>
-            <a:pPr marL="0" indent="0" lvl="0">
-              <a:lnSpc>
-                <a:spcPct val="104000"/>
-              </a:lnSpc>
-              <a:buNone/>
-            </a:pPr>
-            <a:r>
-              <a:rPr lang="zh-CN" sz="1560" dirty="0">
-                <a:solidFill>
-                  <a:srgbClr val="1A1A18"/>
-                </a:solidFill>
-                <a:latin typeface="Noto Sans Mono CJK SC"/>
-                <a:ea typeface="Noto Sans Mono CJK SC"/>
-                <a:cs typeface="Noto Sans Mono CJK SC"/>
-              </a:rPr>
-              <a:t>        </a:t>
-            </a:r>
-            <a:r>
-              <a:rPr lang="zh-CN" sz="1560" dirty="0">
-                <a:solidFill>
-                  <a:srgbClr val="8A4B2A"/>
-                </a:solidFill>
-                <a:latin typeface="Noto Sans Mono CJK SC"/>
-                <a:ea typeface="Noto Sans Mono CJK SC"/>
-                <a:cs typeface="Noto Sans Mono CJK SC"/>
-              </a:rPr>
-              <a:t>throw</a:t>
-            </a:r>
-            <a:r>
-              <a:rPr lang="zh-CN" sz="1560" dirty="0">
-                <a:solidFill>
-                  <a:srgbClr val="1A1A18"/>
-                </a:solidFill>
-                <a:latin typeface="Noto Sans Mono CJK SC"/>
-                <a:ea typeface="Noto Sans Mono CJK SC"/>
-                <a:cs typeface="Noto Sans Mono CJK SC"/>
-              </a:rPr>
-              <a:t> std::out_of_range(</a:t>
-            </a:r>
-            <a:r>
-              <a:rPr lang="zh-CN" sz="1560" dirty="0">
-                <a:solidFill>
-                  <a:srgbClr val="7A5C1E"/>
-                </a:solidFill>
-                <a:latin typeface="Noto Sans Mono CJK SC"/>
-                <a:ea typeface="Noto Sans Mono CJK SC"/>
-                <a:cs typeface="Noto Sans Mono CJK SC"/>
-              </a:rPr>
-              <a:t>"tournament player"</a:t>
-            </a:r>
-            <a:r>
-              <a:rPr lang="zh-CN" sz="1560" dirty="0">
-                <a:solidFill>
-                  <a:srgbClr val="1A1A18"/>
-                </a:solidFill>
-                <a:latin typeface="Noto Sans Mono CJK SC"/>
-                <a:ea typeface="Noto Sans Mono CJK SC"/>
-                <a:cs typeface="Noto Sans Mono CJK SC"/>
-              </a:rPr>
-              <a:t>);</a:t>
-            </a:r>
-          </a:p>
-          <a:p>
-            <a:pPr marL="0" indent="0" lvl="0">
-              <a:lnSpc>
-                <a:spcPct val="104000"/>
-              </a:lnSpc>
-              <a:buNone/>
-            </a:pPr>
-            <a:r>
-              <a:rPr lang="zh-CN" sz="1560" dirty="0">
-                <a:solidFill>
-                  <a:srgbClr val="1A1A18"/>
-                </a:solidFill>
-                <a:latin typeface="Noto Sans Mono CJK SC"/>
-                <a:ea typeface="Noto Sans Mono CJK SC"/>
-                <a:cs typeface="Noto Sans Mono CJK SC"/>
-              </a:rPr>
-              <a:t>    }</a:t>
-            </a:r>
-          </a:p>
-          <a:p>
-            <a:pPr marL="0" indent="0" lvl="0">
-              <a:lnSpc>
-                <a:spcPct val="104000"/>
-              </a:lnSpc>
-              <a:buNone/>
-            </a:pPr>
-            <a:r>
-              <a:rPr lang="zh-CN" sz="1560" dirty="0">
-                <a:solidFill>
-                  <a:srgbClr val="1A1A18"/>
-                </a:solidFill>
-                <a:latin typeface="Noto Sans Mono CJK SC"/>
-                <a:ea typeface="Noto Sans Mono CJK SC"/>
-                <a:cs typeface="Noto Sans Mono CJK SC"/>
-              </a:rPr>
-              <a:t>    players_[player] = value;</a:t>
-            </a:r>
-          </a:p>
-          <a:p>
-            <a:pPr marL="0" indent="0" lvl="0">
-              <a:lnSpc>
-                <a:spcPct val="104000"/>
-              </a:lnSpc>
-              <a:buNone/>
-            </a:pPr>
-            <a:r>
-              <a:rPr lang="zh-CN" sz="1560" dirty="0">
-                <a:solidFill>
-                  <a:srgbClr val="1A1A18"/>
-                </a:solidFill>
-                <a:latin typeface="Noto Sans Mono CJK SC"/>
-                <a:ea typeface="Noto Sans Mono CJK SC"/>
-                <a:cs typeface="Noto Sans Mono CJK SC"/>
-              </a:rPr>
-              <a:t>    subtree_winner_[leaf_base_ + player] = player;</a:t>
-            </a:r>
-          </a:p>
-          <a:p>
-            <a:pPr marL="0" indent="0" lvl="0">
-              <a:lnSpc>
-                <a:spcPct val="104000"/>
-              </a:lnSpc>
-              <a:buNone/>
-            </a:pPr>
-            <a:r>
-              <a:rPr lang="zh-CN" sz="1560" dirty="0">
-                <a:solidFill>
-                  <a:srgbClr val="1A1A18"/>
-                </a:solidFill>
-                <a:latin typeface="Noto Sans Mono CJK SC"/>
-                <a:ea typeface="Noto Sans Mono CJK SC"/>
-                <a:cs typeface="Noto Sans Mono CJK SC"/>
-              </a:rPr>
-              <a:t>    </a:t>
-            </a:r>
-            <a:r>
-              <a:rPr lang="zh-CN" sz="1560" dirty="0">
-                <a:solidFill>
-                  <a:srgbClr val="8A4B2A"/>
-                </a:solidFill>
-                <a:latin typeface="Noto Sans Mono CJK SC"/>
-                <a:ea typeface="Noto Sans Mono CJK SC"/>
-                <a:cs typeface="Noto Sans Mono CJK SC"/>
-              </a:rPr>
-              <a:t>for</a:t>
-            </a:r>
-            <a:r>
-              <a:rPr lang="zh-CN" sz="1560" dirty="0">
-                <a:solidFill>
-                  <a:srgbClr val="1A1A18"/>
-                </a:solidFill>
-                <a:latin typeface="Noto Sans Mono CJK SC"/>
-                <a:ea typeface="Noto Sans Mono CJK SC"/>
-                <a:cs typeface="Noto Sans Mono CJK SC"/>
-              </a:rPr>
-              <a:t> (std::</a:t>
-            </a:r>
-            <a:r>
-              <a:rPr lang="zh-CN" sz="1560" dirty="0">
-                <a:solidFill>
-                  <a:srgbClr val="2C6B57"/>
-                </a:solidFill>
-                <a:latin typeface="Noto Sans Mono CJK SC"/>
-                <a:ea typeface="Noto Sans Mono CJK SC"/>
-                <a:cs typeface="Noto Sans Mono CJK SC"/>
-              </a:rPr>
-              <a:t>size_t</a:t>
-            </a:r>
-            <a:r>
-              <a:rPr lang="zh-CN" sz="1560" dirty="0">
-                <a:solidFill>
-                  <a:srgbClr val="1A1A18"/>
-                </a:solidFill>
-                <a:latin typeface="Noto Sans Mono CJK SC"/>
-                <a:ea typeface="Noto Sans Mono CJK SC"/>
-                <a:cs typeface="Noto Sans Mono CJK SC"/>
-              </a:rPr>
-              <a:t> node = (leaf_base_ + player) / </a:t>
-            </a:r>
-            <a:r>
-              <a:rPr lang="zh-CN" sz="1560" dirty="0">
-                <a:solidFill>
-                  <a:srgbClr val="4A5AA8"/>
-                </a:solidFill>
-                <a:latin typeface="Noto Sans Mono CJK SC"/>
-                <a:ea typeface="Noto Sans Mono CJK SC"/>
-                <a:cs typeface="Noto Sans Mono CJK SC"/>
-              </a:rPr>
-              <a:t>2</a:t>
-            </a:r>
-            <a:r>
-              <a:rPr lang="zh-CN" sz="1560" dirty="0">
-                <a:solidFill>
-                  <a:srgbClr val="1A1A18"/>
-                </a:solidFill>
-                <a:latin typeface="Noto Sans Mono CJK SC"/>
-                <a:ea typeface="Noto Sans Mono CJK SC"/>
-                <a:cs typeface="Noto Sans Mono CJK SC"/>
-              </a:rPr>
-              <a:t>; node &gt; </a:t>
-            </a:r>
-            <a:r>
-              <a:rPr lang="zh-CN" sz="1560" dirty="0">
-                <a:solidFill>
-                  <a:srgbClr val="4A5AA8"/>
-                </a:solidFill>
-                <a:latin typeface="Noto Sans Mono CJK SC"/>
-                <a:ea typeface="Noto Sans Mono CJK SC"/>
-                <a:cs typeface="Noto Sans Mono CJK SC"/>
-              </a:rPr>
-              <a:t>0</a:t>
-            </a:r>
-            <a:r>
-              <a:rPr lang="zh-CN" sz="1560" dirty="0">
-                <a:solidFill>
-                  <a:srgbClr val="1A1A18"/>
-                </a:solidFill>
-                <a:latin typeface="Noto Sans Mono CJK SC"/>
-                <a:ea typeface="Noto Sans Mono CJK SC"/>
-                <a:cs typeface="Noto Sans Mono CJK SC"/>
-              </a:rPr>
-              <a:t>; node /= </a:t>
-            </a:r>
-            <a:r>
-              <a:rPr lang="zh-CN" sz="1560" dirty="0">
-                <a:solidFill>
-                  <a:srgbClr val="4A5AA8"/>
-                </a:solidFill>
-                <a:latin typeface="Noto Sans Mono CJK SC"/>
-                <a:ea typeface="Noto Sans Mono CJK SC"/>
-                <a:cs typeface="Noto Sans Mono CJK SC"/>
-              </a:rPr>
-              <a:t>2</a:t>
-            </a:r>
-            <a:r>
-              <a:rPr lang="zh-CN" sz="1560" dirty="0">
-                <a:solidFill>
-                  <a:srgbClr val="1A1A18"/>
-                </a:solidFill>
-                <a:latin typeface="Noto Sans Mono CJK SC"/>
-                <a:ea typeface="Noto Sans Mono CJK SC"/>
-                <a:cs typeface="Noto Sans Mono CJK SC"/>
-              </a:rPr>
-              <a:t>) {</a:t>
-            </a:r>
-          </a:p>
-          <a:p>
-            <a:pPr marL="0" indent="0" lvl="0">
-              <a:lnSpc>
-                <a:spcPct val="104000"/>
-              </a:lnSpc>
-              <a:buNone/>
-            </a:pPr>
-            <a:r>
-              <a:rPr lang="zh-CN" sz="1560" dirty="0">
-                <a:solidFill>
-                  <a:srgbClr val="1A1A18"/>
-                </a:solidFill>
-                <a:latin typeface="Noto Sans Mono CJK SC"/>
-                <a:ea typeface="Noto Sans Mono CJK SC"/>
-                <a:cs typeface="Noto Sans Mono CJK SC"/>
-              </a:rPr>
-              <a:t>        replay_node(node);</a:t>
-            </a:r>
-          </a:p>
-          <a:p>
-            <a:pPr marL="0" indent="0" lvl="0">
-              <a:lnSpc>
-                <a:spcPct val="104000"/>
-              </a:lnSpc>
-              <a:buNone/>
-            </a:pPr>
-            <a:r>
-              <a:rPr lang="zh-CN" sz="1560" dirty="0">
-                <a:solidFill>
-                  <a:srgbClr val="1A1A18"/>
-                </a:solidFill>
-                <a:latin typeface="Noto Sans Mono CJK SC"/>
-                <a:ea typeface="Noto Sans Mono CJK SC"/>
-                <a:cs typeface="Noto Sans Mono CJK SC"/>
-              </a:rPr>
-              <a:t>    }</a:t>
-            </a:r>
-          </a:p>
-          <a:p>
-            <a:pPr marL="0" indent="0" lvl="0">
-              <a:lnSpc>
-                <a:spcPct val="104000"/>
-              </a:lnSpc>
-              <a:buNone/>
-            </a:pPr>
-            <a:r>
-              <a:rPr lang="zh-CN" sz="1560" dirty="0">
-                <a:solidFill>
-                  <a:srgbClr val="1A1A18"/>
-                </a:solidFill>
-                <a:latin typeface="Noto Sans Mono CJK SC"/>
-                <a:ea typeface="Noto Sans Mono CJK SC"/>
-                <a:cs typeface="Noto Sans Mono CJK SC"/>
-              </a:rPr>
-              <a:t>    champion_ = subtree_winner_[</a:t>
-            </a:r>
-            <a:r>
-              <a:rPr lang="zh-CN" sz="1560" dirty="0">
-                <a:solidFill>
-                  <a:srgbClr val="4A5AA8"/>
-                </a:solidFill>
-                <a:latin typeface="Noto Sans Mono CJK SC"/>
-                <a:ea typeface="Noto Sans Mono CJK SC"/>
-                <a:cs typeface="Noto Sans Mono CJK SC"/>
-              </a:rPr>
-              <a:t>1</a:t>
-            </a:r>
-            <a:r>
-              <a:rPr lang="zh-CN" sz="1560" dirty="0">
-                <a:solidFill>
-                  <a:srgbClr val="1A1A18"/>
-                </a:solidFill>
-                <a:latin typeface="Noto Sans Mono CJK SC"/>
-                <a:ea typeface="Noto Sans Mono CJK SC"/>
-                <a:cs typeface="Noto Sans Mono CJK SC"/>
-              </a:rPr>
-              <a:t>];</a:t>
-            </a:r>
-          </a:p>
-          <a:p>
-            <a:pPr marL="0" indent="0" lvl="0">
-              <a:lnSpc>
-                <a:spcPct val="104000"/>
-              </a:lnSpc>
-              <a:buNone/>
-            </a:pPr>
-            <a:r>
-              <a:rPr lang="zh-CN" sz="1560" dirty="0">
-                <a:solidFill>
-                  <a:srgbClr val="1A1A18"/>
-                </a:solidFill>
-                <a:latin typeface="Noto Sans Mono CJK SC"/>
-                <a:ea typeface="Noto Sans Mono CJK SC"/>
-                <a:cs typeface="Noto Sans Mono CJK SC"/>
-              </a:rPr>
-              <a:t>}</a:t>
-            </a:r>
-          </a:p>
-        </p:txBody>
-      </p:sp>
-      <p:sp>
-        <p:nvSpPr>
-          <p:cNvPr id="5" name="页脚"/>
+              <a:t>结果: 新冠军为 4</a:t>
+            </a:r>
+          </a:p>
+        </p:txBody>
+      </p:sp>
+      <p:sp>
+        <p:nvSpPr>
+          <p:cNvPr id="6" name="正文"/>
           <p:cNvSpPr txBox="1"/>
           <p:nvPr/>
         </p:nvSpPr>
         <p:spPr>
           <a:xfrm>
-            <a:off x="566928" y="6419088"/>
-            <a:ext cx="7740700" cy="274320"/>
+            <a:off x="566928" y="4090873"/>
+            <a:ext cx="11058144" cy="398221"/>
           </a:xfrm>
           <a:prstGeom prst="rect">
             <a:avLst/>
@@ -6401,29 +6559,73 @@
               <a:buNone/>
             </a:pPr>
             <a:r>
-              <a:rPr lang="zh-CN" sz="1000" dirty="0">
-                <a:solidFill>
-                  <a:srgbClr val="6B6B66"/>
-                </a:solidFill>
-                <a:latin typeface="Segoe UI"/>
-                <a:ea typeface="Noto Sans CJK SC"/>
-                <a:cs typeface="Segoe UI"/>
-              </a:rPr>
-              <a:t>第9章 文件管理和外排序</a:t>
-            </a:r>
-          </a:p>
-        </p:txBody>
-      </p:sp>
-      <p:sp>
-        <p:nvSpPr>
-          <p:cNvPr id="6" name="页码"/>
+              <a:rPr lang="zh-CN" sz="2340" dirty="0">
+                <a:solidFill>
+                  <a:srgbClr val="1A1A18"/>
+                </a:solidFill>
+                <a:latin typeface="Segoe UI"/>
+                <a:ea typeface="Noto Sans CJK SC"/>
+                <a:cs typeface="Segoe UI"/>
+              </a:rPr>
+              <a:t>建树 </a:t>
+            </a:r>
+            <a:r>
+              <a:rPr lang="zh-CN" sz="2340" dirty="0" i="1">
+                <a:solidFill>
+                  <a:srgbClr val="1A1A18"/>
+                </a:solidFill>
+                <a:latin typeface="Segoe UI"/>
+                <a:ea typeface="Noto Sans CJK SC"/>
+                <a:cs typeface="Segoe UI"/>
+              </a:rPr>
+              <a:t>O(k)</a:t>
+            </a:r>
+            <a:r>
+              <a:rPr lang="zh-CN" sz="2340" dirty="0">
+                <a:solidFill>
+                  <a:srgbClr val="1A1A18"/>
+                </a:solidFill>
+                <a:latin typeface="Segoe UI"/>
+                <a:ea typeface="Noto Sans CJK SC"/>
+                <a:cs typeface="Segoe UI"/>
+              </a:rPr>
+              <a:t>；每输出一条只更新一条高为 </a:t>
+            </a:r>
+            <a:r>
+              <a:rPr lang="zh-CN" sz="2340" dirty="0" i="1">
+                <a:solidFill>
+                  <a:srgbClr val="1A1A18"/>
+                </a:solidFill>
+                <a:latin typeface="Segoe UI"/>
+                <a:ea typeface="Noto Sans CJK SC"/>
+                <a:cs typeface="Segoe UI"/>
+              </a:rPr>
+              <a:t>log k</a:t>
+            </a:r>
+            <a:r>
+              <a:rPr lang="zh-CN" sz="2340" dirty="0">
+                <a:solidFill>
+                  <a:srgbClr val="1A1A18"/>
+                </a:solidFill>
+                <a:latin typeface="Segoe UI"/>
+                <a:ea typeface="Noto Sans CJK SC"/>
+                <a:cs typeface="Segoe UI"/>
+              </a:rPr>
+              <a:t> 的路径。</a:t>
+            </a:r>
+          </a:p>
+        </p:txBody>
+      </p:sp>
+      <p:sp>
+        <p:nvSpPr>
+          <p:cNvPr id="7" name="正文"/>
           <p:cNvSpPr txBox="1"/>
           <p:nvPr/>
         </p:nvSpPr>
         <p:spPr>
           <a:xfrm>
-            <a:off x="8307628" y="6419088"/>
-            <a:ext cx="3317443" cy="274320"/>
+            <a:off x="566928" y="4555134"/>
+            <a:ext cx="11058144" cy="398221"/>
           </a:xfrm>
           <a:prstGeom prst="rect">
             <a:avLst/>
@@ -6436,6 +6638,134 @@
           </a:bodyPr>
           <a:lstStyle/>
           <a:p>
+            <a:pPr marL="0" indent="0" lvl="0">
+              <a:lnSpc>
+                <a:spcPct val="100000"/>
+              </a:lnSpc>
+              <a:buNone/>
+            </a:pPr>
+            <a:r>
+              <a:rPr lang="zh-CN" sz="2340" dirty="0">
+                <a:solidFill>
+                  <a:srgbClr val="1A1A18"/>
+                </a:solidFill>
+                <a:latin typeface="Segoe UI"/>
+                <a:ea typeface="Noto Sans CJK SC"/>
+                <a:cs typeface="Segoe UI"/>
+              </a:rPr>
+              <a:t>线性扫描要每次检查全部 </a:t>
+            </a:r>
+            <a:r>
+              <a:rPr lang="zh-CN" sz="2340" dirty="0" i="1">
+                <a:solidFill>
+                  <a:srgbClr val="1A1A18"/>
+                </a:solidFill>
+                <a:latin typeface="Segoe UI"/>
+                <a:ea typeface="Noto Sans CJK SC"/>
+                <a:cs typeface="Segoe UI"/>
+              </a:rPr>
+              <a:t>k</a:t>
+            </a:r>
+            <a:r>
+              <a:rPr lang="zh-CN" sz="2340" dirty="0">
+                <a:solidFill>
+                  <a:srgbClr val="1A1A18"/>
+                </a:solidFill>
+                <a:latin typeface="Segoe UI"/>
+                <a:ea typeface="Noto Sans CJK SC"/>
+                <a:cs typeface="Segoe UI"/>
+              </a:rPr>
+              <a:t> 路，选择树只做 </a:t>
+            </a:r>
+            <a:r>
+              <a:rPr lang="zh-CN" sz="2340" dirty="0" i="1">
+                <a:solidFill>
+                  <a:srgbClr val="1A1A18"/>
+                </a:solidFill>
+                <a:latin typeface="Segoe UI"/>
+                <a:ea typeface="Noto Sans CJK SC"/>
+                <a:cs typeface="Segoe UI"/>
+              </a:rPr>
+              <a:t>O(log k)</a:t>
+            </a:r>
+            <a:r>
+              <a:rPr lang="zh-CN" sz="2340" dirty="0">
+                <a:solidFill>
+                  <a:srgbClr val="1A1A18"/>
+                </a:solidFill>
+                <a:latin typeface="Segoe UI"/>
+                <a:ea typeface="Noto Sans CJK SC"/>
+                <a:cs typeface="Segoe UI"/>
+              </a:rPr>
+              <a:t> 次比较。</a:t>
+            </a:r>
+          </a:p>
+        </p:txBody>
+      </p:sp>
+      <p:sp>
+        <p:nvSpPr>
+          <p:cNvPr id="8" name="页脚"/>
+          <p:cNvSpPr txBox="1"/>
+          <p:nvPr/>
+        </p:nvSpPr>
+        <p:spPr>
+          <a:xfrm>
+            <a:off x="566928" y="6419088"/>
+            <a:ext cx="7740700" cy="274320"/>
+          </a:xfrm>
+          <a:prstGeom prst="rect">
+            <a:avLst/>
+          </a:prstGeom>
+          <a:noFill/>
+        </p:spPr>
+        <p:txBody>
+          <a:bodyPr wrap="square" lIns="0" tIns="0" rIns="0" bIns="0">
+            <a:noAutofit/>
+          </a:bodyPr>
+          <a:lstStyle/>
+          <a:p>
+            <a:pPr marL="0" indent="0" lvl="0">
+              <a:lnSpc>
+                <a:spcPct val="100000"/>
+              </a:lnSpc>
+              <a:buNone/>
+            </a:pPr>
+            <a:r>
+              <a:rPr lang="zh-CN" sz="1000" dirty="0">
+                <a:solidFill>
+                  <a:srgbClr val="6B6B66"/>
+                </a:solidFill>
+                <a:latin typeface="Segoe UI"/>
+                <a:ea typeface="Noto Sans CJK SC"/>
+                <a:cs typeface="Segoe UI"/>
+              </a:rPr>
+              <a:t>第9章 文件管理和外排序</a:t>
+            </a:r>
+          </a:p>
+        </p:txBody>
+      </p:sp>
+      <p:sp>
+        <p:nvSpPr>
+          <p:cNvPr id="9" name="页码"/>
+          <p:cNvSpPr txBox="1"/>
+          <p:nvPr/>
+        </p:nvSpPr>
+        <p:spPr>
+          <a:xfrm>
+            <a:off x="8307628" y="6419088"/>
+            <a:ext cx="3317443" cy="274320"/>
+          </a:xfrm>
+          <a:prstGeom prst="rect">
+            <a:avLst/>
+          </a:prstGeom>
+          <a:noFill/>
+        </p:spPr>
+        <p:txBody>
+          <a:bodyPr wrap="square" lIns="0" tIns="0" rIns="0" bIns="0">
+            <a:noAutofit/>
+          </a:bodyPr>
+          <a:lstStyle/>
+          <a:p>
             <a:pPr marL="0" indent="0" lvl="0" algn="r">
               <a:lnSpc>
                 <a:spcPct val="100000"/>
@@ -6451,7 +6781,7 @@
                 <a:ea typeface="Noto Sans CJK SC"/>
                 <a:cs typeface="Segoe UI"/>
               </a:rPr>
-              <a:t>17 / 32</a:t>
+              <a:t>17 / 31</a:t>
             </a:r>
           </a:p>
         </p:txBody>
@@ -6515,7 +6845,7 @@
                 <a:ea typeface="Noto Sans CJK SC"/>
                 <a:cs typeface="Segoe UI"/>
               </a:rPr>
-              <a:t>四路归并：赢家路径怎样更新</a:t>
+              <a:t>败者树：省掉「看兄弟」</a:t>
             </a:r>
           </a:p>
         </p:txBody>
@@ -6547,16 +6877,40 @@
           <a:p/>
         </p:txBody>
       </p:sp>
-      <p:sp>
-        <p:nvSpPr>
-          <p:cNvPr id="4" name="正文"/>
+      <p:pic>
+        <p:nvPicPr>
+          <p:cNvPr id="4" name="图9.7 8路归并的败者树示例"/>
+          <p:cNvPicPr>
+            <a:picLocks noChangeAspect="1"/>
+          </p:cNvPicPr>
+          <p:nvPr/>
+        </p:nvPicPr>
+        <p:blipFill>
+          <a:blip r:embed="rId100"/>
+          <a:stretch>
+            <a:fillRect/>
+          </a:stretch>
+        </p:blipFill>
+        <p:spPr>
+          <a:xfrm>
+            <a:off x="2862006" y="1229106"/>
+            <a:ext cx="6467987" cy="4684757"/>
+          </a:xfrm>
+          <a:prstGeom prst="rect">
+            <a:avLst/>
+          </a:prstGeom>
+        </p:spPr>
+      </p:pic>
+      <p:sp>
+        <p:nvSpPr>
+          <p:cNvPr id="5" name="图注"/>
           <p:cNvSpPr txBox="1"/>
           <p:nvPr/>
         </p:nvSpPr>
         <p:spPr>
           <a:xfrm>
-            <a:off x="566928" y="1946148"/>
-            <a:ext cx="11058144" cy="398221"/>
+            <a:off x="566928" y="5942818"/>
+            <a:ext cx="11058144" cy="288056"/>
           </a:xfrm>
           <a:prstGeom prst="rect">
             <a:avLst/>
@@ -6569,185 +6923,36 @@
           </a:bodyPr>
           <a:lstStyle/>
           <a:p>
-            <a:pPr marL="0" indent="0" lvl="0">
-              <a:lnSpc>
-                <a:spcPct val="100000"/>
-              </a:lnSpc>
-              <a:buNone/>
-            </a:pPr>
-            <a:r>
-              <a:rPr lang="zh-CN" sz="2340" dirty="0">
-                <a:solidFill>
-                  <a:srgbClr val="1A1A18"/>
-                </a:solidFill>
-                <a:latin typeface="Segoe UI"/>
-                <a:ea typeface="Noto Sans CJK SC"/>
-                <a:cs typeface="Segoe UI"/>
-              </a:rPr>
-              <a:t>四路当前值为 </a:t>
-            </a:r>
-            <a:r>
-              <a:rPr lang="zh-CN" sz="2340" dirty="0">
-                <a:solidFill>
-                  <a:srgbClr val="2C6B57"/>
-                </a:solidFill>
-                <a:latin typeface="Noto Sans Mono CJK SC"/>
-                <a:ea typeface="Noto Sans Mono CJK SC"/>
-                <a:cs typeface="Noto Sans Mono CJK SC"/>
-              </a:rPr>
-              <a:t>[4, 7, 2, 9]</a:t>
-            </a:r>
-            <a:r>
-              <a:rPr lang="zh-CN" sz="2340" dirty="0">
-                <a:solidFill>
-                  <a:srgbClr val="1A1A18"/>
-                </a:solidFill>
-                <a:latin typeface="Segoe UI"/>
-                <a:ea typeface="Noto Sans CJK SC"/>
-                <a:cs typeface="Segoe UI"/>
-              </a:rPr>
-              <a:t>：</a:t>
-            </a:r>
-          </a:p>
-        </p:txBody>
-      </p:sp>
-      <p:sp>
-        <p:nvSpPr>
-          <p:cNvPr id="5" name="代码"/>
+            <a:pPr marL="0" indent="0" lvl="0" algn="ctr">
+              <a:lnSpc>
+                <a:spcPct val="100000"/>
+              </a:lnSpc>
+              <a:buNone/>
+            </a:pPr>
+            <a:r>
+              <a:rPr lang="zh-CN" sz="1424" dirty="0">
+                <a:solidFill>
+                  <a:srgbClr val="6B6B66"/>
+                </a:solidFill>
+                <a:latin typeface="Segoe UI"/>
+                <a:ea typeface="Noto Sans CJK SC"/>
+                <a:cs typeface="Segoe UI"/>
+              </a:rPr>
+              <a:t>图9.7 8路归并的败者树示例</a:t>
+            </a:r>
+          </a:p>
+        </p:txBody>
+      </p:sp>
+      <p:sp>
+        <p:nvSpPr>
+          <p:cNvPr id="6" name="页脚"/>
           <p:cNvSpPr txBox="1"/>
           <p:nvPr/>
         </p:nvSpPr>
         <p:spPr>
           <a:xfrm>
-            <a:off x="566928" y="2476449"/>
-            <a:ext cx="11058144" cy="1548384"/>
-          </a:xfrm>
-          <a:prstGeom prst="roundRect">
-            <a:avLst>
-              <a:gd name="adj" fmla="val 6000"/>
-            </a:avLst>
-          </a:prstGeom>
-          <a:solidFill>
-            <a:srgbClr val="F5F4F0"/>
-          </a:solidFill>
-          <a:ln w="9525">
-            <a:solidFill>
-              <a:srgbClr val="DCDCD6"/>
-            </a:solidFill>
-          </a:ln>
-        </p:spPr>
-        <p:txBody>
-          <a:bodyPr wrap="square" lIns="100584" tIns="100584" rIns="100584" bIns="100584">
-            <a:noAutofit/>
-          </a:bodyPr>
-          <a:lstStyle/>
-          <a:p>
-            <a:pPr marL="0" indent="0" lvl="0">
-              <a:lnSpc>
-                <a:spcPct val="104000"/>
-              </a:lnSpc>
-              <a:buNone/>
-            </a:pPr>
-            <a:r>
-              <a:rPr lang="zh-CN" sz="1560" dirty="0">
-                <a:solidFill>
-                  <a:srgbClr val="1A1A18"/>
-                </a:solidFill>
-                <a:latin typeface="Noto Sans Mono CJK SC"/>
-                <a:ea typeface="Noto Sans Mono CJK SC"/>
-                <a:cs typeface="Noto Sans Mono CJK SC"/>
-              </a:rPr>
-              <a:t>首轮: min(4,7)=4, min(2,9)=2, min(4,2)=2</a:t>
-            </a:r>
-          </a:p>
-          <a:p>
-            <a:pPr marL="0" indent="0" lvl="0">
-              <a:lnSpc>
-                <a:spcPct val="104000"/>
-              </a:lnSpc>
-              <a:buNone/>
-            </a:pPr>
-            <a:r>
-              <a:rPr lang="zh-CN" sz="1560" dirty="0">
-                <a:solidFill>
-                  <a:srgbClr val="1A1A18"/>
-                </a:solidFill>
-                <a:latin typeface="Noto Sans Mono CJK SC"/>
-                <a:ea typeface="Noto Sans Mono CJK SC"/>
-                <a:cs typeface="Noto Sans Mono CJK SC"/>
-              </a:rPr>
-              <a:t>输出: 第 2 路的 2</a:t>
-            </a:r>
-          </a:p>
-          <a:p>
-            <a:pPr marL="0" indent="0" lvl="0">
-              <a:lnSpc>
-                <a:spcPct val="104000"/>
-              </a:lnSpc>
-              <a:buNone/>
-            </a:pPr>
-            <a:r>
-              <a:rPr lang="zh-CN" sz="1560" dirty="0">
-                <a:solidFill>
-                  <a:srgbClr val="1A1A18"/>
-                </a:solidFill>
-                <a:latin typeface="Noto Sans Mono CJK SC"/>
-                <a:ea typeface="Noto Sans Mono CJK SC"/>
-                <a:cs typeface="Noto Sans Mono CJK SC"/>
-              </a:rPr>
-              <a:t>补入: 第 2 路变成 8，候选 [4,7,8,9]</a:t>
-            </a:r>
-          </a:p>
-          <a:p>
-            <a:pPr marL="0" indent="0" lvl="0">
-              <a:lnSpc>
-                <a:spcPct val="104000"/>
-              </a:lnSpc>
-              <a:buNone/>
-            </a:pPr>
-            <a:r>
-              <a:rPr lang="zh-CN" sz="1560" dirty="0">
-                <a:solidFill>
-                  <a:srgbClr val="1A1A18"/>
-                </a:solidFill>
-                <a:latin typeface="Noto Sans Mono CJK SC"/>
-                <a:ea typeface="Noto Sans Mono CJK SC"/>
-                <a:cs typeface="Noto Sans Mono CJK SC"/>
-              </a:rPr>
-              <a:t>重赛: 只重算“第 2 路叶子 → 根”的两场</a:t>
-            </a:r>
-          </a:p>
-          <a:p>
-            <a:pPr marL="0" indent="0" lvl="0">
-              <a:lnSpc>
-                <a:spcPct val="104000"/>
-              </a:lnSpc>
-              <a:buNone/>
-            </a:pPr>
-            <a:r>
-              <a:rPr lang="zh-CN" sz="1560" dirty="0">
-                <a:solidFill>
-                  <a:srgbClr val="1A1A18"/>
-                </a:solidFill>
-                <a:latin typeface="Noto Sans Mono CJK SC"/>
-                <a:ea typeface="Noto Sans Mono CJK SC"/>
-                <a:cs typeface="Noto Sans Mono CJK SC"/>
-              </a:rPr>
-              <a:t>结果: 新冠军为 4</a:t>
-            </a:r>
-          </a:p>
-        </p:txBody>
-      </p:sp>
-      <p:sp>
-        <p:nvSpPr>
-          <p:cNvPr id="6" name="正文"/>
-          <p:cNvSpPr txBox="1"/>
-          <p:nvPr/>
-        </p:nvSpPr>
-        <p:spPr>
-          <a:xfrm>
-            <a:off x="566928" y="4090873"/>
-            <a:ext cx="11058144" cy="398221"/>
+            <a:off x="566928" y="6419088"/>
+            <a:ext cx="7740700" cy="274320"/>
           </a:xfrm>
           <a:prstGeom prst="rect">
             <a:avLst/>
@@ -6767,73 +6972,29 @@
               <a:buNone/>
             </a:pPr>
             <a:r>
-              <a:rPr lang="zh-CN" sz="2340" dirty="0">
-                <a:solidFill>
-                  <a:srgbClr val="1A1A18"/>
-                </a:solidFill>
-                <a:latin typeface="Segoe UI"/>
-                <a:ea typeface="Noto Sans CJK SC"/>
-                <a:cs typeface="Segoe UI"/>
-              </a:rPr>
-              <a:t>建树 </a:t>
-            </a:r>
-            <a:r>
-              <a:rPr lang="zh-CN" sz="2340" dirty="0" i="1">
-                <a:solidFill>
-                  <a:srgbClr val="1A1A18"/>
-                </a:solidFill>
-                <a:latin typeface="Segoe UI"/>
-                <a:ea typeface="Noto Sans CJK SC"/>
-                <a:cs typeface="Segoe UI"/>
-              </a:rPr>
-              <a:t>O(k)</a:t>
-            </a:r>
-            <a:r>
-              <a:rPr lang="zh-CN" sz="2340" dirty="0">
-                <a:solidFill>
-                  <a:srgbClr val="1A1A18"/>
-                </a:solidFill>
-                <a:latin typeface="Segoe UI"/>
-                <a:ea typeface="Noto Sans CJK SC"/>
-                <a:cs typeface="Segoe UI"/>
-              </a:rPr>
-              <a:t>；每输出一条只更新一条高为 </a:t>
-            </a:r>
-            <a:r>
-              <a:rPr lang="zh-CN" sz="2340" dirty="0" i="1">
-                <a:solidFill>
-                  <a:srgbClr val="1A1A18"/>
-                </a:solidFill>
-                <a:latin typeface="Segoe UI"/>
-                <a:ea typeface="Noto Sans CJK SC"/>
-                <a:cs typeface="Segoe UI"/>
-              </a:rPr>
-              <a:t>log k</a:t>
-            </a:r>
-            <a:r>
-              <a:rPr lang="zh-CN" sz="2340" dirty="0">
-                <a:solidFill>
-                  <a:srgbClr val="1A1A18"/>
-                </a:solidFill>
-                <a:latin typeface="Segoe UI"/>
-                <a:ea typeface="Noto Sans CJK SC"/>
-                <a:cs typeface="Segoe UI"/>
-              </a:rPr>
-              <a:t> 的路径。</a:t>
-            </a:r>
-          </a:p>
-        </p:txBody>
-      </p:sp>
-      <p:sp>
-        <p:nvSpPr>
-          <p:cNvPr id="7" name="正文"/>
+              <a:rPr lang="zh-CN" sz="1000" dirty="0">
+                <a:solidFill>
+                  <a:srgbClr val="6B6B66"/>
+                </a:solidFill>
+                <a:latin typeface="Segoe UI"/>
+                <a:ea typeface="Noto Sans CJK SC"/>
+                <a:cs typeface="Segoe UI"/>
+              </a:rPr>
+              <a:t>第9章 文件管理和外排序</a:t>
+            </a:r>
+          </a:p>
+        </p:txBody>
+      </p:sp>
+      <p:sp>
+        <p:nvSpPr>
+          <p:cNvPr id="7" name="页码"/>
           <p:cNvSpPr txBox="1"/>
           <p:nvPr/>
         </p:nvSpPr>
         <p:spPr>
           <a:xfrm>
-            <a:off x="566928" y="4555134"/>
-            <a:ext cx="11058144" cy="398221"/>
+            <a:off x="8307628" y="6419088"/>
+            <a:ext cx="3317443" cy="274320"/>
           </a:xfrm>
           <a:prstGeom prst="rect">
             <a:avLst/>
@@ -6846,93 +7007,7 @@
           </a:bodyPr>
           <a:lstStyle/>
           <a:p>
-            <a:pPr marL="0" indent="0" lvl="0">
-              <a:lnSpc>
-                <a:spcPct val="100000"/>
-              </a:lnSpc>
-              <a:buNone/>
-            </a:pPr>
-            <a:r>
-              <a:rPr lang="zh-CN" sz="2340" dirty="0">
-                <a:solidFill>
-                  <a:srgbClr val="1A1A18"/>
-                </a:solidFill>
-                <a:latin typeface="Segoe UI"/>
-                <a:ea typeface="Noto Sans CJK SC"/>
-                <a:cs typeface="Segoe UI"/>
-              </a:rPr>
-              <a:t>线性扫描要每次检查全部 </a:t>
-            </a:r>
-            <a:r>
-              <a:rPr lang="zh-CN" sz="2340" dirty="0" i="1">
-                <a:solidFill>
-                  <a:srgbClr val="1A1A18"/>
-                </a:solidFill>
-                <a:latin typeface="Segoe UI"/>
-                <a:ea typeface="Noto Sans CJK SC"/>
-                <a:cs typeface="Segoe UI"/>
-              </a:rPr>
-              <a:t>k</a:t>
-            </a:r>
-            <a:r>
-              <a:rPr lang="zh-CN" sz="2340" dirty="0">
-                <a:solidFill>
-                  <a:srgbClr val="1A1A18"/>
-                </a:solidFill>
-                <a:latin typeface="Segoe UI"/>
-                <a:ea typeface="Noto Sans CJK SC"/>
-                <a:cs typeface="Segoe UI"/>
-              </a:rPr>
-              <a:t> 路，选择树只做 </a:t>
-            </a:r>
-            <a:r>
-              <a:rPr lang="zh-CN" sz="2340" dirty="0" i="1">
-                <a:solidFill>
-                  <a:srgbClr val="1A1A18"/>
-                </a:solidFill>
-                <a:latin typeface="Segoe UI"/>
-                <a:ea typeface="Noto Sans CJK SC"/>
-                <a:cs typeface="Segoe UI"/>
-              </a:rPr>
-              <a:t>O(log k)</a:t>
-            </a:r>
-            <a:r>
-              <a:rPr lang="zh-CN" sz="2340" dirty="0">
-                <a:solidFill>
-                  <a:srgbClr val="1A1A18"/>
-                </a:solidFill>
-                <a:latin typeface="Segoe UI"/>
-                <a:ea typeface="Noto Sans CJK SC"/>
-                <a:cs typeface="Segoe UI"/>
-              </a:rPr>
-              <a:t> 次比较。</a:t>
-            </a:r>
-          </a:p>
-        </p:txBody>
-      </p:sp>
-      <p:sp>
-        <p:nvSpPr>
-          <p:cNvPr id="8" name="页脚"/>
-          <p:cNvSpPr txBox="1"/>
-          <p:nvPr/>
-        </p:nvSpPr>
-        <p:spPr>
-          <a:xfrm>
-            <a:off x="566928" y="6419088"/>
-            <a:ext cx="7740700" cy="274320"/>
-          </a:xfrm>
-          <a:prstGeom prst="rect">
-            <a:avLst/>
-          </a:prstGeom>
-          <a:noFill/>
-        </p:spPr>
-        <p:txBody>
-          <a:bodyPr wrap="square" lIns="0" tIns="0" rIns="0" bIns="0">
-            <a:noAutofit/>
-          </a:bodyPr>
-          <a:lstStyle/>
-          <a:p>
-            <a:pPr marL="0" indent="0" lvl="0">
+            <a:pPr marL="0" indent="0" lvl="0" algn="r">
               <a:lnSpc>
                 <a:spcPct val="100000"/>
               </a:lnSpc>
@@ -6947,49 +7022,7 @@
                 <a:ea typeface="Noto Sans CJK SC"/>
                 <a:cs typeface="Segoe UI"/>
               </a:rPr>
-              <a:t>第9章 文件管理和外排序</a:t>
-            </a:r>
-          </a:p>
-        </p:txBody>
-      </p:sp>
-      <p:sp>
-        <p:nvSpPr>
-          <p:cNvPr id="9" name="页码"/>
-          <p:cNvSpPr txBox="1"/>
-          <p:nvPr/>
-        </p:nvSpPr>
-        <p:spPr>
-          <a:xfrm>
-            <a:off x="8307628" y="6419088"/>
-            <a:ext cx="3317443" cy="274320"/>
-          </a:xfrm>
-          <a:prstGeom prst="rect">
-            <a:avLst/>
-          </a:prstGeom>
-          <a:noFill/>
-        </p:spPr>
-        <p:txBody>
-          <a:bodyPr wrap="square" lIns="0" tIns="0" rIns="0" bIns="0">
-            <a:noAutofit/>
-          </a:bodyPr>
-          <a:lstStyle/>
-          <a:p>
-            <a:pPr marL="0" indent="0" lvl="0" algn="r">
-              <a:lnSpc>
-                <a:spcPct val="100000"/>
-              </a:lnSpc>
-              <a:buNone/>
-            </a:pPr>
-            <a:r>
-              <a:rPr lang="zh-CN" sz="1000" dirty="0">
-                <a:solidFill>
-                  <a:srgbClr val="6B6B66"/>
-                </a:solidFill>
-                <a:latin typeface="Segoe UI"/>
-                <a:ea typeface="Noto Sans CJK SC"/>
-                <a:cs typeface="Segoe UI"/>
-              </a:rPr>
-              <a:t>18 / 32</a:t>
+              <a:t>18 / 31</a:t>
             </a:r>
           </a:p>
         </p:txBody>
@@ -7085,40 +7118,16 @@
           <a:p/>
         </p:txBody>
       </p:sp>
-      <p:pic>
-        <p:nvPicPr>
-          <p:cNvPr id="4" name="图9.7 8路归并的败者树示例"/>
-          <p:cNvPicPr>
-            <a:picLocks noChangeAspect="1"/>
-          </p:cNvPicPr>
-          <p:nvPr/>
-        </p:nvPicPr>
-        <p:blipFill>
-          <a:blip r:embed="rId100"/>
-          <a:stretch>
-            <a:fillRect/>
-          </a:stretch>
-        </p:blipFill>
-        <p:spPr>
-          <a:xfrm>
-            <a:off x="2862006" y="1229106"/>
-            <a:ext cx="6467987" cy="4684757"/>
-          </a:xfrm>
-          <a:prstGeom prst="rect">
-            <a:avLst/>
-          </a:prstGeom>
-        </p:spPr>
-      </p:pic>
-      <p:sp>
-        <p:nvSpPr>
-          <p:cNvPr id="5" name="图注"/>
+      <p:sp>
+        <p:nvSpPr>
+          <p:cNvPr id="4" name="正文"/>
           <p:cNvSpPr txBox="1"/>
           <p:nvPr/>
         </p:nvSpPr>
         <p:spPr>
           <a:xfrm>
-            <a:off x="566928" y="5942818"/>
-            <a:ext cx="11058144" cy="288056"/>
+            <a:off x="566928" y="1946148"/>
+            <a:ext cx="11058144" cy="398221"/>
           </a:xfrm>
           <a:prstGeom prst="rect">
             <a:avLst/>
@@ -7131,36 +7140,58 @@
           </a:bodyPr>
           <a:lstStyle/>
           <a:p>
-            <a:pPr marL="0" indent="0" lvl="0" algn="ctr">
-              <a:lnSpc>
-                <a:spcPct val="100000"/>
-              </a:lnSpc>
-              <a:buNone/>
-            </a:pPr>
-            <a:r>
-              <a:rPr lang="zh-CN" sz="1424" dirty="0">
-                <a:solidFill>
-                  <a:srgbClr val="6B6B66"/>
-                </a:solidFill>
-                <a:latin typeface="Segoe UI"/>
-                <a:ea typeface="Noto Sans CJK SC"/>
-                <a:cs typeface="Segoe UI"/>
-              </a:rPr>
-              <a:t>图9.7 8路归并的败者树示例</a:t>
-            </a:r>
-          </a:p>
-        </p:txBody>
-      </p:sp>
-      <p:sp>
-        <p:nvSpPr>
-          <p:cNvPr id="6" name="页脚"/>
+            <a:pPr marL="0" indent="0" lvl="0">
+              <a:lnSpc>
+                <a:spcPct val="100000"/>
+              </a:lnSpc>
+              <a:buNone/>
+            </a:pPr>
+            <a:r>
+              <a:rPr lang="zh-CN" sz="2340" dirty="0">
+                <a:solidFill>
+                  <a:srgbClr val="1A1A18"/>
+                </a:solidFill>
+                <a:latin typeface="Segoe UI"/>
+                <a:ea typeface="Noto Sans CJK SC"/>
+                <a:cs typeface="Segoe UI"/>
+              </a:rPr>
+              <a:t>内部结点记的是</a:t>
+            </a:r>
+            <a:r>
+              <a:rPr lang="zh-CN" sz="2340" dirty="0" b="1">
+                <a:solidFill>
+                  <a:srgbClr val="8A4B2A"/>
+                </a:solidFill>
+                <a:latin typeface="Segoe UI"/>
+                <a:ea typeface="Noto Sans CJK SC"/>
+                <a:cs typeface="Segoe UI"/>
+              </a:rPr>
+              <a:t>输家</a:t>
+            </a:r>
+            <a:r>
+              <a:rPr lang="zh-CN" sz="2340" dirty="0">
+                <a:solidFill>
+                  <a:srgbClr val="1A1A18"/>
+                </a:solidFill>
+                <a:latin typeface="Segoe UI"/>
+                <a:ea typeface="Noto Sans CJK SC"/>
+                <a:cs typeface="Segoe UI"/>
+              </a:rPr>
+              <a:t>，赢家继续往上比。</a:t>
+            </a:r>
+          </a:p>
+        </p:txBody>
+      </p:sp>
+      <p:sp>
+        <p:nvSpPr>
+          <p:cNvPr id="5" name="要点"/>
           <p:cNvSpPr txBox="1"/>
           <p:nvPr/>
         </p:nvSpPr>
         <p:spPr>
           <a:xfrm>
-            <a:off x="566928" y="6419088"/>
-            <a:ext cx="7740700" cy="274320"/>
+            <a:off x="566928" y="2459939"/>
+            <a:ext cx="11058144" cy="962862"/>
           </a:xfrm>
           <a:prstGeom prst="rect">
             <a:avLst/>
@@ -7173,36 +7204,113 @@
           </a:bodyPr>
           <a:lstStyle/>
           <a:p>
-            <a:pPr marL="0" indent="0" lvl="0">
-              <a:lnSpc>
-                <a:spcPct val="100000"/>
-              </a:lnSpc>
-              <a:buNone/>
-            </a:pPr>
-            <a:r>
-              <a:rPr lang="zh-CN" sz="1000" dirty="0">
-                <a:solidFill>
-                  <a:srgbClr val="6B6B66"/>
-                </a:solidFill>
-                <a:latin typeface="Segoe UI"/>
-                <a:ea typeface="Noto Sans CJK SC"/>
-                <a:cs typeface="Segoe UI"/>
-              </a:rPr>
-              <a:t>第9章 文件管理和外排序</a:t>
-            </a:r>
-          </a:p>
-        </p:txBody>
-      </p:sp>
-      <p:sp>
-        <p:nvSpPr>
-          <p:cNvPr id="7" name="页码"/>
+            <a:pPr marL="270000" indent="-230000" lvl="0">
+              <a:lnSpc>
+                <a:spcPct val="100000"/>
+              </a:lnSpc>
+              <a:spcBef>
+                <a:spcPts val="655"/>
+              </a:spcBef>
+              <a:buClr>
+                <a:srgbClr val="8A4B2A"/>
+              </a:buClr>
+              <a:buFont typeface="Arial"/>
+              <a:buChar char="●"/>
+            </a:pPr>
+            <a:r>
+              <a:rPr lang="zh-CN" sz="2340" dirty="0">
+                <a:solidFill>
+                  <a:srgbClr val="1A1A18"/>
+                </a:solidFill>
+                <a:latin typeface="Segoe UI"/>
+                <a:ea typeface="Noto Sans CJK SC"/>
+                <a:cs typeface="Segoe UI"/>
+              </a:rPr>
+              <a:t>赢者树重构：每层要</a:t>
+            </a:r>
+            <a:r>
+              <a:rPr lang="zh-CN" sz="2340" dirty="0" b="1">
+                <a:solidFill>
+                  <a:srgbClr val="8A4B2A"/>
+                </a:solidFill>
+                <a:latin typeface="Segoe UI"/>
+                <a:ea typeface="Noto Sans CJK SC"/>
+                <a:cs typeface="Segoe UI"/>
+              </a:rPr>
+              <a:t>读兄弟结点</a:t>
+            </a:r>
+            <a:r>
+              <a:rPr lang="zh-CN" sz="2340" dirty="0">
+                <a:solidFill>
+                  <a:srgbClr val="1A1A18"/>
+                </a:solidFill>
+                <a:latin typeface="Segoe UI"/>
+                <a:ea typeface="Noto Sans CJK SC"/>
+                <a:cs typeface="Segoe UI"/>
+              </a:rPr>
+              <a:t>才知道跟谁比</a:t>
+            </a:r>
+          </a:p>
+          <a:p>
+            <a:pPr marL="270000" indent="-230000" lvl="0">
+              <a:lnSpc>
+                <a:spcPct val="100000"/>
+              </a:lnSpc>
+              <a:spcBef>
+                <a:spcPts val="655"/>
+              </a:spcBef>
+              <a:buClr>
+                <a:srgbClr val="8A4B2A"/>
+              </a:buClr>
+              <a:buFont typeface="Arial"/>
+              <a:buChar char="●"/>
+            </a:pPr>
+            <a:r>
+              <a:rPr lang="zh-CN" sz="2340" dirty="0">
+                <a:solidFill>
+                  <a:srgbClr val="1A1A18"/>
+                </a:solidFill>
+                <a:latin typeface="Segoe UI"/>
+                <a:ea typeface="Noto Sans CJK SC"/>
+                <a:cs typeface="Segoe UI"/>
+              </a:rPr>
+              <a:t>败者树重构：每层直接跟</a:t>
+            </a:r>
+            <a:r>
+              <a:rPr lang="zh-CN" sz="2340" dirty="0" b="1">
+                <a:solidFill>
+                  <a:srgbClr val="8A4B2A"/>
+                </a:solidFill>
+                <a:latin typeface="Segoe UI"/>
+                <a:ea typeface="Noto Sans CJK SC"/>
+                <a:cs typeface="Segoe UI"/>
+              </a:rPr>
+              <a:t>本结点记录的输家</a:t>
+            </a:r>
+            <a:r>
+              <a:rPr lang="zh-CN" sz="2340" dirty="0">
+                <a:solidFill>
+                  <a:srgbClr val="1A1A18"/>
+                </a:solidFill>
+                <a:latin typeface="Segoe UI"/>
+                <a:ea typeface="Noto Sans CJK SC"/>
+                <a:cs typeface="Segoe UI"/>
+              </a:rPr>
+              <a:t>比</a:t>
+            </a:r>
+          </a:p>
+        </p:txBody>
+      </p:sp>
+      <p:sp>
+        <p:nvSpPr>
+          <p:cNvPr id="6" name="正文"/>
           <p:cNvSpPr txBox="1"/>
           <p:nvPr/>
         </p:nvSpPr>
         <p:spPr>
           <a:xfrm>
-            <a:off x="8307628" y="6419088"/>
-            <a:ext cx="3317443" cy="274320"/>
+            <a:off x="566928" y="3488841"/>
+            <a:ext cx="11058144" cy="398221"/>
           </a:xfrm>
           <a:prstGeom prst="rect">
             <a:avLst/>
@@ -7215,6 +7323,101 @@
           </a:bodyPr>
           <a:lstStyle/>
           <a:p>
+            <a:pPr marL="0" indent="0" lvl="0">
+              <a:lnSpc>
+                <a:spcPct val="100000"/>
+              </a:lnSpc>
+              <a:buNone/>
+            </a:pPr>
+            <a:r>
+              <a:rPr lang="zh-CN" sz="2340" dirty="0" b="1">
+                <a:solidFill>
+                  <a:srgbClr val="8A4B2A"/>
+                </a:solidFill>
+                <a:latin typeface="Segoe UI"/>
+                <a:ea typeface="Noto Sans CJK SC"/>
+                <a:cs typeface="Segoe UI"/>
+              </a:rPr>
+              <a:t>少一次访存</a:t>
+            </a:r>
+            <a:r>
+              <a:rPr lang="zh-CN" sz="2340" dirty="0">
+                <a:solidFill>
+                  <a:srgbClr val="1A1A18"/>
+                </a:solidFill>
+                <a:latin typeface="Segoe UI"/>
+                <a:ea typeface="Noto Sans CJK SC"/>
+                <a:cs typeface="Segoe UI"/>
+              </a:rPr>
+              <a:t>。这在多路归并的内层循环里是实打实的收益。</a:t>
+            </a:r>
+          </a:p>
+        </p:txBody>
+      </p:sp>
+      <p:sp>
+        <p:nvSpPr>
+          <p:cNvPr id="7" name="页脚"/>
+          <p:cNvSpPr txBox="1"/>
+          <p:nvPr/>
+        </p:nvSpPr>
+        <p:spPr>
+          <a:xfrm>
+            <a:off x="566928" y="6419088"/>
+            <a:ext cx="7740700" cy="274320"/>
+          </a:xfrm>
+          <a:prstGeom prst="rect">
+            <a:avLst/>
+          </a:prstGeom>
+          <a:noFill/>
+        </p:spPr>
+        <p:txBody>
+          <a:bodyPr wrap="square" lIns="0" tIns="0" rIns="0" bIns="0">
+            <a:noAutofit/>
+          </a:bodyPr>
+          <a:lstStyle/>
+          <a:p>
+            <a:pPr marL="0" indent="0" lvl="0">
+              <a:lnSpc>
+                <a:spcPct val="100000"/>
+              </a:lnSpc>
+              <a:buNone/>
+            </a:pPr>
+            <a:r>
+              <a:rPr lang="zh-CN" sz="1000" dirty="0">
+                <a:solidFill>
+                  <a:srgbClr val="6B6B66"/>
+                </a:solidFill>
+                <a:latin typeface="Segoe UI"/>
+                <a:ea typeface="Noto Sans CJK SC"/>
+                <a:cs typeface="Segoe UI"/>
+              </a:rPr>
+              <a:t>第9章 文件管理和外排序</a:t>
+            </a:r>
+          </a:p>
+        </p:txBody>
+      </p:sp>
+      <p:sp>
+        <p:nvSpPr>
+          <p:cNvPr id="8" name="页码"/>
+          <p:cNvSpPr txBox="1"/>
+          <p:nvPr/>
+        </p:nvSpPr>
+        <p:spPr>
+          <a:xfrm>
+            <a:off x="8307628" y="6419088"/>
+            <a:ext cx="3317443" cy="274320"/>
+          </a:xfrm>
+          <a:prstGeom prst="rect">
+            <a:avLst/>
+          </a:prstGeom>
+          <a:noFill/>
+        </p:spPr>
+        <p:txBody>
+          <a:bodyPr wrap="square" lIns="0" tIns="0" rIns="0" bIns="0">
+            <a:noAutofit/>
+          </a:bodyPr>
+          <a:lstStyle/>
+          <a:p>
             <a:pPr marL="0" indent="0" lvl="0" algn="r">
               <a:lnSpc>
                 <a:spcPct val="100000"/>
@@ -7230,7 +7433,7 @@
                 <a:ea typeface="Noto Sans CJK SC"/>
                 <a:cs typeface="Segoe UI"/>
               </a:rPr>
-              <a:t>19 / 32</a:t>
+              <a:t>19 / 31</a:t>
             </a:r>
           </a:p>
         </p:txBody>
@@ -7955,7 +8158,7 @@
                 <a:ea typeface="Noto Sans CJK SC"/>
                 <a:cs typeface="Segoe UI"/>
               </a:rPr>
-              <a:t>2 / 32</a:t>
+              <a:t>2 / 31</a:t>
             </a:r>
           </a:p>
         </p:txBody>
@@ -7966,417 +8169,6 @@
 </file>
 
 <file path=ppt/slides/slide20.xml><?xml version="1.0" encoding="utf-8"?>
-<p:sld xmlns:a="http://schemas.openxmlformats.org/drawingml/2006/main" xmlns:r="http://schemas.openxmlformats.org/officeDocument/2006/relationships" xmlns:p="http://schemas.openxmlformats.org/presentationml/2006/main">
-  <p:cSld>
-    <p:spTree>
-      <p:nvGrpSpPr>
-        <p:cNvPr id="1" name=""/>
-        <p:cNvGrpSpPr/>
-        <p:nvPr/>
-      </p:nvGrpSpPr>
-      <p:grpSpPr>
-        <a:xfrm>
-          <a:off x="0" y="0"/>
-          <a:ext cx="0" cy="0"/>
-          <a:chOff x="0" y="0"/>
-          <a:chExt cx="0" cy="0"/>
-        </a:xfrm>
-      </p:grpSpPr>
-      <p:sp>
-        <p:nvSpPr>
-          <p:cNvPr id="2" name="标题"/>
-          <p:cNvSpPr txBox="1"/>
-          <p:nvPr/>
-        </p:nvSpPr>
-        <p:spPr>
-          <a:xfrm>
-            <a:off x="566928" y="384048"/>
-            <a:ext cx="11058144" cy="487680"/>
-          </a:xfrm>
-          <a:prstGeom prst="rect">
-            <a:avLst/>
-          </a:prstGeom>
-          <a:noFill/>
-        </p:spPr>
-        <p:txBody>
-          <a:bodyPr wrap="square" lIns="0" tIns="0" rIns="0" bIns="0">
-            <a:noAutofit/>
-          </a:bodyPr>
-          <a:lstStyle/>
-          <a:p>
-            <a:pPr marL="0" indent="0" lvl="0">
-              <a:lnSpc>
-                <a:spcPct val="100000"/>
-              </a:lnSpc>
-              <a:buNone/>
-            </a:pPr>
-            <a:r>
-              <a:rPr lang="zh-CN" sz="3200" dirty="0" b="1">
-                <a:solidFill>
-                  <a:srgbClr val="1A1A18"/>
-                </a:solidFill>
-                <a:latin typeface="Segoe UI"/>
-                <a:ea typeface="Noto Sans CJK SC"/>
-                <a:cs typeface="Segoe UI"/>
-              </a:rPr>
-              <a:t>败者树：省掉「看兄弟」（续）</a:t>
-            </a:r>
-          </a:p>
-        </p:txBody>
-      </p:sp>
-      <p:sp>
-        <p:nvSpPr>
-          <p:cNvPr id="3" name="标题线"/>
-          <p:cNvSpPr/>
-          <p:nvPr/>
-        </p:nvSpPr>
-        <p:spPr>
-          <a:xfrm>
-            <a:off x="566928" y="935736"/>
-            <a:ext cx="11058144" cy="32004"/>
-          </a:xfrm>
-          <a:prstGeom prst="rect">
-            <a:avLst/>
-          </a:prstGeom>
-          <a:solidFill>
-            <a:srgbClr val="8A4B2A"/>
-          </a:solidFill>
-          <a:ln>
-            <a:noFill/>
-          </a:ln>
-        </p:spPr>
-        <p:txBody>
-          <a:bodyPr/>
-          <a:lstStyle/>
-          <a:p/>
-        </p:txBody>
-      </p:sp>
-      <p:sp>
-        <p:nvSpPr>
-          <p:cNvPr id="4" name="正文"/>
-          <p:cNvSpPr txBox="1"/>
-          <p:nvPr/>
-        </p:nvSpPr>
-        <p:spPr>
-          <a:xfrm>
-            <a:off x="566928" y="1946148"/>
-            <a:ext cx="11058144" cy="398221"/>
-          </a:xfrm>
-          <a:prstGeom prst="rect">
-            <a:avLst/>
-          </a:prstGeom>
-          <a:noFill/>
-        </p:spPr>
-        <p:txBody>
-          <a:bodyPr wrap="square" lIns="0" tIns="0" rIns="0" bIns="0">
-            <a:noAutofit/>
-          </a:bodyPr>
-          <a:lstStyle/>
-          <a:p>
-            <a:pPr marL="0" indent="0" lvl="0">
-              <a:lnSpc>
-                <a:spcPct val="100000"/>
-              </a:lnSpc>
-              <a:buNone/>
-            </a:pPr>
-            <a:r>
-              <a:rPr lang="zh-CN" sz="2340" dirty="0">
-                <a:solidFill>
-                  <a:srgbClr val="1A1A18"/>
-                </a:solidFill>
-                <a:latin typeface="Segoe UI"/>
-                <a:ea typeface="Noto Sans CJK SC"/>
-                <a:cs typeface="Segoe UI"/>
-              </a:rPr>
-              <a:t>内部结点记的是</a:t>
-            </a:r>
-            <a:r>
-              <a:rPr lang="zh-CN" sz="2340" dirty="0" b="1">
-                <a:solidFill>
-                  <a:srgbClr val="8A4B2A"/>
-                </a:solidFill>
-                <a:latin typeface="Segoe UI"/>
-                <a:ea typeface="Noto Sans CJK SC"/>
-                <a:cs typeface="Segoe UI"/>
-              </a:rPr>
-              <a:t>输家</a:t>
-            </a:r>
-            <a:r>
-              <a:rPr lang="zh-CN" sz="2340" dirty="0">
-                <a:solidFill>
-                  <a:srgbClr val="1A1A18"/>
-                </a:solidFill>
-                <a:latin typeface="Segoe UI"/>
-                <a:ea typeface="Noto Sans CJK SC"/>
-                <a:cs typeface="Segoe UI"/>
-              </a:rPr>
-              <a:t>，赢家继续往上比。</a:t>
-            </a:r>
-          </a:p>
-        </p:txBody>
-      </p:sp>
-      <p:sp>
-        <p:nvSpPr>
-          <p:cNvPr id="5" name="要点"/>
-          <p:cNvSpPr txBox="1"/>
-          <p:nvPr/>
-        </p:nvSpPr>
-        <p:spPr>
-          <a:xfrm>
-            <a:off x="566928" y="2459939"/>
-            <a:ext cx="11058144" cy="962862"/>
-          </a:xfrm>
-          <a:prstGeom prst="rect">
-            <a:avLst/>
-          </a:prstGeom>
-          <a:noFill/>
-        </p:spPr>
-        <p:txBody>
-          <a:bodyPr wrap="square" lIns="0" tIns="0" rIns="0" bIns="0">
-            <a:noAutofit/>
-          </a:bodyPr>
-          <a:lstStyle/>
-          <a:p>
-            <a:pPr marL="270000" indent="-230000" lvl="0">
-              <a:lnSpc>
-                <a:spcPct val="100000"/>
-              </a:lnSpc>
-              <a:spcBef>
-                <a:spcPts val="655"/>
-              </a:spcBef>
-              <a:buClr>
-                <a:srgbClr val="8A4B2A"/>
-              </a:buClr>
-              <a:buFont typeface="Arial"/>
-              <a:buChar char="●"/>
-            </a:pPr>
-            <a:r>
-              <a:rPr lang="zh-CN" sz="2340" dirty="0">
-                <a:solidFill>
-                  <a:srgbClr val="1A1A18"/>
-                </a:solidFill>
-                <a:latin typeface="Segoe UI"/>
-                <a:ea typeface="Noto Sans CJK SC"/>
-                <a:cs typeface="Segoe UI"/>
-              </a:rPr>
-              <a:t>赢者树重构：每层要</a:t>
-            </a:r>
-            <a:r>
-              <a:rPr lang="zh-CN" sz="2340" dirty="0" b="1">
-                <a:solidFill>
-                  <a:srgbClr val="8A4B2A"/>
-                </a:solidFill>
-                <a:latin typeface="Segoe UI"/>
-                <a:ea typeface="Noto Sans CJK SC"/>
-                <a:cs typeface="Segoe UI"/>
-              </a:rPr>
-              <a:t>读兄弟结点</a:t>
-            </a:r>
-            <a:r>
-              <a:rPr lang="zh-CN" sz="2340" dirty="0">
-                <a:solidFill>
-                  <a:srgbClr val="1A1A18"/>
-                </a:solidFill>
-                <a:latin typeface="Segoe UI"/>
-                <a:ea typeface="Noto Sans CJK SC"/>
-                <a:cs typeface="Segoe UI"/>
-              </a:rPr>
-              <a:t>才知道跟谁比</a:t>
-            </a:r>
-          </a:p>
-          <a:p>
-            <a:pPr marL="270000" indent="-230000" lvl="0">
-              <a:lnSpc>
-                <a:spcPct val="100000"/>
-              </a:lnSpc>
-              <a:spcBef>
-                <a:spcPts val="655"/>
-              </a:spcBef>
-              <a:buClr>
-                <a:srgbClr val="8A4B2A"/>
-              </a:buClr>
-              <a:buFont typeface="Arial"/>
-              <a:buChar char="●"/>
-            </a:pPr>
-            <a:r>
-              <a:rPr lang="zh-CN" sz="2340" dirty="0">
-                <a:solidFill>
-                  <a:srgbClr val="1A1A18"/>
-                </a:solidFill>
-                <a:latin typeface="Segoe UI"/>
-                <a:ea typeface="Noto Sans CJK SC"/>
-                <a:cs typeface="Segoe UI"/>
-              </a:rPr>
-              <a:t>败者树重构：每层直接跟</a:t>
-            </a:r>
-            <a:r>
-              <a:rPr lang="zh-CN" sz="2340" dirty="0" b="1">
-                <a:solidFill>
-                  <a:srgbClr val="8A4B2A"/>
-                </a:solidFill>
-                <a:latin typeface="Segoe UI"/>
-                <a:ea typeface="Noto Sans CJK SC"/>
-                <a:cs typeface="Segoe UI"/>
-              </a:rPr>
-              <a:t>本结点记录的输家</a:t>
-            </a:r>
-            <a:r>
-              <a:rPr lang="zh-CN" sz="2340" dirty="0">
-                <a:solidFill>
-                  <a:srgbClr val="1A1A18"/>
-                </a:solidFill>
-                <a:latin typeface="Segoe UI"/>
-                <a:ea typeface="Noto Sans CJK SC"/>
-                <a:cs typeface="Segoe UI"/>
-              </a:rPr>
-              <a:t>比</a:t>
-            </a:r>
-          </a:p>
-        </p:txBody>
-      </p:sp>
-      <p:sp>
-        <p:nvSpPr>
-          <p:cNvPr id="6" name="正文"/>
-          <p:cNvSpPr txBox="1"/>
-          <p:nvPr/>
-        </p:nvSpPr>
-        <p:spPr>
-          <a:xfrm>
-            <a:off x="566928" y="3488841"/>
-            <a:ext cx="11058144" cy="398221"/>
-          </a:xfrm>
-          <a:prstGeom prst="rect">
-            <a:avLst/>
-          </a:prstGeom>
-          <a:noFill/>
-        </p:spPr>
-        <p:txBody>
-          <a:bodyPr wrap="square" lIns="0" tIns="0" rIns="0" bIns="0">
-            <a:noAutofit/>
-          </a:bodyPr>
-          <a:lstStyle/>
-          <a:p>
-            <a:pPr marL="0" indent="0" lvl="0">
-              <a:lnSpc>
-                <a:spcPct val="100000"/>
-              </a:lnSpc>
-              <a:buNone/>
-            </a:pPr>
-            <a:r>
-              <a:rPr lang="zh-CN" sz="2340" dirty="0" b="1">
-                <a:solidFill>
-                  <a:srgbClr val="8A4B2A"/>
-                </a:solidFill>
-                <a:latin typeface="Segoe UI"/>
-                <a:ea typeface="Noto Sans CJK SC"/>
-                <a:cs typeface="Segoe UI"/>
-              </a:rPr>
-              <a:t>少一次访存</a:t>
-            </a:r>
-            <a:r>
-              <a:rPr lang="zh-CN" sz="2340" dirty="0">
-                <a:solidFill>
-                  <a:srgbClr val="1A1A18"/>
-                </a:solidFill>
-                <a:latin typeface="Segoe UI"/>
-                <a:ea typeface="Noto Sans CJK SC"/>
-                <a:cs typeface="Segoe UI"/>
-              </a:rPr>
-              <a:t>。这在多路归并的内层循环里是实打实的收益。</a:t>
-            </a:r>
-          </a:p>
-        </p:txBody>
-      </p:sp>
-      <p:sp>
-        <p:nvSpPr>
-          <p:cNvPr id="7" name="页脚"/>
-          <p:cNvSpPr txBox="1"/>
-          <p:nvPr/>
-        </p:nvSpPr>
-        <p:spPr>
-          <a:xfrm>
-            <a:off x="566928" y="6419088"/>
-            <a:ext cx="7740700" cy="274320"/>
-          </a:xfrm>
-          <a:prstGeom prst="rect">
-            <a:avLst/>
-          </a:prstGeom>
-          <a:noFill/>
-        </p:spPr>
-        <p:txBody>
-          <a:bodyPr wrap="square" lIns="0" tIns="0" rIns="0" bIns="0">
-            <a:noAutofit/>
-          </a:bodyPr>
-          <a:lstStyle/>
-          <a:p>
-            <a:pPr marL="0" indent="0" lvl="0">
-              <a:lnSpc>
-                <a:spcPct val="100000"/>
-              </a:lnSpc>
-              <a:buNone/>
-            </a:pPr>
-            <a:r>
-              <a:rPr lang="zh-CN" sz="1000" dirty="0">
-                <a:solidFill>
-                  <a:srgbClr val="6B6B66"/>
-                </a:solidFill>
-                <a:latin typeface="Segoe UI"/>
-                <a:ea typeface="Noto Sans CJK SC"/>
-                <a:cs typeface="Segoe UI"/>
-              </a:rPr>
-              <a:t>第9章 文件管理和外排序</a:t>
-            </a:r>
-          </a:p>
-        </p:txBody>
-      </p:sp>
-      <p:sp>
-        <p:nvSpPr>
-          <p:cNvPr id="8" name="页码"/>
-          <p:cNvSpPr txBox="1"/>
-          <p:nvPr/>
-        </p:nvSpPr>
-        <p:spPr>
-          <a:xfrm>
-            <a:off x="8307628" y="6419088"/>
-            <a:ext cx="3317443" cy="274320"/>
-          </a:xfrm>
-          <a:prstGeom prst="rect">
-            <a:avLst/>
-          </a:prstGeom>
-          <a:noFill/>
-        </p:spPr>
-        <p:txBody>
-          <a:bodyPr wrap="square" lIns="0" tIns="0" rIns="0" bIns="0">
-            <a:noAutofit/>
-          </a:bodyPr>
-          <a:lstStyle/>
-          <a:p>
-            <a:pPr marL="0" indent="0" lvl="0" algn="r">
-              <a:lnSpc>
-                <a:spcPct val="100000"/>
-              </a:lnSpc>
-              <a:buNone/>
-            </a:pPr>
-            <a:r>
-              <a:rPr lang="zh-CN" sz="1000" dirty="0">
-                <a:solidFill>
-                  <a:srgbClr val="6B6B66"/>
-                </a:solidFill>
-                <a:latin typeface="Segoe UI"/>
-                <a:ea typeface="Noto Sans CJK SC"/>
-                <a:cs typeface="Segoe UI"/>
-              </a:rPr>
-              <a:t>20 / 32</a:t>
-            </a:r>
-          </a:p>
-        </p:txBody>
-      </p:sp>
-    </p:spTree>
-  </p:cSld>
-</p:sld>
-</file>
-
-<file path=ppt/slides/slide21.xml><?xml version="1.0" encoding="utf-8"?>
 <p:sld xmlns:a="http://schemas.openxmlformats.org/drawingml/2006/main" xmlns:r="http://schemas.openxmlformats.org/officeDocument/2006/relationships" xmlns:p="http://schemas.openxmlformats.org/presentationml/2006/main">
   <p:cSld>
     <p:spTree>
@@ -9258,7 +9050,224 @@
                 <a:ea typeface="Noto Sans CJK SC"/>
                 <a:cs typeface="Segoe UI"/>
               </a:rPr>
-              <a:t>21 / 32</a:t>
+              <a:t>20 / 31</a:t>
+            </a:r>
+          </a:p>
+        </p:txBody>
+      </p:sp>
+    </p:spTree>
+  </p:cSld>
+</p:sld>
+</file>
+
+<file path=ppt/slides/slide21.xml><?xml version="1.0" encoding="utf-8"?>
+<p:sld xmlns:a="http://schemas.openxmlformats.org/drawingml/2006/main" xmlns:r="http://schemas.openxmlformats.org/officeDocument/2006/relationships" xmlns:p="http://schemas.openxmlformats.org/presentationml/2006/main">
+  <p:cSld>
+    <p:spTree>
+      <p:nvGrpSpPr>
+        <p:cNvPr id="1" name=""/>
+        <p:cNvGrpSpPr/>
+        <p:nvPr/>
+      </p:nvGrpSpPr>
+      <p:grpSpPr>
+        <a:xfrm>
+          <a:off x="0" y="0"/>
+          <a:ext cx="0" cy="0"/>
+          <a:chOff x="0" y="0"/>
+          <a:chExt cx="0" cy="0"/>
+        </a:xfrm>
+      </p:grpSpPr>
+      <p:sp>
+        <p:nvSpPr>
+          <p:cNvPr id="2" name="标题"/>
+          <p:cNvSpPr txBox="1"/>
+          <p:nvPr/>
+        </p:nvSpPr>
+        <p:spPr>
+          <a:xfrm>
+            <a:off x="566928" y="384048"/>
+            <a:ext cx="11058144" cy="487680"/>
+          </a:xfrm>
+          <a:prstGeom prst="rect">
+            <a:avLst/>
+          </a:prstGeom>
+          <a:noFill/>
+        </p:spPr>
+        <p:txBody>
+          <a:bodyPr wrap="square" lIns="0" tIns="0" rIns="0" bIns="0">
+            <a:noAutofit/>
+          </a:bodyPr>
+          <a:lstStyle/>
+          <a:p>
+            <a:pPr marL="0" indent="0" lvl="0">
+              <a:lnSpc>
+                <a:spcPct val="100000"/>
+              </a:lnSpc>
+              <a:buNone/>
+            </a:pPr>
+            <a:r>
+              <a:rPr lang="zh-CN" sz="3200" dirty="0" b="1">
+                <a:solidFill>
+                  <a:srgbClr val="1A1A18"/>
+                </a:solidFill>
+                <a:latin typeface="Segoe UI"/>
+                <a:ea typeface="Noto Sans CJK SC"/>
+                <a:cs typeface="Segoe UI"/>
+              </a:rPr>
+              <a:t>课堂讲解卡：外排序先算 I/O</a:t>
+            </a:r>
+          </a:p>
+        </p:txBody>
+      </p:sp>
+      <p:sp>
+        <p:nvSpPr>
+          <p:cNvPr id="3" name="标题线"/>
+          <p:cNvSpPr/>
+          <p:nvPr/>
+        </p:nvSpPr>
+        <p:spPr>
+          <a:xfrm>
+            <a:off x="566928" y="935736"/>
+            <a:ext cx="11058144" cy="32004"/>
+          </a:xfrm>
+          <a:prstGeom prst="rect">
+            <a:avLst/>
+          </a:prstGeom>
+          <a:solidFill>
+            <a:srgbClr val="8A4B2A"/>
+          </a:solidFill>
+          <a:ln>
+            <a:noFill/>
+          </a:ln>
+        </p:spPr>
+        <p:txBody>
+          <a:bodyPr/>
+          <a:lstStyle/>
+          <a:p/>
+        </p:txBody>
+      </p:sp>
+      <p:sp>
+        <p:nvSpPr>
+          <p:cNvPr id="4" name="正文"/>
+          <p:cNvSpPr txBox="1"/>
+          <p:nvPr/>
+        </p:nvSpPr>
+        <p:spPr>
+          <a:xfrm>
+            <a:off x="566928" y="1946148"/>
+            <a:ext cx="11058144" cy="796442"/>
+          </a:xfrm>
+          <a:prstGeom prst="rect">
+            <a:avLst/>
+          </a:prstGeom>
+          <a:noFill/>
+        </p:spPr>
+        <p:txBody>
+          <a:bodyPr wrap="square" lIns="0" tIns="0" rIns="0" bIns="0">
+            <a:noAutofit/>
+          </a:bodyPr>
+          <a:lstStyle/>
+          <a:p>
+            <a:pPr marL="0" indent="0" lvl="0">
+              <a:lnSpc>
+                <a:spcPct val="100000"/>
+              </a:lnSpc>
+              <a:buNone/>
+            </a:pPr>
+            <a:r>
+              <a:rPr lang="zh-CN" sz="2340" dirty="0">
+                <a:solidFill>
+                  <a:srgbClr val="1A1A18"/>
+                </a:solidFill>
+                <a:latin typeface="Segoe UI"/>
+                <a:ea typeface="Noto Sans CJK SC"/>
+                <a:cs typeface="Segoe UI"/>
+              </a:rPr>
+              <a:t>内存只放得下 M 条记录时，目标不是少比较，而是少读写磁盘页。初始顺串、归并路数和缓冲区大小共同决定总 I/O。</a:t>
+            </a:r>
+          </a:p>
+        </p:txBody>
+      </p:sp>
+      <p:sp>
+        <p:nvSpPr>
+          <p:cNvPr id="5" name="页脚"/>
+          <p:cNvSpPr txBox="1"/>
+          <p:nvPr/>
+        </p:nvSpPr>
+        <p:spPr>
+          <a:xfrm>
+            <a:off x="566928" y="6419088"/>
+            <a:ext cx="7740700" cy="274320"/>
+          </a:xfrm>
+          <a:prstGeom prst="rect">
+            <a:avLst/>
+          </a:prstGeom>
+          <a:noFill/>
+        </p:spPr>
+        <p:txBody>
+          <a:bodyPr wrap="square" lIns="0" tIns="0" rIns="0" bIns="0">
+            <a:noAutofit/>
+          </a:bodyPr>
+          <a:lstStyle/>
+          <a:p>
+            <a:pPr marL="0" indent="0" lvl="0">
+              <a:lnSpc>
+                <a:spcPct val="100000"/>
+              </a:lnSpc>
+              <a:buNone/>
+            </a:pPr>
+            <a:r>
+              <a:rPr lang="zh-CN" sz="1000" dirty="0">
+                <a:solidFill>
+                  <a:srgbClr val="6B6B66"/>
+                </a:solidFill>
+                <a:latin typeface="Segoe UI"/>
+                <a:ea typeface="Noto Sans CJK SC"/>
+                <a:cs typeface="Segoe UI"/>
+              </a:rPr>
+              <a:t>第9章 文件管理和外排序</a:t>
+            </a:r>
+          </a:p>
+        </p:txBody>
+      </p:sp>
+      <p:sp>
+        <p:nvSpPr>
+          <p:cNvPr id="6" name="页码"/>
+          <p:cNvSpPr txBox="1"/>
+          <p:nvPr/>
+        </p:nvSpPr>
+        <p:spPr>
+          <a:xfrm>
+            <a:off x="8307628" y="6419088"/>
+            <a:ext cx="3317443" cy="274320"/>
+          </a:xfrm>
+          <a:prstGeom prst="rect">
+            <a:avLst/>
+          </a:prstGeom>
+          <a:noFill/>
+        </p:spPr>
+        <p:txBody>
+          <a:bodyPr wrap="square" lIns="0" tIns="0" rIns="0" bIns="0">
+            <a:noAutofit/>
+          </a:bodyPr>
+          <a:lstStyle/>
+          <a:p>
+            <a:pPr marL="0" indent="0" lvl="0" algn="r">
+              <a:lnSpc>
+                <a:spcPct val="100000"/>
+              </a:lnSpc>
+              <a:buNone/>
+            </a:pPr>
+            <a:r>
+              <a:rPr lang="zh-CN" sz="1000" dirty="0">
+                <a:solidFill>
+                  <a:srgbClr val="6B6B66"/>
+                </a:solidFill>
+                <a:latin typeface="Segoe UI"/>
+                <a:ea typeface="Noto Sans CJK SC"/>
+                <a:cs typeface="Segoe UI"/>
+              </a:rPr>
+              <a:t>21 / 31</a:t>
             </a:r>
           </a:p>
         </p:txBody>
@@ -9322,7 +9331,7 @@
                 <a:ea typeface="Noto Sans CJK SC"/>
                 <a:cs typeface="Segoe UI"/>
               </a:rPr>
-              <a:t>课堂讲解卡：外排序先算 I/O</a:t>
+              <a:t>课堂例题：M=3 的置换选择</a:t>
             </a:r>
           </a:p>
         </p:txBody>
@@ -9391,7 +9400,29 @@
                 <a:ea typeface="Noto Sans CJK SC"/>
                 <a:cs typeface="Segoe UI"/>
               </a:rPr>
-              <a:t>内存只放得下 M 条记录时，目标不是少比较，而是少读写磁盘页。初始顺串、归并路数和缓冲区大小共同决定总 I/O。</a:t>
+              <a:t>输入 </a:t>
+            </a:r>
+            <a:r>
+              <a:rPr lang="zh-CN" sz="2340" dirty="0">
+                <a:solidFill>
+                  <a:srgbClr val="2C6B57"/>
+                </a:solidFill>
+                <a:latin typeface="Noto Sans Mono CJK SC"/>
+                <a:ea typeface="Noto Sans Mono CJK SC"/>
+                <a:cs typeface="Noto Sans Mono CJK SC"/>
+              </a:rPr>
+              <a:t>4,1,3,2,5,0</a:t>
+            </a:r>
+            <a:r>
+              <a:rPr lang="zh-CN" sz="2340" dirty="0">
+                <a:solidFill>
+                  <a:srgbClr val="1A1A18"/>
+                </a:solidFill>
+                <a:latin typeface="Segoe UI"/>
+                <a:ea typeface="Noto Sans CJK SC"/>
+                <a:cs typeface="Segoe UI"/>
+              </a:rPr>
+              <a:t>：先建容量 3 的堆，输出不小于上次输出的记录，较小的记录冻结到下一顺串。 让学生列出两条顺串，再用二路或四路归并合成最终结果。</a:t>
             </a:r>
           </a:p>
         </p:txBody>
@@ -9475,7 +9506,7 @@
                 <a:ea typeface="Noto Sans CJK SC"/>
                 <a:cs typeface="Segoe UI"/>
               </a:rPr>
-              <a:t>22 / 32</a:t>
+              <a:t>22 / 31</a:t>
             </a:r>
           </a:p>
         </p:txBody>
@@ -9539,7 +9570,7 @@
                 <a:ea typeface="Noto Sans CJK SC"/>
                 <a:cs typeface="Segoe UI"/>
               </a:rPr>
-              <a:t>课堂例题：M=3 的置换选择</a:t>
+              <a:t>课堂例题答案：M=3</a:t>
             </a:r>
           </a:p>
         </p:txBody>
@@ -9608,7 +9639,7 @@
                 <a:ea typeface="Noto Sans CJK SC"/>
                 <a:cs typeface="Segoe UI"/>
               </a:rPr>
-              <a:t>输入 </a:t>
+              <a:t>初始堆为 </a:t>
             </a:r>
             <a:r>
               <a:rPr lang="zh-CN" sz="2340" dirty="0">
@@ -9619,7 +9650,7 @@
                 <a:ea typeface="Noto Sans Mono CJK SC"/>
                 <a:cs typeface="Noto Sans Mono CJK SC"/>
               </a:rPr>
-              <a:t>4,1,3,2,5,0</a:t>
+              <a:t>1,4,3</a:t>
             </a:r>
             <a:r>
               <a:rPr lang="zh-CN" sz="2340" dirty="0">
@@ -9630,7 +9661,51 @@
                 <a:ea typeface="Noto Sans CJK SC"/>
                 <a:cs typeface="Segoe UI"/>
               </a:rPr>
-              <a:t>：先建容量 3 的堆，输出不小于上次输出的记录，较小的记录冻结到下一顺串。 让学生列出两条顺串，再用二路或四路归并合成最终结果。</a:t>
+              <a:t>，输出 1 后读入 2，继续当前顺串；输出 3 后读入 0，因 </a:t>
+            </a:r>
+            <a:r>
+              <a:rPr lang="zh-CN" sz="2340" dirty="0">
+                <a:solidFill>
+                  <a:srgbClr val="2C6B57"/>
+                </a:solidFill>
+                <a:latin typeface="Noto Sans Mono CJK SC"/>
+                <a:ea typeface="Noto Sans Mono CJK SC"/>
+                <a:cs typeface="Noto Sans Mono CJK SC"/>
+              </a:rPr>
+              <a:t>0&lt;3</a:t>
+            </a:r>
+            <a:r>
+              <a:rPr lang="zh-CN" sz="2340" dirty="0">
+                <a:solidFill>
+                  <a:srgbClr val="1A1A18"/>
+                </a:solidFill>
+                <a:latin typeface="Segoe UI"/>
+                <a:ea typeface="Noto Sans CJK SC"/>
+                <a:cs typeface="Segoe UI"/>
+              </a:rPr>
+              <a:t> 冻结。当前顺串为 </a:t>
+            </a:r>
+            <a:r>
+              <a:rPr lang="zh-CN" sz="2340" dirty="0">
+                <a:solidFill>
+                  <a:srgbClr val="2C6B57"/>
+                </a:solidFill>
+                <a:latin typeface="Noto Sans Mono CJK SC"/>
+                <a:ea typeface="Noto Sans Mono CJK SC"/>
+                <a:cs typeface="Noto Sans Mono CJK SC"/>
+              </a:rPr>
+              <a:t>1,2,3,4,5</a:t>
+            </a:r>
+            <a:r>
+              <a:rPr lang="zh-CN" sz="2340" dirty="0">
+                <a:solidFill>
+                  <a:srgbClr val="1A1A18"/>
+                </a:solidFill>
+                <a:latin typeface="Segoe UI"/>
+                <a:ea typeface="Noto Sans CJK SC"/>
+                <a:cs typeface="Segoe UI"/>
+              </a:rPr>
+              <a:t>，下一顺串从冻结的 0 开始，再进行归并。</a:t>
             </a:r>
           </a:p>
         </p:txBody>
@@ -9714,7 +9789,7 @@
                 <a:ea typeface="Noto Sans CJK SC"/>
                 <a:cs typeface="Segoe UI"/>
               </a:rPr>
-              <a:t>23 / 32</a:t>
+              <a:t>23 / 31</a:t>
             </a:r>
           </a:p>
         </p:txBody>
@@ -9778,7 +9853,7 @@
                 <a:ea typeface="Noto Sans CJK SC"/>
                 <a:cs typeface="Segoe UI"/>
               </a:rPr>
-              <a:t>课堂例题答案：M=3</a:t>
+              <a:t>课末自检</a:t>
             </a:r>
           </a:p>
         </p:txBody>
@@ -9812,14 +9887,14 @@
       </p:sp>
       <p:sp>
         <p:nvSpPr>
-          <p:cNvPr id="4" name="正文"/>
+          <p:cNvPr id="4" name="要点"/>
           <p:cNvSpPr txBox="1"/>
           <p:nvPr/>
         </p:nvSpPr>
         <p:spPr>
           <a:xfrm>
-            <a:off x="566928" y="1946148"/>
-            <a:ext cx="11058144" cy="796442"/>
+            <a:off x="566928" y="1995678"/>
+            <a:ext cx="11058144" cy="1925724"/>
           </a:xfrm>
           <a:prstGeom prst="rect">
             <a:avLst/>
@@ -9832,11 +9907,18 @@
           </a:bodyPr>
           <a:lstStyle/>
           <a:p>
-            <a:pPr marL="0" indent="0" lvl="0">
-              <a:lnSpc>
-                <a:spcPct val="100000"/>
-              </a:lnSpc>
-              <a:buNone/>
+            <a:pPr marL="270000" indent="-230000" lvl="0">
+              <a:lnSpc>
+                <a:spcPct val="100000"/>
+              </a:lnSpc>
+              <a:spcBef>
+                <a:spcPts val="655"/>
+              </a:spcBef>
+              <a:buClr>
+                <a:srgbClr val="8A4B2A"/>
+              </a:buClr>
+              <a:buFont typeface="Arial"/>
+              <a:buChar char="●"/>
             </a:pPr>
             <a:r>
               <a:rPr lang="zh-CN" sz="2340" dirty="0">
@@ -9847,19 +9929,49 @@
                 <a:ea typeface="Noto Sans CJK SC"/>
                 <a:cs typeface="Segoe UI"/>
               </a:rPr>
-              <a:t>初始堆为 </a:t>
-            </a:r>
+              <a:t>为什么顺序读写通常比随机访问便宜？</a:t>
+            </a:r>
+          </a:p>
+          <a:p>
+            <a:pPr marL="270000" indent="-230000" lvl="0">
+              <a:lnSpc>
+                <a:spcPct val="100000"/>
+              </a:lnSpc>
+              <a:spcBef>
+                <a:spcPts val="655"/>
+              </a:spcBef>
+              <a:buClr>
+                <a:srgbClr val="8A4B2A"/>
+              </a:buClr>
+              <a:buFont typeface="Arial"/>
+              <a:buChar char="●"/>
+            </a:pPr>
             <a:r>
               <a:rPr lang="zh-CN" sz="2340" dirty="0">
                 <a:solidFill>
-                  <a:srgbClr val="2C6B57"/>
-                </a:solidFill>
-                <a:latin typeface="Noto Sans Mono CJK SC"/>
-                <a:ea typeface="Noto Sans Mono CJK SC"/>
-                <a:cs typeface="Noto Sans Mono CJK SC"/>
-              </a:rPr>
-              <a:t>1,4,3</a:t>
-            </a:r>
+                  <a:srgbClr val="1A1A18"/>
+                </a:solidFill>
+                <a:latin typeface="Segoe UI"/>
+                <a:ea typeface="Noto Sans CJK SC"/>
+                <a:cs typeface="Segoe UI"/>
+              </a:rPr>
+              <a:t>置换选择如何使顺串平均长于 M？</a:t>
+            </a:r>
+          </a:p>
+          <a:p>
+            <a:pPr marL="270000" indent="-230000" lvl="0">
+              <a:lnSpc>
+                <a:spcPct val="100000"/>
+              </a:lnSpc>
+              <a:spcBef>
+                <a:spcPts val="655"/>
+              </a:spcBef>
+              <a:buClr>
+                <a:srgbClr val="8A4B2A"/>
+              </a:buClr>
+              <a:buFont typeface="Arial"/>
+              <a:buChar char="●"/>
+            </a:pPr>
             <a:r>
               <a:rPr lang="zh-CN" sz="2340" dirty="0">
                 <a:solidFill>
@@ -9869,51 +9981,33 @@
                 <a:ea typeface="Noto Sans CJK SC"/>
                 <a:cs typeface="Segoe UI"/>
               </a:rPr>
-              <a:t>，输出 1 后读入 2，继续当前顺串；输出 3 后读入 0，因 </a:t>
-            </a:r>
+              <a:t>赢者树和败者树每次更新为什么是 O(log k)？</a:t>
+            </a:r>
+          </a:p>
+          <a:p>
+            <a:pPr marL="270000" indent="-230000" lvl="0">
+              <a:lnSpc>
+                <a:spcPct val="100000"/>
+              </a:lnSpc>
+              <a:spcBef>
+                <a:spcPts val="655"/>
+              </a:spcBef>
+              <a:buClr>
+                <a:srgbClr val="8A4B2A"/>
+              </a:buClr>
+              <a:buFont typeface="Arial"/>
+              <a:buChar char="●"/>
+            </a:pPr>
             <a:r>
               <a:rPr lang="zh-CN" sz="2340" dirty="0">
                 <a:solidFill>
-                  <a:srgbClr val="2C6B57"/>
-                </a:solidFill>
-                <a:latin typeface="Noto Sans Mono CJK SC"/>
-                <a:ea typeface="Noto Sans Mono CJK SC"/>
-                <a:cs typeface="Noto Sans Mono CJK SC"/>
-              </a:rPr>
-              <a:t>0&lt;3</a:t>
-            </a:r>
-            <a:r>
-              <a:rPr lang="zh-CN" sz="2340" dirty="0">
-                <a:solidFill>
-                  <a:srgbClr val="1A1A18"/>
-                </a:solidFill>
-                <a:latin typeface="Segoe UI"/>
-                <a:ea typeface="Noto Sans CJK SC"/>
-                <a:cs typeface="Segoe UI"/>
-              </a:rPr>
-              <a:t> 冻结。当前顺串为 </a:t>
-            </a:r>
-            <a:r>
-              <a:rPr lang="zh-CN" sz="2340" dirty="0">
-                <a:solidFill>
-                  <a:srgbClr val="2C6B57"/>
-                </a:solidFill>
-                <a:latin typeface="Noto Sans Mono CJK SC"/>
-                <a:ea typeface="Noto Sans Mono CJK SC"/>
-                <a:cs typeface="Noto Sans Mono CJK SC"/>
-              </a:rPr>
-              <a:t>1,2,3,4,5</a:t>
-            </a:r>
-            <a:r>
-              <a:rPr lang="zh-CN" sz="2340" dirty="0">
-                <a:solidFill>
-                  <a:srgbClr val="1A1A18"/>
-                </a:solidFill>
-                <a:latin typeface="Segoe UI"/>
-                <a:ea typeface="Noto Sans CJK SC"/>
-                <a:cs typeface="Segoe UI"/>
-              </a:rPr>
-              <a:t>，下一顺串从冻结的 0 开始，再进行归并。</a:t>
+                  <a:srgbClr val="1A1A18"/>
+                </a:solidFill>
+                <a:latin typeface="Segoe UI"/>
+                <a:ea typeface="Noto Sans CJK SC"/>
+                <a:cs typeface="Segoe UI"/>
+              </a:rPr>
+              <a:t>页大小、记录大小和归并路数之间如何权衡？</a:t>
             </a:r>
           </a:p>
         </p:txBody>
@@ -9997,7 +10091,7 @@
                 <a:ea typeface="Noto Sans CJK SC"/>
                 <a:cs typeface="Segoe UI"/>
               </a:rPr>
-              <a:t>24 / 32</a:t>
+              <a:t>24 / 31</a:t>
             </a:r>
           </a:p>
         </p:txBody>
@@ -10061,7 +10155,7 @@
                 <a:ea typeface="Noto Sans CJK SC"/>
                 <a:cs typeface="Segoe UI"/>
               </a:rPr>
-              <a:t>课末自检</a:t>
+              <a:t>课末自检参考答案</a:t>
             </a:r>
           </a:p>
         </p:txBody>
@@ -10137,7 +10231,7 @@
                 <a:ea typeface="Noto Sans CJK SC"/>
                 <a:cs typeface="Segoe UI"/>
               </a:rPr>
-              <a:t>为什么顺序读写通常比随机访问便宜？</a:t>
+              <a:t>顺序读写能合并页访问，随机访问会频繁触发定位和换页。</a:t>
             </a:r>
           </a:p>
           <a:p>
@@ -10163,7 +10257,7 @@
                 <a:ea typeface="Noto Sans CJK SC"/>
                 <a:cs typeface="Segoe UI"/>
               </a:rPr>
-              <a:t>置换选择如何使顺串平均长于 M？</a:t>
+              <a:t>置换选择把不破坏当前顺序的输入继续留在堆中。</a:t>
             </a:r>
           </a:p>
           <a:p>
@@ -10189,7 +10283,7 @@
                 <a:ea typeface="Noto Sans CJK SC"/>
                 <a:cs typeface="Segoe UI"/>
               </a:rPr>
-              <a:t>赢者树和败者树每次更新为什么是 O(log k)？</a:t>
+              <a:t>选择树更新只沿一条叶到根路径，代价 O(log k)。</a:t>
             </a:r>
           </a:p>
           <a:p>
@@ -10215,7 +10309,7 @@
                 <a:ea typeface="Noto Sans CJK SC"/>
                 <a:cs typeface="Segoe UI"/>
               </a:rPr>
-              <a:t>页大小、记录大小和归并路数之间如何权衡？</a:t>
+              <a:t>更大页和更多路数减少轮数，但增加缓冲区成本。</a:t>
             </a:r>
           </a:p>
         </p:txBody>
@@ -10299,7 +10393,7 @@
                 <a:ea typeface="Noto Sans CJK SC"/>
                 <a:cs typeface="Segoe UI"/>
               </a:rPr>
-              <a:t>25 / 32</a:t>
+              <a:t>25 / 31</a:t>
             </a:r>
           </a:p>
         </p:txBody>
@@ -10363,7 +10457,7 @@
                 <a:ea typeface="Noto Sans CJK SC"/>
                 <a:cs typeface="Segoe UI"/>
               </a:rPr>
-              <a:t>课末自检参考答案</a:t>
+              <a:t>状态演算：冻结记录</a:t>
             </a:r>
           </a:p>
         </p:txBody>
@@ -10397,14 +10491,14 @@
       </p:sp>
       <p:sp>
         <p:nvSpPr>
-          <p:cNvPr id="4" name="要点"/>
+          <p:cNvPr id="4" name="正文"/>
           <p:cNvSpPr txBox="1"/>
           <p:nvPr/>
         </p:nvSpPr>
         <p:spPr>
           <a:xfrm>
-            <a:off x="566928" y="1995678"/>
-            <a:ext cx="11058144" cy="1925724"/>
+            <a:off x="566928" y="1946148"/>
+            <a:ext cx="11058144" cy="796442"/>
           </a:xfrm>
           <a:prstGeom prst="rect">
             <a:avLst/>
@@ -10417,18 +10511,11 @@
           </a:bodyPr>
           <a:lstStyle/>
           <a:p>
-            <a:pPr marL="270000" indent="-230000" lvl="0">
-              <a:lnSpc>
-                <a:spcPct val="100000"/>
-              </a:lnSpc>
-              <a:spcBef>
-                <a:spcPts val="655"/>
-              </a:spcBef>
-              <a:buClr>
-                <a:srgbClr val="8A4B2A"/>
-              </a:buClr>
-              <a:buFont typeface="Arial"/>
-              <a:buChar char="●"/>
+            <a:pPr marL="0" indent="0" lvl="0">
+              <a:lnSpc>
+                <a:spcPct val="100000"/>
+              </a:lnSpc>
+              <a:buNone/>
             </a:pPr>
             <a:r>
               <a:rPr lang="zh-CN" sz="2340" dirty="0">
@@ -10439,49 +10526,19 @@
                 <a:ea typeface="Noto Sans CJK SC"/>
                 <a:cs typeface="Segoe UI"/>
               </a:rPr>
-              <a:t>顺序读写能合并页访问，随机访问会频繁触发定位和换页。</a:t>
-            </a:r>
-          </a:p>
-          <a:p>
-            <a:pPr marL="270000" indent="-230000" lvl="0">
-              <a:lnSpc>
-                <a:spcPct val="100000"/>
-              </a:lnSpc>
-              <a:spcBef>
-                <a:spcPts val="655"/>
-              </a:spcBef>
-              <a:buClr>
-                <a:srgbClr val="8A4B2A"/>
-              </a:buClr>
-              <a:buFont typeface="Arial"/>
-              <a:buChar char="●"/>
-            </a:pPr>
+              <a:t>内存容量 M=3，输出 3 后读入 1；因为 </a:t>
+            </a:r>
             <a:r>
               <a:rPr lang="zh-CN" sz="2340" dirty="0">
                 <a:solidFill>
-                  <a:srgbClr val="1A1A18"/>
-                </a:solidFill>
-                <a:latin typeface="Segoe UI"/>
-                <a:ea typeface="Noto Sans CJK SC"/>
-                <a:cs typeface="Segoe UI"/>
-              </a:rPr>
-              <a:t>置换选择把不破坏当前顺序的输入继续留在堆中。</a:t>
-            </a:r>
-          </a:p>
-          <a:p>
-            <a:pPr marL="270000" indent="-230000" lvl="0">
-              <a:lnSpc>
-                <a:spcPct val="100000"/>
-              </a:lnSpc>
-              <a:spcBef>
-                <a:spcPts val="655"/>
-              </a:spcBef>
-              <a:buClr>
-                <a:srgbClr val="8A4B2A"/>
-              </a:buClr>
-              <a:buFont typeface="Arial"/>
-              <a:buChar char="●"/>
-            </a:pPr>
+                  <a:srgbClr val="2C6B57"/>
+                </a:solidFill>
+                <a:latin typeface="Noto Sans Mono CJK SC"/>
+                <a:ea typeface="Noto Sans Mono CJK SC"/>
+                <a:cs typeface="Noto Sans Mono CJK SC"/>
+              </a:rPr>
+              <a:t>1&lt;3</a:t>
+            </a:r>
             <a:r>
               <a:rPr lang="zh-CN" sz="2340" dirty="0">
                 <a:solidFill>
@@ -10491,33 +10548,7 @@
                 <a:ea typeface="Noto Sans CJK SC"/>
                 <a:cs typeface="Segoe UI"/>
               </a:rPr>
-              <a:t>选择树更新只沿一条叶到根路径，代价 O(log k)。</a:t>
-            </a:r>
-          </a:p>
-          <a:p>
-            <a:pPr marL="270000" indent="-230000" lvl="0">
-              <a:lnSpc>
-                <a:spcPct val="100000"/>
-              </a:lnSpc>
-              <a:spcBef>
-                <a:spcPts val="655"/>
-              </a:spcBef>
-              <a:buClr>
-                <a:srgbClr val="8A4B2A"/>
-              </a:buClr>
-              <a:buFont typeface="Arial"/>
-              <a:buChar char="●"/>
-            </a:pPr>
-            <a:r>
-              <a:rPr lang="zh-CN" sz="2340" dirty="0">
-                <a:solidFill>
-                  <a:srgbClr val="1A1A18"/>
-                </a:solidFill>
-                <a:latin typeface="Segoe UI"/>
-                <a:ea typeface="Noto Sans CJK SC"/>
-                <a:cs typeface="Segoe UI"/>
-              </a:rPr>
-              <a:t>更大页和更多路数减少轮数，但增加缓冲区成本。</a:t>
+              <a:t>，它不能进入当前递增顺串，必须标记冻结，等下一趟重新建堆。</a:t>
             </a:r>
           </a:p>
         </p:txBody>
@@ -10601,7 +10632,7 @@
                 <a:ea typeface="Noto Sans CJK SC"/>
                 <a:cs typeface="Segoe UI"/>
               </a:rPr>
-              <a:t>26 / 32</a:t>
+              <a:t>26 / 31</a:t>
             </a:r>
           </a:p>
         </p:txBody>
@@ -10665,7 +10696,7 @@
                 <a:ea typeface="Noto Sans CJK SC"/>
                 <a:cs typeface="Segoe UI"/>
               </a:rPr>
-              <a:t>状态演算：冻结记录</a:t>
+              <a:t>反例：把冻结记录立即放回堆</a:t>
             </a:r>
           </a:p>
         </p:txBody>
@@ -10706,7 +10737,7 @@
         <p:spPr>
           <a:xfrm>
             <a:off x="566928" y="1946148"/>
-            <a:ext cx="11058144" cy="796442"/>
+            <a:ext cx="11058144" cy="398221"/>
           </a:xfrm>
           <a:prstGeom prst="rect">
             <a:avLst/>
@@ -10734,29 +10765,7 @@
                 <a:ea typeface="Noto Sans CJK SC"/>
                 <a:cs typeface="Segoe UI"/>
               </a:rPr>
-              <a:t>内存容量 M=3，输出 3 后读入 1；因为 </a:t>
-            </a:r>
-            <a:r>
-              <a:rPr lang="zh-CN" sz="2340" dirty="0">
-                <a:solidFill>
-                  <a:srgbClr val="2C6B57"/>
-                </a:solidFill>
-                <a:latin typeface="Noto Sans Mono CJK SC"/>
-                <a:ea typeface="Noto Sans Mono CJK SC"/>
-                <a:cs typeface="Noto Sans Mono CJK SC"/>
-              </a:rPr>
-              <a:t>1&lt;3</a:t>
-            </a:r>
-            <a:r>
-              <a:rPr lang="zh-CN" sz="2340" dirty="0">
-                <a:solidFill>
-                  <a:srgbClr val="1A1A18"/>
-                </a:solidFill>
-                <a:latin typeface="Segoe UI"/>
-                <a:ea typeface="Noto Sans CJK SC"/>
-                <a:cs typeface="Segoe UI"/>
-              </a:rPr>
-              <a:t>，它不能进入当前递增顺串，必须标记冻结，等下一趟重新建堆。</a:t>
+              <a:t>这样会破坏当前顺串的非递减性，归并阶段可能读到逆序记录，最终结果不再可靠。</a:t>
             </a:r>
           </a:p>
         </p:txBody>
@@ -10840,7 +10849,7 @@
                 <a:ea typeface="Noto Sans CJK SC"/>
                 <a:cs typeface="Segoe UI"/>
               </a:rPr>
-              <a:t>27 / 32</a:t>
+              <a:t>27 / 31</a:t>
             </a:r>
           </a:p>
         </p:txBody>
@@ -10904,7 +10913,7 @@
                 <a:ea typeface="Noto Sans CJK SC"/>
                 <a:cs typeface="Segoe UI"/>
               </a:rPr>
-              <a:t>反例：把冻结记录立即放回堆</a:t>
+              <a:t>课堂练习与答案</a:t>
             </a:r>
           </a:p>
         </p:txBody>
@@ -10945,7 +10954,7 @@
         <p:spPr>
           <a:xfrm>
             <a:off x="566928" y="1946148"/>
-            <a:ext cx="11058144" cy="398221"/>
+            <a:ext cx="11058144" cy="796442"/>
           </a:xfrm>
           <a:prstGeom prst="rect">
             <a:avLst/>
@@ -10973,7 +10982,7 @@
                 <a:ea typeface="Noto Sans CJK SC"/>
                 <a:cs typeface="Segoe UI"/>
               </a:rPr>
-              <a:t>这样会破坏当前顺串的非递减性，归并阶段可能读到逆序记录，最终结果不再可靠。</a:t>
+              <a:t>课堂练习：解释为什么随机输入的顺串平均可超过 M。答案：大于当前输出的记录继续留在堆中，活跃记录不断补入，直到遇到较小记录才冻结。</a:t>
             </a:r>
           </a:p>
         </p:txBody>
@@ -11057,7 +11066,7 @@
                 <a:ea typeface="Noto Sans CJK SC"/>
                 <a:cs typeface="Segoe UI"/>
               </a:rPr>
-              <a:t>28 / 32</a:t>
+              <a:t>28 / 31</a:t>
             </a:r>
           </a:p>
         </p:txBody>
@@ -11121,7 +11130,7 @@
                 <a:ea typeface="Noto Sans CJK SC"/>
                 <a:cs typeface="Segoe UI"/>
               </a:rPr>
-              <a:t>课堂练习与答案</a:t>
+              <a:t>Python 算法轨：置换选择与选择树</a:t>
             </a:r>
           </a:p>
         </p:txBody>
@@ -11161,8 +11170,8 @@
         </p:nvSpPr>
         <p:spPr>
           <a:xfrm>
-            <a:off x="566928" y="1946148"/>
-            <a:ext cx="11058144" cy="796442"/>
+            <a:off x="566928" y="1171042"/>
+            <a:ext cx="11058144" cy="232806"/>
           </a:xfrm>
           <a:prstGeom prst="rect">
             <a:avLst/>
@@ -11182,22 +11191,1419 @@
               <a:buNone/>
             </a:pPr>
             <a:r>
-              <a:rPr lang="zh-CN" sz="2340" dirty="0">
-                <a:solidFill>
-                  <a:srgbClr val="1A1A18"/>
-                </a:solidFill>
-                <a:latin typeface="Segoe UI"/>
-                <a:ea typeface="Noto Sans CJK SC"/>
-                <a:cs typeface="Segoe UI"/>
-              </a:rPr>
-              <a:t>课堂练习：解释为什么随机输入的顺串平均可超过 M。答案：大于当前输出的记录继续留在堆中，活跃记录不断补入，直到遇到较小记录才冻结。</a:t>
-            </a:r>
-          </a:p>
-        </p:txBody>
-      </p:sp>
-      <p:sp>
-        <p:nvSpPr>
-          <p:cNvPr id="5" name="页脚"/>
+              <a:rPr lang="zh-CN" sz="1368" dirty="0">
+                <a:solidFill>
+                  <a:srgbClr val="1A1A18"/>
+                </a:solidFill>
+                <a:latin typeface="Segoe UI"/>
+                <a:ea typeface="Noto Sans CJK SC"/>
+                <a:cs typeface="Segoe UI"/>
+              </a:rPr>
+              <a:t>Python 版用于演示顺串生成、多路归并和赢家/败者更新；C++ 版补足文件页、缓冲区和对象所有权等工程实现。</a:t>
+            </a:r>
+          </a:p>
+        </p:txBody>
+      </p:sp>
+      <p:sp>
+        <p:nvSpPr>
+          <p:cNvPr id="5" name="代码"/>
+          <p:cNvSpPr txBox="1"/>
+          <p:nvPr/>
+        </p:nvSpPr>
+        <p:spPr>
+          <a:xfrm>
+            <a:off x="566928" y="1481064"/>
+            <a:ext cx="11058144" cy="4769266"/>
+          </a:xfrm>
+          <a:prstGeom prst="roundRect">
+            <a:avLst>
+              <a:gd name="adj" fmla="val 6000"/>
+            </a:avLst>
+          </a:prstGeom>
+          <a:solidFill>
+            <a:srgbClr val="F5F4F0"/>
+          </a:solidFill>
+          <a:ln w="9525">
+            <a:solidFill>
+              <a:srgbClr val="DCDCD6"/>
+            </a:solidFill>
+          </a:ln>
+        </p:spPr>
+        <p:txBody>
+          <a:bodyPr wrap="square" lIns="100584" tIns="100584" rIns="100584" bIns="100584">
+            <a:noAutofit/>
+          </a:bodyPr>
+          <a:lstStyle/>
+          <a:p>
+            <a:pPr marL="0" indent="0" lvl="0">
+              <a:lnSpc>
+                <a:spcPct val="100000"/>
+              </a:lnSpc>
+              <a:buNone/>
+            </a:pPr>
+            <a:r>
+              <a:rPr lang="zh-CN" sz="711" dirty="0">
+                <a:solidFill>
+                  <a:srgbClr val="6B6B66"/>
+                </a:solidFill>
+                <a:latin typeface="Noto Sans Mono CJK SC"/>
+                <a:ea typeface="Noto Sans Mono CJK SC"/>
+                <a:cs typeface="Noto Sans Mono CJK SC"/>
+              </a:rPr>
+              <a:t>code/ch09/external_sort/modern.py#winner-tree</a:t>
+            </a:r>
+          </a:p>
+          <a:p>
+            <a:pPr marL="0" indent="0" lvl="0">
+              <a:lnSpc>
+                <a:spcPct val="104000"/>
+              </a:lnSpc>
+              <a:buNone/>
+            </a:pPr>
+            <a:r>
+              <a:rPr lang="zh-CN" sz="912" dirty="0">
+                <a:solidFill>
+                  <a:srgbClr val="8A4B2A"/>
+                </a:solidFill>
+                <a:latin typeface="Noto Sans Mono CJK SC"/>
+                <a:ea typeface="Noto Sans Mono CJK SC"/>
+                <a:cs typeface="Noto Sans Mono CJK SC"/>
+              </a:rPr>
+              <a:t>class</a:t>
+            </a:r>
+            <a:r>
+              <a:rPr lang="zh-CN" sz="912" dirty="0">
+                <a:solidFill>
+                  <a:srgbClr val="1A1A18"/>
+                </a:solidFill>
+                <a:latin typeface="Noto Sans Mono CJK SC"/>
+                <a:ea typeface="Noto Sans Mono CJK SC"/>
+                <a:cs typeface="Noto Sans Mono CJK SC"/>
+              </a:rPr>
+              <a:t> WinnerTree(_Tournament):</a:t>
+            </a:r>
+          </a:p>
+          <a:p>
+            <a:pPr marL="0" indent="0" lvl="0">
+              <a:lnSpc>
+                <a:spcPct val="104000"/>
+              </a:lnSpc>
+              <a:buNone/>
+            </a:pPr>
+            <a:r>
+              <a:rPr lang="zh-CN" sz="912" dirty="0">
+                <a:solidFill>
+                  <a:srgbClr val="1A1A18"/>
+                </a:solidFill>
+                <a:latin typeface="Noto Sans Mono CJK SC"/>
+                <a:ea typeface="Noto Sans Mono CJK SC"/>
+                <a:cs typeface="Noto Sans Mono CJK SC"/>
+              </a:rPr>
+              <a:t>    </a:t>
+            </a:r>
+            <a:r>
+              <a:rPr lang="zh-CN" sz="912" dirty="0">
+                <a:solidFill>
+                  <a:srgbClr val="7A5C1E"/>
+                </a:solidFill>
+                <a:latin typeface="Noto Sans Mono CJK SC"/>
+                <a:ea typeface="Noto Sans Mono CJK SC"/>
+                <a:cs typeface="Noto Sans Mono CJK SC"/>
+              </a:rPr>
+              <a:t>"""代码9.2：内部结点记**赢家**，根就是全局最小的那一路。</a:t>
+            </a:r>
+          </a:p>
+          <a:p>
+            <a:pPr marL="0" indent="0" lvl="0">
+              <a:lnSpc>
+                <a:spcPct val="104000"/>
+              </a:lnSpc>
+              <a:buNone/>
+            </a:pPr>
+            <a:r>
+              <a:rPr lang="zh-CN" sz="912" dirty="0">
+                <a:solidFill>
+                  <a:srgbClr val="1A1A18"/>
+                </a:solidFill>
+                <a:latin typeface="Noto Sans Mono CJK SC"/>
+                <a:ea typeface="Noto Sans Mono CJK SC"/>
+                <a:cs typeface="Noto Sans Mono CJK SC"/>
+              </a:rPr>
+              <a:t> </a:t>
+            </a:r>
+          </a:p>
+          <a:p>
+            <a:pPr marL="0" indent="0" lvl="0">
+              <a:lnSpc>
+                <a:spcPct val="104000"/>
+              </a:lnSpc>
+              <a:buNone/>
+            </a:pPr>
+            <a:r>
+              <a:rPr lang="zh-CN" sz="912" dirty="0">
+                <a:solidFill>
+                  <a:srgbClr val="7A5C1E"/>
+                </a:solidFill>
+                <a:latin typeface="Noto Sans Mono CJK SC"/>
+                <a:ea typeface="Noto Sans Mono CJK SC"/>
+                <a:cs typeface="Noto Sans Mono CJK SC"/>
+              </a:rPr>
+              <a:t>    重建一个结点要看它两个孩子的赢家，所以替换选手后沿路每层各比一次。</a:t>
+            </a:r>
+          </a:p>
+          <a:p>
+            <a:pPr marL="0" indent="0" lvl="0">
+              <a:lnSpc>
+                <a:spcPct val="104000"/>
+              </a:lnSpc>
+              <a:buNone/>
+            </a:pPr>
+            <a:r>
+              <a:rPr lang="zh-CN" sz="912" dirty="0">
+                <a:solidFill>
+                  <a:srgbClr val="7A5C1E"/>
+                </a:solidFill>
+                <a:latin typeface="Noto Sans Mono CJK SC"/>
+                <a:ea typeface="Noto Sans Mono CJK SC"/>
+                <a:cs typeface="Noto Sans Mono CJK SC"/>
+              </a:rPr>
+              <a:t>    """</a:t>
+            </a:r>
+          </a:p>
+          <a:p>
+            <a:pPr marL="0" indent="0" lvl="0">
+              <a:lnSpc>
+                <a:spcPct val="104000"/>
+              </a:lnSpc>
+              <a:buNone/>
+            </a:pPr>
+            <a:r>
+              <a:rPr lang="zh-CN" sz="912" dirty="0">
+                <a:solidFill>
+                  <a:srgbClr val="1A1A18"/>
+                </a:solidFill>
+                <a:latin typeface="Noto Sans Mono CJK SC"/>
+                <a:ea typeface="Noto Sans Mono CJK SC"/>
+                <a:cs typeface="Noto Sans Mono CJK SC"/>
+              </a:rPr>
+              <a:t> </a:t>
+            </a:r>
+          </a:p>
+          <a:p>
+            <a:pPr marL="0" indent="0" lvl="0">
+              <a:lnSpc>
+                <a:spcPct val="104000"/>
+              </a:lnSpc>
+              <a:buNone/>
+            </a:pPr>
+            <a:r>
+              <a:rPr lang="zh-CN" sz="912" dirty="0">
+                <a:solidFill>
+                  <a:srgbClr val="1A1A18"/>
+                </a:solidFill>
+                <a:latin typeface="Noto Sans Mono CJK SC"/>
+                <a:ea typeface="Noto Sans Mono CJK SC"/>
+                <a:cs typeface="Noto Sans Mono CJK SC"/>
+              </a:rPr>
+              <a:t>    </a:t>
+            </a:r>
+            <a:r>
+              <a:rPr lang="zh-CN" sz="912" dirty="0">
+                <a:solidFill>
+                  <a:srgbClr val="8A4B2A"/>
+                </a:solidFill>
+                <a:latin typeface="Noto Sans Mono CJK SC"/>
+                <a:ea typeface="Noto Sans Mono CJK SC"/>
+                <a:cs typeface="Noto Sans Mono CJK SC"/>
+              </a:rPr>
+              <a:t>def</a:t>
+            </a:r>
+            <a:r>
+              <a:rPr lang="zh-CN" sz="912" dirty="0">
+                <a:solidFill>
+                  <a:srgbClr val="1A1A18"/>
+                </a:solidFill>
+                <a:latin typeface="Noto Sans Mono CJK SC"/>
+                <a:ea typeface="Noto Sans Mono CJK SC"/>
+                <a:cs typeface="Noto Sans Mono CJK SC"/>
+              </a:rPr>
+              <a:t> _winner_at(self, node: </a:t>
+            </a:r>
+            <a:r>
+              <a:rPr lang="zh-CN" sz="912" dirty="0">
+                <a:solidFill>
+                  <a:srgbClr val="2C6B57"/>
+                </a:solidFill>
+                <a:latin typeface="Noto Sans Mono CJK SC"/>
+                <a:ea typeface="Noto Sans Mono CJK SC"/>
+                <a:cs typeface="Noto Sans Mono CJK SC"/>
+              </a:rPr>
+              <a:t>int</a:t>
+            </a:r>
+            <a:r>
+              <a:rPr lang="zh-CN" sz="912" dirty="0">
+                <a:solidFill>
+                  <a:srgbClr val="1A1A18"/>
+                </a:solidFill>
+                <a:latin typeface="Noto Sans Mono CJK SC"/>
+                <a:ea typeface="Noto Sans Mono CJK SC"/>
+                <a:cs typeface="Noto Sans Mono CJK SC"/>
+              </a:rPr>
+              <a:t>) -&gt; </a:t>
+            </a:r>
+            <a:r>
+              <a:rPr lang="zh-CN" sz="912" dirty="0">
+                <a:solidFill>
+                  <a:srgbClr val="2C6B57"/>
+                </a:solidFill>
+                <a:latin typeface="Noto Sans Mono CJK SC"/>
+                <a:ea typeface="Noto Sans Mono CJK SC"/>
+                <a:cs typeface="Noto Sans Mono CJK SC"/>
+              </a:rPr>
+              <a:t>int</a:t>
+            </a:r>
+            <a:r>
+              <a:rPr lang="zh-CN" sz="912" dirty="0">
+                <a:solidFill>
+                  <a:srgbClr val="1A1A18"/>
+                </a:solidFill>
+                <a:latin typeface="Noto Sans Mono CJK SC"/>
+                <a:ea typeface="Noto Sans Mono CJK SC"/>
+                <a:cs typeface="Noto Sans Mono CJK SC"/>
+              </a:rPr>
+              <a:t>:</a:t>
+            </a:r>
+          </a:p>
+          <a:p>
+            <a:pPr marL="0" indent="0" lvl="0">
+              <a:lnSpc>
+                <a:spcPct val="104000"/>
+              </a:lnSpc>
+              <a:buNone/>
+            </a:pPr>
+            <a:r>
+              <a:rPr lang="zh-CN" sz="912" dirty="0">
+                <a:solidFill>
+                  <a:srgbClr val="1A1A18"/>
+                </a:solidFill>
+                <a:latin typeface="Noto Sans Mono CJK SC"/>
+                <a:ea typeface="Noto Sans Mono CJK SC"/>
+                <a:cs typeface="Noto Sans Mono CJK SC"/>
+              </a:rPr>
+              <a:t>        </a:t>
+            </a:r>
+            <a:r>
+              <a:rPr lang="zh-CN" sz="912" dirty="0">
+                <a:solidFill>
+                  <a:srgbClr val="8A8A84"/>
+                </a:solidFill>
+                <a:latin typeface="Noto Sans Mono CJK SC"/>
+                <a:ea typeface="Noto Sans Mono CJK SC"/>
+                <a:cs typeface="Noto Sans Mono CJK SC"/>
+              </a:rPr>
+              <a:t># 叶子层不占内部结点的位置：第 j 个选手就在 _size + j 上，它自己是自己的赢家。</a:t>
+            </a:r>
+          </a:p>
+          <a:p>
+            <a:pPr marL="0" indent="0" lvl="0">
+              <a:lnSpc>
+                <a:spcPct val="104000"/>
+              </a:lnSpc>
+              <a:buNone/>
+            </a:pPr>
+            <a:r>
+              <a:rPr lang="zh-CN" sz="912" dirty="0">
+                <a:solidFill>
+                  <a:srgbClr val="1A1A18"/>
+                </a:solidFill>
+                <a:latin typeface="Noto Sans Mono CJK SC"/>
+                <a:ea typeface="Noto Sans Mono CJK SC"/>
+                <a:cs typeface="Noto Sans Mono CJK SC"/>
+              </a:rPr>
+              <a:t>        </a:t>
+            </a:r>
+            <a:r>
+              <a:rPr lang="zh-CN" sz="912" dirty="0">
+                <a:solidFill>
+                  <a:srgbClr val="8A4B2A"/>
+                </a:solidFill>
+                <a:latin typeface="Noto Sans Mono CJK SC"/>
+                <a:ea typeface="Noto Sans Mono CJK SC"/>
+                <a:cs typeface="Noto Sans Mono CJK SC"/>
+              </a:rPr>
+              <a:t>return</a:t>
+            </a:r>
+            <a:r>
+              <a:rPr lang="zh-CN" sz="912" dirty="0">
+                <a:solidFill>
+                  <a:srgbClr val="1A1A18"/>
+                </a:solidFill>
+                <a:latin typeface="Noto Sans Mono CJK SC"/>
+                <a:ea typeface="Noto Sans Mono CJK SC"/>
+                <a:cs typeface="Noto Sans Mono CJK SC"/>
+              </a:rPr>
+              <a:t> node - self._size </a:t>
+            </a:r>
+            <a:r>
+              <a:rPr lang="zh-CN" sz="912" dirty="0">
+                <a:solidFill>
+                  <a:srgbClr val="8A4B2A"/>
+                </a:solidFill>
+                <a:latin typeface="Noto Sans Mono CJK SC"/>
+                <a:ea typeface="Noto Sans Mono CJK SC"/>
+                <a:cs typeface="Noto Sans Mono CJK SC"/>
+              </a:rPr>
+              <a:t>if</a:t>
+            </a:r>
+            <a:r>
+              <a:rPr lang="zh-CN" sz="912" dirty="0">
+                <a:solidFill>
+                  <a:srgbClr val="1A1A18"/>
+                </a:solidFill>
+                <a:latin typeface="Noto Sans Mono CJK SC"/>
+                <a:ea typeface="Noto Sans Mono CJK SC"/>
+                <a:cs typeface="Noto Sans Mono CJK SC"/>
+              </a:rPr>
+              <a:t> node &gt;= self._size </a:t>
+            </a:r>
+            <a:r>
+              <a:rPr lang="zh-CN" sz="912" dirty="0">
+                <a:solidFill>
+                  <a:srgbClr val="8A4B2A"/>
+                </a:solidFill>
+                <a:latin typeface="Noto Sans Mono CJK SC"/>
+                <a:ea typeface="Noto Sans Mono CJK SC"/>
+                <a:cs typeface="Noto Sans Mono CJK SC"/>
+              </a:rPr>
+              <a:t>else</a:t>
+            </a:r>
+            <a:r>
+              <a:rPr lang="zh-CN" sz="912" dirty="0">
+                <a:solidFill>
+                  <a:srgbClr val="1A1A18"/>
+                </a:solidFill>
+                <a:latin typeface="Noto Sans Mono CJK SC"/>
+                <a:ea typeface="Noto Sans Mono CJK SC"/>
+                <a:cs typeface="Noto Sans Mono CJK SC"/>
+              </a:rPr>
+              <a:t> self._tree[node]</a:t>
+            </a:r>
+          </a:p>
+          <a:p>
+            <a:pPr marL="0" indent="0" lvl="0">
+              <a:lnSpc>
+                <a:spcPct val="104000"/>
+              </a:lnSpc>
+              <a:buNone/>
+            </a:pPr>
+            <a:r>
+              <a:rPr lang="zh-CN" sz="912" dirty="0">
+                <a:solidFill>
+                  <a:srgbClr val="1A1A18"/>
+                </a:solidFill>
+                <a:latin typeface="Noto Sans Mono CJK SC"/>
+                <a:ea typeface="Noto Sans Mono CJK SC"/>
+                <a:cs typeface="Noto Sans Mono CJK SC"/>
+              </a:rPr>
+              <a:t> </a:t>
+            </a:r>
+          </a:p>
+          <a:p>
+            <a:pPr marL="0" indent="0" lvl="0">
+              <a:lnSpc>
+                <a:spcPct val="104000"/>
+              </a:lnSpc>
+              <a:buNone/>
+            </a:pPr>
+            <a:r>
+              <a:rPr lang="zh-CN" sz="912" dirty="0">
+                <a:solidFill>
+                  <a:srgbClr val="1A1A18"/>
+                </a:solidFill>
+                <a:latin typeface="Noto Sans Mono CJK SC"/>
+                <a:ea typeface="Noto Sans Mono CJK SC"/>
+                <a:cs typeface="Noto Sans Mono CJK SC"/>
+              </a:rPr>
+              <a:t>    </a:t>
+            </a:r>
+            <a:r>
+              <a:rPr lang="zh-CN" sz="912" dirty="0">
+                <a:solidFill>
+                  <a:srgbClr val="8A4B2A"/>
+                </a:solidFill>
+                <a:latin typeface="Noto Sans Mono CJK SC"/>
+                <a:ea typeface="Noto Sans Mono CJK SC"/>
+                <a:cs typeface="Noto Sans Mono CJK SC"/>
+              </a:rPr>
+              <a:t>def</a:t>
+            </a:r>
+            <a:r>
+              <a:rPr lang="zh-CN" sz="912" dirty="0">
+                <a:solidFill>
+                  <a:srgbClr val="1A1A18"/>
+                </a:solidFill>
+                <a:latin typeface="Noto Sans Mono CJK SC"/>
+                <a:ea typeface="Noto Sans Mono CJK SC"/>
+                <a:cs typeface="Noto Sans Mono CJK SC"/>
+              </a:rPr>
+              <a:t> _build(self) -&gt; </a:t>
+            </a:r>
+            <a:r>
+              <a:rPr lang="zh-CN" sz="912" dirty="0">
+                <a:solidFill>
+                  <a:srgbClr val="8A4B2A"/>
+                </a:solidFill>
+                <a:latin typeface="Noto Sans Mono CJK SC"/>
+                <a:ea typeface="Noto Sans Mono CJK SC"/>
+                <a:cs typeface="Noto Sans Mono CJK SC"/>
+              </a:rPr>
+              <a:t>None</a:t>
+            </a:r>
+            <a:r>
+              <a:rPr lang="zh-CN" sz="912" dirty="0">
+                <a:solidFill>
+                  <a:srgbClr val="1A1A18"/>
+                </a:solidFill>
+                <a:latin typeface="Noto Sans Mono CJK SC"/>
+                <a:ea typeface="Noto Sans Mono CJK SC"/>
+                <a:cs typeface="Noto Sans Mono CJK SC"/>
+              </a:rPr>
+              <a:t>:</a:t>
+            </a:r>
+          </a:p>
+          <a:p>
+            <a:pPr marL="0" indent="0" lvl="0">
+              <a:lnSpc>
+                <a:spcPct val="104000"/>
+              </a:lnSpc>
+              <a:buNone/>
+            </a:pPr>
+            <a:r>
+              <a:rPr lang="zh-CN" sz="912" dirty="0">
+                <a:solidFill>
+                  <a:srgbClr val="1A1A18"/>
+                </a:solidFill>
+                <a:latin typeface="Noto Sans Mono CJK SC"/>
+                <a:ea typeface="Noto Sans Mono CJK SC"/>
+                <a:cs typeface="Noto Sans Mono CJK SC"/>
+              </a:rPr>
+              <a:t>        </a:t>
+            </a:r>
+            <a:r>
+              <a:rPr lang="zh-CN" sz="912" dirty="0">
+                <a:solidFill>
+                  <a:srgbClr val="8A4B2A"/>
+                </a:solidFill>
+                <a:latin typeface="Noto Sans Mono CJK SC"/>
+                <a:ea typeface="Noto Sans Mono CJK SC"/>
+                <a:cs typeface="Noto Sans Mono CJK SC"/>
+              </a:rPr>
+              <a:t>for</a:t>
+            </a:r>
+            <a:r>
+              <a:rPr lang="zh-CN" sz="912" dirty="0">
+                <a:solidFill>
+                  <a:srgbClr val="1A1A18"/>
+                </a:solidFill>
+                <a:latin typeface="Noto Sans Mono CJK SC"/>
+                <a:ea typeface="Noto Sans Mono CJK SC"/>
+                <a:cs typeface="Noto Sans Mono CJK SC"/>
+              </a:rPr>
+              <a:t> node </a:t>
+            </a:r>
+            <a:r>
+              <a:rPr lang="zh-CN" sz="912" dirty="0">
+                <a:solidFill>
+                  <a:srgbClr val="8A4B2A"/>
+                </a:solidFill>
+                <a:latin typeface="Noto Sans Mono CJK SC"/>
+                <a:ea typeface="Noto Sans Mono CJK SC"/>
+                <a:cs typeface="Noto Sans Mono CJK SC"/>
+              </a:rPr>
+              <a:t>in</a:t>
+            </a:r>
+            <a:r>
+              <a:rPr lang="zh-CN" sz="912" dirty="0">
+                <a:solidFill>
+                  <a:srgbClr val="1A1A18"/>
+                </a:solidFill>
+                <a:latin typeface="Noto Sans Mono CJK SC"/>
+                <a:ea typeface="Noto Sans Mono CJK SC"/>
+                <a:cs typeface="Noto Sans Mono CJK SC"/>
+              </a:rPr>
+              <a:t> </a:t>
+            </a:r>
+            <a:r>
+              <a:rPr lang="zh-CN" sz="912" dirty="0">
+                <a:solidFill>
+                  <a:srgbClr val="2C6B57"/>
+                </a:solidFill>
+                <a:latin typeface="Noto Sans Mono CJK SC"/>
+                <a:ea typeface="Noto Sans Mono CJK SC"/>
+                <a:cs typeface="Noto Sans Mono CJK SC"/>
+              </a:rPr>
+              <a:t>range</a:t>
+            </a:r>
+            <a:r>
+              <a:rPr lang="zh-CN" sz="912" dirty="0">
+                <a:solidFill>
+                  <a:srgbClr val="1A1A18"/>
+                </a:solidFill>
+                <a:latin typeface="Noto Sans Mono CJK SC"/>
+                <a:ea typeface="Noto Sans Mono CJK SC"/>
+                <a:cs typeface="Noto Sans Mono CJK SC"/>
+              </a:rPr>
+              <a:t>(self._size - </a:t>
+            </a:r>
+            <a:r>
+              <a:rPr lang="zh-CN" sz="912" dirty="0">
+                <a:solidFill>
+                  <a:srgbClr val="4A5AA8"/>
+                </a:solidFill>
+                <a:latin typeface="Noto Sans Mono CJK SC"/>
+                <a:ea typeface="Noto Sans Mono CJK SC"/>
+                <a:cs typeface="Noto Sans Mono CJK SC"/>
+              </a:rPr>
+              <a:t>1</a:t>
+            </a:r>
+            <a:r>
+              <a:rPr lang="zh-CN" sz="912" dirty="0">
+                <a:solidFill>
+                  <a:srgbClr val="1A1A18"/>
+                </a:solidFill>
+                <a:latin typeface="Noto Sans Mono CJK SC"/>
+                <a:ea typeface="Noto Sans Mono CJK SC"/>
+                <a:cs typeface="Noto Sans Mono CJK SC"/>
+              </a:rPr>
+              <a:t>, </a:t>
+            </a:r>
+            <a:r>
+              <a:rPr lang="zh-CN" sz="912" dirty="0">
+                <a:solidFill>
+                  <a:srgbClr val="4A5AA8"/>
+                </a:solidFill>
+                <a:latin typeface="Noto Sans Mono CJK SC"/>
+                <a:ea typeface="Noto Sans Mono CJK SC"/>
+                <a:cs typeface="Noto Sans Mono CJK SC"/>
+              </a:rPr>
+              <a:t>0</a:t>
+            </a:r>
+            <a:r>
+              <a:rPr lang="zh-CN" sz="912" dirty="0">
+                <a:solidFill>
+                  <a:srgbClr val="1A1A18"/>
+                </a:solidFill>
+                <a:latin typeface="Noto Sans Mono CJK SC"/>
+                <a:ea typeface="Noto Sans Mono CJK SC"/>
+                <a:cs typeface="Noto Sans Mono CJK SC"/>
+              </a:rPr>
+              <a:t>, -</a:t>
+            </a:r>
+            <a:r>
+              <a:rPr lang="zh-CN" sz="912" dirty="0">
+                <a:solidFill>
+                  <a:srgbClr val="4A5AA8"/>
+                </a:solidFill>
+                <a:latin typeface="Noto Sans Mono CJK SC"/>
+                <a:ea typeface="Noto Sans Mono CJK SC"/>
+                <a:cs typeface="Noto Sans Mono CJK SC"/>
+              </a:rPr>
+              <a:t>1</a:t>
+            </a:r>
+            <a:r>
+              <a:rPr lang="zh-CN" sz="912" dirty="0">
+                <a:solidFill>
+                  <a:srgbClr val="1A1A18"/>
+                </a:solidFill>
+                <a:latin typeface="Noto Sans Mono CJK SC"/>
+                <a:ea typeface="Noto Sans Mono CJK SC"/>
+                <a:cs typeface="Noto Sans Mono CJK SC"/>
+              </a:rPr>
+              <a:t>):</a:t>
+            </a:r>
+          </a:p>
+          <a:p>
+            <a:pPr marL="0" indent="0" lvl="0">
+              <a:lnSpc>
+                <a:spcPct val="104000"/>
+              </a:lnSpc>
+              <a:buNone/>
+            </a:pPr>
+            <a:r>
+              <a:rPr lang="zh-CN" sz="912" dirty="0">
+                <a:solidFill>
+                  <a:srgbClr val="1A1A18"/>
+                </a:solidFill>
+                <a:latin typeface="Noto Sans Mono CJK SC"/>
+                <a:ea typeface="Noto Sans Mono CJK SC"/>
+                <a:cs typeface="Noto Sans Mono CJK SC"/>
+              </a:rPr>
+              <a:t>            self._tree[node] = self._better(self._winner_at(node * </a:t>
+            </a:r>
+            <a:r>
+              <a:rPr lang="zh-CN" sz="912" dirty="0">
+                <a:solidFill>
+                  <a:srgbClr val="4A5AA8"/>
+                </a:solidFill>
+                <a:latin typeface="Noto Sans Mono CJK SC"/>
+                <a:ea typeface="Noto Sans Mono CJK SC"/>
+                <a:cs typeface="Noto Sans Mono CJK SC"/>
+              </a:rPr>
+              <a:t>2</a:t>
+            </a:r>
+            <a:r>
+              <a:rPr lang="zh-CN" sz="912" dirty="0">
+                <a:solidFill>
+                  <a:srgbClr val="1A1A18"/>
+                </a:solidFill>
+                <a:latin typeface="Noto Sans Mono CJK SC"/>
+                <a:ea typeface="Noto Sans Mono CJK SC"/>
+                <a:cs typeface="Noto Sans Mono CJK SC"/>
+              </a:rPr>
+              <a:t>),</a:t>
+            </a:r>
+          </a:p>
+          <a:p>
+            <a:pPr marL="0" indent="0" lvl="0">
+              <a:lnSpc>
+                <a:spcPct val="104000"/>
+              </a:lnSpc>
+              <a:buNone/>
+            </a:pPr>
+            <a:r>
+              <a:rPr lang="zh-CN" sz="912" dirty="0">
+                <a:solidFill>
+                  <a:srgbClr val="1A1A18"/>
+                </a:solidFill>
+                <a:latin typeface="Noto Sans Mono CJK SC"/>
+                <a:ea typeface="Noto Sans Mono CJK SC"/>
+                <a:cs typeface="Noto Sans Mono CJK SC"/>
+              </a:rPr>
+              <a:t>                                            self._winner_at(node * </a:t>
+            </a:r>
+            <a:r>
+              <a:rPr lang="zh-CN" sz="912" dirty="0">
+                <a:solidFill>
+                  <a:srgbClr val="4A5AA8"/>
+                </a:solidFill>
+                <a:latin typeface="Noto Sans Mono CJK SC"/>
+                <a:ea typeface="Noto Sans Mono CJK SC"/>
+                <a:cs typeface="Noto Sans Mono CJK SC"/>
+              </a:rPr>
+              <a:t>2</a:t>
+            </a:r>
+            <a:r>
+              <a:rPr lang="zh-CN" sz="912" dirty="0">
+                <a:solidFill>
+                  <a:srgbClr val="1A1A18"/>
+                </a:solidFill>
+                <a:latin typeface="Noto Sans Mono CJK SC"/>
+                <a:ea typeface="Noto Sans Mono CJK SC"/>
+                <a:cs typeface="Noto Sans Mono CJK SC"/>
+              </a:rPr>
+              <a:t> + </a:t>
+            </a:r>
+            <a:r>
+              <a:rPr lang="zh-CN" sz="912" dirty="0">
+                <a:solidFill>
+                  <a:srgbClr val="4A5AA8"/>
+                </a:solidFill>
+                <a:latin typeface="Noto Sans Mono CJK SC"/>
+                <a:ea typeface="Noto Sans Mono CJK SC"/>
+                <a:cs typeface="Noto Sans Mono CJK SC"/>
+              </a:rPr>
+              <a:t>1</a:t>
+            </a:r>
+            <a:r>
+              <a:rPr lang="zh-CN" sz="912" dirty="0">
+                <a:solidFill>
+                  <a:srgbClr val="1A1A18"/>
+                </a:solidFill>
+                <a:latin typeface="Noto Sans Mono CJK SC"/>
+                <a:ea typeface="Noto Sans Mono CJK SC"/>
+                <a:cs typeface="Noto Sans Mono CJK SC"/>
+              </a:rPr>
+              <a:t>))</a:t>
+            </a:r>
+          </a:p>
+          <a:p>
+            <a:pPr marL="0" indent="0" lvl="0">
+              <a:lnSpc>
+                <a:spcPct val="104000"/>
+              </a:lnSpc>
+              <a:buNone/>
+            </a:pPr>
+            <a:r>
+              <a:rPr lang="zh-CN" sz="912" dirty="0">
+                <a:solidFill>
+                  <a:srgbClr val="1A1A18"/>
+                </a:solidFill>
+                <a:latin typeface="Noto Sans Mono CJK SC"/>
+                <a:ea typeface="Noto Sans Mono CJK SC"/>
+                <a:cs typeface="Noto Sans Mono CJK SC"/>
+              </a:rPr>
+              <a:t> </a:t>
+            </a:r>
+          </a:p>
+          <a:p>
+            <a:pPr marL="0" indent="0" lvl="0">
+              <a:lnSpc>
+                <a:spcPct val="104000"/>
+              </a:lnSpc>
+              <a:buNone/>
+            </a:pPr>
+            <a:r>
+              <a:rPr lang="zh-CN" sz="912" dirty="0">
+                <a:solidFill>
+                  <a:srgbClr val="1A1A18"/>
+                </a:solidFill>
+                <a:latin typeface="Noto Sans Mono CJK SC"/>
+                <a:ea typeface="Noto Sans Mono CJK SC"/>
+                <a:cs typeface="Noto Sans Mono CJK SC"/>
+              </a:rPr>
+              <a:t>    </a:t>
+            </a:r>
+            <a:r>
+              <a:rPr lang="zh-CN" sz="912" dirty="0">
+                <a:solidFill>
+                  <a:srgbClr val="8A4B2A"/>
+                </a:solidFill>
+                <a:latin typeface="Noto Sans Mono CJK SC"/>
+                <a:ea typeface="Noto Sans Mono CJK SC"/>
+                <a:cs typeface="Noto Sans Mono CJK SC"/>
+              </a:rPr>
+              <a:t>def</a:t>
+            </a:r>
+            <a:r>
+              <a:rPr lang="zh-CN" sz="912" dirty="0">
+                <a:solidFill>
+                  <a:srgbClr val="1A1A18"/>
+                </a:solidFill>
+                <a:latin typeface="Noto Sans Mono CJK SC"/>
+                <a:ea typeface="Noto Sans Mono CJK SC"/>
+                <a:cs typeface="Noto Sans Mono CJK SC"/>
+              </a:rPr>
+              <a:t> winner_index(self) -&gt; </a:t>
+            </a:r>
+            <a:r>
+              <a:rPr lang="zh-CN" sz="912" dirty="0">
+                <a:solidFill>
+                  <a:srgbClr val="2C6B57"/>
+                </a:solidFill>
+                <a:latin typeface="Noto Sans Mono CJK SC"/>
+                <a:ea typeface="Noto Sans Mono CJK SC"/>
+                <a:cs typeface="Noto Sans Mono CJK SC"/>
+              </a:rPr>
+              <a:t>int</a:t>
+            </a:r>
+            <a:r>
+              <a:rPr lang="zh-CN" sz="912" dirty="0">
+                <a:solidFill>
+                  <a:srgbClr val="1A1A18"/>
+                </a:solidFill>
+                <a:latin typeface="Noto Sans Mono CJK SC"/>
+                <a:ea typeface="Noto Sans Mono CJK SC"/>
+                <a:cs typeface="Noto Sans Mono CJK SC"/>
+              </a:rPr>
+              <a:t> | </a:t>
+            </a:r>
+            <a:r>
+              <a:rPr lang="zh-CN" sz="912" dirty="0">
+                <a:solidFill>
+                  <a:srgbClr val="8A4B2A"/>
+                </a:solidFill>
+                <a:latin typeface="Noto Sans Mono CJK SC"/>
+                <a:ea typeface="Noto Sans Mono CJK SC"/>
+                <a:cs typeface="Noto Sans Mono CJK SC"/>
+              </a:rPr>
+              <a:t>None</a:t>
+            </a:r>
+            <a:r>
+              <a:rPr lang="zh-CN" sz="912" dirty="0">
+                <a:solidFill>
+                  <a:srgbClr val="1A1A18"/>
+                </a:solidFill>
+                <a:latin typeface="Noto Sans Mono CJK SC"/>
+                <a:ea typeface="Noto Sans Mono CJK SC"/>
+                <a:cs typeface="Noto Sans Mono CJK SC"/>
+              </a:rPr>
+              <a:t>:</a:t>
+            </a:r>
+          </a:p>
+          <a:p>
+            <a:pPr marL="0" indent="0" lvl="0">
+              <a:lnSpc>
+                <a:spcPct val="104000"/>
+              </a:lnSpc>
+              <a:buNone/>
+            </a:pPr>
+            <a:r>
+              <a:rPr lang="zh-CN" sz="912" dirty="0">
+                <a:solidFill>
+                  <a:srgbClr val="1A1A18"/>
+                </a:solidFill>
+                <a:latin typeface="Noto Sans Mono CJK SC"/>
+                <a:ea typeface="Noto Sans Mono CJK SC"/>
+                <a:cs typeface="Noto Sans Mono CJK SC"/>
+              </a:rPr>
+              <a:t>        </a:t>
+            </a:r>
+            <a:r>
+              <a:rPr lang="zh-CN" sz="912" dirty="0">
+                <a:solidFill>
+                  <a:srgbClr val="8A4B2A"/>
+                </a:solidFill>
+                <a:latin typeface="Noto Sans Mono CJK SC"/>
+                <a:ea typeface="Noto Sans Mono CJK SC"/>
+                <a:cs typeface="Noto Sans Mono CJK SC"/>
+              </a:rPr>
+              <a:t>if</a:t>
+            </a:r>
+            <a:r>
+              <a:rPr lang="zh-CN" sz="912" dirty="0">
+                <a:solidFill>
+                  <a:srgbClr val="1A1A18"/>
+                </a:solidFill>
+                <a:latin typeface="Noto Sans Mono CJK SC"/>
+                <a:ea typeface="Noto Sans Mono CJK SC"/>
+                <a:cs typeface="Noto Sans Mono CJK SC"/>
+              </a:rPr>
+              <a:t> </a:t>
+            </a:r>
+            <a:r>
+              <a:rPr lang="zh-CN" sz="912" dirty="0">
+                <a:solidFill>
+                  <a:srgbClr val="8A4B2A"/>
+                </a:solidFill>
+                <a:latin typeface="Noto Sans Mono CJK SC"/>
+                <a:ea typeface="Noto Sans Mono CJK SC"/>
+                <a:cs typeface="Noto Sans Mono CJK SC"/>
+              </a:rPr>
+              <a:t>not</a:t>
+            </a:r>
+            <a:r>
+              <a:rPr lang="zh-CN" sz="912" dirty="0">
+                <a:solidFill>
+                  <a:srgbClr val="1A1A18"/>
+                </a:solidFill>
+                <a:latin typeface="Noto Sans Mono CJK SC"/>
+                <a:ea typeface="Noto Sans Mono CJK SC"/>
+                <a:cs typeface="Noto Sans Mono CJK SC"/>
+              </a:rPr>
+              <a:t> self.players:</a:t>
+            </a:r>
+          </a:p>
+          <a:p>
+            <a:pPr marL="0" indent="0" lvl="0">
+              <a:lnSpc>
+                <a:spcPct val="104000"/>
+              </a:lnSpc>
+              <a:buNone/>
+            </a:pPr>
+            <a:r>
+              <a:rPr lang="zh-CN" sz="912" dirty="0">
+                <a:solidFill>
+                  <a:srgbClr val="1A1A18"/>
+                </a:solidFill>
+                <a:latin typeface="Noto Sans Mono CJK SC"/>
+                <a:ea typeface="Noto Sans Mono CJK SC"/>
+                <a:cs typeface="Noto Sans Mono CJK SC"/>
+              </a:rPr>
+              <a:t>            </a:t>
+            </a:r>
+            <a:r>
+              <a:rPr lang="zh-CN" sz="912" dirty="0">
+                <a:solidFill>
+                  <a:srgbClr val="8A4B2A"/>
+                </a:solidFill>
+                <a:latin typeface="Noto Sans Mono CJK SC"/>
+                <a:ea typeface="Noto Sans Mono CJK SC"/>
+                <a:cs typeface="Noto Sans Mono CJK SC"/>
+              </a:rPr>
+              <a:t>return</a:t>
+            </a:r>
+            <a:r>
+              <a:rPr lang="zh-CN" sz="912" dirty="0">
+                <a:solidFill>
+                  <a:srgbClr val="1A1A18"/>
+                </a:solidFill>
+                <a:latin typeface="Noto Sans Mono CJK SC"/>
+                <a:ea typeface="Noto Sans Mono CJK SC"/>
+                <a:cs typeface="Noto Sans Mono CJK SC"/>
+              </a:rPr>
+              <a:t> </a:t>
+            </a:r>
+            <a:r>
+              <a:rPr lang="zh-CN" sz="912" dirty="0">
+                <a:solidFill>
+                  <a:srgbClr val="8A4B2A"/>
+                </a:solidFill>
+                <a:latin typeface="Noto Sans Mono CJK SC"/>
+                <a:ea typeface="Noto Sans Mono CJK SC"/>
+                <a:cs typeface="Noto Sans Mono CJK SC"/>
+              </a:rPr>
+              <a:t>None</a:t>
+            </a:r>
+          </a:p>
+          <a:p>
+            <a:pPr marL="0" indent="0" lvl="0">
+              <a:lnSpc>
+                <a:spcPct val="104000"/>
+              </a:lnSpc>
+              <a:buNone/>
+            </a:pPr>
+            <a:r>
+              <a:rPr lang="zh-CN" sz="912" dirty="0">
+                <a:solidFill>
+                  <a:srgbClr val="1A1A18"/>
+                </a:solidFill>
+                <a:latin typeface="Noto Sans Mono CJK SC"/>
+                <a:ea typeface="Noto Sans Mono CJK SC"/>
+                <a:cs typeface="Noto Sans Mono CJK SC"/>
+              </a:rPr>
+              <a:t>        </a:t>
+            </a:r>
+            <a:r>
+              <a:rPr lang="zh-CN" sz="912" dirty="0">
+                <a:solidFill>
+                  <a:srgbClr val="8A4B2A"/>
+                </a:solidFill>
+                <a:latin typeface="Noto Sans Mono CJK SC"/>
+                <a:ea typeface="Noto Sans Mono CJK SC"/>
+                <a:cs typeface="Noto Sans Mono CJK SC"/>
+              </a:rPr>
+              <a:t>return</a:t>
+            </a:r>
+            <a:r>
+              <a:rPr lang="zh-CN" sz="912" dirty="0">
+                <a:solidFill>
+                  <a:srgbClr val="1A1A18"/>
+                </a:solidFill>
+                <a:latin typeface="Noto Sans Mono CJK SC"/>
+                <a:ea typeface="Noto Sans Mono CJK SC"/>
+                <a:cs typeface="Noto Sans Mono CJK SC"/>
+              </a:rPr>
+              <a:t> self._winner_at(</a:t>
+            </a:r>
+            <a:r>
+              <a:rPr lang="zh-CN" sz="912" dirty="0">
+                <a:solidFill>
+                  <a:srgbClr val="4A5AA8"/>
+                </a:solidFill>
+                <a:latin typeface="Noto Sans Mono CJK SC"/>
+                <a:ea typeface="Noto Sans Mono CJK SC"/>
+                <a:cs typeface="Noto Sans Mono CJK SC"/>
+              </a:rPr>
+              <a:t>1</a:t>
+            </a:r>
+            <a:r>
+              <a:rPr lang="zh-CN" sz="912" dirty="0">
+                <a:solidFill>
+                  <a:srgbClr val="1A1A18"/>
+                </a:solidFill>
+                <a:latin typeface="Noto Sans Mono CJK SC"/>
+                <a:ea typeface="Noto Sans Mono CJK SC"/>
+                <a:cs typeface="Noto Sans Mono CJK SC"/>
+              </a:rPr>
+              <a:t>)</a:t>
+            </a:r>
+          </a:p>
+          <a:p>
+            <a:pPr marL="0" indent="0" lvl="0">
+              <a:lnSpc>
+                <a:spcPct val="104000"/>
+              </a:lnSpc>
+              <a:buNone/>
+            </a:pPr>
+            <a:r>
+              <a:rPr lang="zh-CN" sz="912" dirty="0">
+                <a:solidFill>
+                  <a:srgbClr val="1A1A18"/>
+                </a:solidFill>
+                <a:latin typeface="Noto Sans Mono CJK SC"/>
+                <a:ea typeface="Noto Sans Mono CJK SC"/>
+                <a:cs typeface="Noto Sans Mono CJK SC"/>
+              </a:rPr>
+              <a:t> </a:t>
+            </a:r>
+          </a:p>
+          <a:p>
+            <a:pPr marL="0" indent="0" lvl="0">
+              <a:lnSpc>
+                <a:spcPct val="104000"/>
+              </a:lnSpc>
+              <a:buNone/>
+            </a:pPr>
+            <a:r>
+              <a:rPr lang="zh-CN" sz="912" dirty="0">
+                <a:solidFill>
+                  <a:srgbClr val="1A1A18"/>
+                </a:solidFill>
+                <a:latin typeface="Noto Sans Mono CJK SC"/>
+                <a:ea typeface="Noto Sans Mono CJK SC"/>
+                <a:cs typeface="Noto Sans Mono CJK SC"/>
+              </a:rPr>
+              <a:t>    </a:t>
+            </a:r>
+            <a:r>
+              <a:rPr lang="zh-CN" sz="912" dirty="0">
+                <a:solidFill>
+                  <a:srgbClr val="8A4B2A"/>
+                </a:solidFill>
+                <a:latin typeface="Noto Sans Mono CJK SC"/>
+                <a:ea typeface="Noto Sans Mono CJK SC"/>
+                <a:cs typeface="Noto Sans Mono CJK SC"/>
+              </a:rPr>
+              <a:t>def</a:t>
+            </a:r>
+            <a:r>
+              <a:rPr lang="zh-CN" sz="912" dirty="0">
+                <a:solidFill>
+                  <a:srgbClr val="1A1A18"/>
+                </a:solidFill>
+                <a:latin typeface="Noto Sans Mono CJK SC"/>
+                <a:ea typeface="Noto Sans Mono CJK SC"/>
+                <a:cs typeface="Noto Sans Mono CJK SC"/>
+              </a:rPr>
+              <a:t> replace(self, player: </a:t>
+            </a:r>
+            <a:r>
+              <a:rPr lang="zh-CN" sz="912" dirty="0">
+                <a:solidFill>
+                  <a:srgbClr val="2C6B57"/>
+                </a:solidFill>
+                <a:latin typeface="Noto Sans Mono CJK SC"/>
+                <a:ea typeface="Noto Sans Mono CJK SC"/>
+                <a:cs typeface="Noto Sans Mono CJK SC"/>
+              </a:rPr>
+              <a:t>int</a:t>
+            </a:r>
+            <a:r>
+              <a:rPr lang="zh-CN" sz="912" dirty="0">
+                <a:solidFill>
+                  <a:srgbClr val="1A1A18"/>
+                </a:solidFill>
+                <a:latin typeface="Noto Sans Mono CJK SC"/>
+                <a:ea typeface="Noto Sans Mono CJK SC"/>
+                <a:cs typeface="Noto Sans Mono CJK SC"/>
+              </a:rPr>
+              <a:t>, value: </a:t>
+            </a:r>
+            <a:r>
+              <a:rPr lang="zh-CN" sz="912" dirty="0">
+                <a:solidFill>
+                  <a:srgbClr val="2C6B57"/>
+                </a:solidFill>
+                <a:latin typeface="Noto Sans Mono CJK SC"/>
+                <a:ea typeface="Noto Sans Mono CJK SC"/>
+                <a:cs typeface="Noto Sans Mono CJK SC"/>
+              </a:rPr>
+              <a:t>int</a:t>
+            </a:r>
+            <a:r>
+              <a:rPr lang="zh-CN" sz="912" dirty="0">
+                <a:solidFill>
+                  <a:srgbClr val="1A1A18"/>
+                </a:solidFill>
+                <a:latin typeface="Noto Sans Mono CJK SC"/>
+                <a:ea typeface="Noto Sans Mono CJK SC"/>
+                <a:cs typeface="Noto Sans Mono CJK SC"/>
+              </a:rPr>
+              <a:t>) -&gt; </a:t>
+            </a:r>
+            <a:r>
+              <a:rPr lang="zh-CN" sz="912" dirty="0">
+                <a:solidFill>
+                  <a:srgbClr val="8A4B2A"/>
+                </a:solidFill>
+                <a:latin typeface="Noto Sans Mono CJK SC"/>
+                <a:ea typeface="Noto Sans Mono CJK SC"/>
+                <a:cs typeface="Noto Sans Mono CJK SC"/>
+              </a:rPr>
+              <a:t>None</a:t>
+            </a:r>
+            <a:r>
+              <a:rPr lang="zh-CN" sz="912" dirty="0">
+                <a:solidFill>
+                  <a:srgbClr val="1A1A18"/>
+                </a:solidFill>
+                <a:latin typeface="Noto Sans Mono CJK SC"/>
+                <a:ea typeface="Noto Sans Mono CJK SC"/>
+                <a:cs typeface="Noto Sans Mono CJK SC"/>
+              </a:rPr>
+              <a:t>:</a:t>
+            </a:r>
+          </a:p>
+          <a:p>
+            <a:pPr marL="0" indent="0" lvl="0">
+              <a:lnSpc>
+                <a:spcPct val="104000"/>
+              </a:lnSpc>
+              <a:buNone/>
+            </a:pPr>
+            <a:r>
+              <a:rPr lang="zh-CN" sz="912" dirty="0">
+                <a:solidFill>
+                  <a:srgbClr val="1A1A18"/>
+                </a:solidFill>
+                <a:latin typeface="Noto Sans Mono CJK SC"/>
+                <a:ea typeface="Noto Sans Mono CJK SC"/>
+                <a:cs typeface="Noto Sans Mono CJK SC"/>
+              </a:rPr>
+              <a:t>        self._check_player(player)</a:t>
+            </a:r>
+          </a:p>
+          <a:p>
+            <a:pPr marL="0" indent="0" lvl="0">
+              <a:lnSpc>
+                <a:spcPct val="104000"/>
+              </a:lnSpc>
+              <a:buNone/>
+            </a:pPr>
+            <a:r>
+              <a:rPr lang="zh-CN" sz="912" dirty="0">
+                <a:solidFill>
+                  <a:srgbClr val="1A1A18"/>
+                </a:solidFill>
+                <a:latin typeface="Noto Sans Mono CJK SC"/>
+                <a:ea typeface="Noto Sans Mono CJK SC"/>
+                <a:cs typeface="Noto Sans Mono CJK SC"/>
+              </a:rPr>
+              <a:t>        self.players[player] = value</a:t>
+            </a:r>
+          </a:p>
+          <a:p>
+            <a:pPr marL="0" indent="0" lvl="0">
+              <a:lnSpc>
+                <a:spcPct val="104000"/>
+              </a:lnSpc>
+              <a:buNone/>
+            </a:pPr>
+            <a:r>
+              <a:rPr lang="zh-CN" sz="912" dirty="0">
+                <a:solidFill>
+                  <a:srgbClr val="1A1A18"/>
+                </a:solidFill>
+                <a:latin typeface="Noto Sans Mono CJK SC"/>
+                <a:ea typeface="Noto Sans Mono CJK SC"/>
+                <a:cs typeface="Noto Sans Mono CJK SC"/>
+              </a:rPr>
+              <a:t>        node = (self._size + player) // </a:t>
+            </a:r>
+            <a:r>
+              <a:rPr lang="zh-CN" sz="912" dirty="0">
+                <a:solidFill>
+                  <a:srgbClr val="4A5AA8"/>
+                </a:solidFill>
+                <a:latin typeface="Noto Sans Mono CJK SC"/>
+                <a:ea typeface="Noto Sans Mono CJK SC"/>
+                <a:cs typeface="Noto Sans Mono CJK SC"/>
+              </a:rPr>
+              <a:t>2</a:t>
+            </a:r>
+          </a:p>
+          <a:p>
+            <a:pPr marL="0" indent="0" lvl="0">
+              <a:lnSpc>
+                <a:spcPct val="104000"/>
+              </a:lnSpc>
+              <a:buNone/>
+            </a:pPr>
+            <a:r>
+              <a:rPr lang="zh-CN" sz="912" dirty="0">
+                <a:solidFill>
+                  <a:srgbClr val="1A1A18"/>
+                </a:solidFill>
+                <a:latin typeface="Noto Sans Mono CJK SC"/>
+                <a:ea typeface="Noto Sans Mono CJK SC"/>
+                <a:cs typeface="Noto Sans Mono CJK SC"/>
+              </a:rPr>
+              <a:t>        </a:t>
+            </a:r>
+            <a:r>
+              <a:rPr lang="zh-CN" sz="912" dirty="0">
+                <a:solidFill>
+                  <a:srgbClr val="8A4B2A"/>
+                </a:solidFill>
+                <a:latin typeface="Noto Sans Mono CJK SC"/>
+                <a:ea typeface="Noto Sans Mono CJK SC"/>
+                <a:cs typeface="Noto Sans Mono CJK SC"/>
+              </a:rPr>
+              <a:t>while</a:t>
+            </a:r>
+            <a:r>
+              <a:rPr lang="zh-CN" sz="912" dirty="0">
+                <a:solidFill>
+                  <a:srgbClr val="1A1A18"/>
+                </a:solidFill>
+                <a:latin typeface="Noto Sans Mono CJK SC"/>
+                <a:ea typeface="Noto Sans Mono CJK SC"/>
+                <a:cs typeface="Noto Sans Mono CJK SC"/>
+              </a:rPr>
+              <a:t> node &gt;= </a:t>
+            </a:r>
+            <a:r>
+              <a:rPr lang="zh-CN" sz="912" dirty="0">
+                <a:solidFill>
+                  <a:srgbClr val="4A5AA8"/>
+                </a:solidFill>
+                <a:latin typeface="Noto Sans Mono CJK SC"/>
+                <a:ea typeface="Noto Sans Mono CJK SC"/>
+                <a:cs typeface="Noto Sans Mono CJK SC"/>
+              </a:rPr>
+              <a:t>1</a:t>
+            </a:r>
+            <a:r>
+              <a:rPr lang="zh-CN" sz="912" dirty="0">
+                <a:solidFill>
+                  <a:srgbClr val="1A1A18"/>
+                </a:solidFill>
+                <a:latin typeface="Noto Sans Mono CJK SC"/>
+                <a:ea typeface="Noto Sans Mono CJK SC"/>
+                <a:cs typeface="Noto Sans Mono CJK SC"/>
+              </a:rPr>
+              <a:t>:</a:t>
+            </a:r>
+          </a:p>
+          <a:p>
+            <a:pPr marL="0" indent="0" lvl="0">
+              <a:lnSpc>
+                <a:spcPct val="104000"/>
+              </a:lnSpc>
+              <a:buNone/>
+            </a:pPr>
+            <a:r>
+              <a:rPr lang="zh-CN" sz="912" dirty="0">
+                <a:solidFill>
+                  <a:srgbClr val="1A1A18"/>
+                </a:solidFill>
+                <a:latin typeface="Noto Sans Mono CJK SC"/>
+                <a:ea typeface="Noto Sans Mono CJK SC"/>
+                <a:cs typeface="Noto Sans Mono CJK SC"/>
+              </a:rPr>
+              <a:t>            self._tree[node] = self._better(self._winner_at(node * </a:t>
+            </a:r>
+            <a:r>
+              <a:rPr lang="zh-CN" sz="912" dirty="0">
+                <a:solidFill>
+                  <a:srgbClr val="4A5AA8"/>
+                </a:solidFill>
+                <a:latin typeface="Noto Sans Mono CJK SC"/>
+                <a:ea typeface="Noto Sans Mono CJK SC"/>
+                <a:cs typeface="Noto Sans Mono CJK SC"/>
+              </a:rPr>
+              <a:t>2</a:t>
+            </a:r>
+            <a:r>
+              <a:rPr lang="zh-CN" sz="912" dirty="0">
+                <a:solidFill>
+                  <a:srgbClr val="1A1A18"/>
+                </a:solidFill>
+                <a:latin typeface="Noto Sans Mono CJK SC"/>
+                <a:ea typeface="Noto Sans Mono CJK SC"/>
+                <a:cs typeface="Noto Sans Mono CJK SC"/>
+              </a:rPr>
+              <a:t>),</a:t>
+            </a:r>
+          </a:p>
+          <a:p>
+            <a:pPr marL="0" indent="0" lvl="0">
+              <a:lnSpc>
+                <a:spcPct val="104000"/>
+              </a:lnSpc>
+              <a:buNone/>
+            </a:pPr>
+            <a:r>
+              <a:rPr lang="zh-CN" sz="912" dirty="0">
+                <a:solidFill>
+                  <a:srgbClr val="1A1A18"/>
+                </a:solidFill>
+                <a:latin typeface="Noto Sans Mono CJK SC"/>
+                <a:ea typeface="Noto Sans Mono CJK SC"/>
+                <a:cs typeface="Noto Sans Mono CJK SC"/>
+              </a:rPr>
+              <a:t>                                            self._winner_at(node * </a:t>
+            </a:r>
+            <a:r>
+              <a:rPr lang="zh-CN" sz="912" dirty="0">
+                <a:solidFill>
+                  <a:srgbClr val="4A5AA8"/>
+                </a:solidFill>
+                <a:latin typeface="Noto Sans Mono CJK SC"/>
+                <a:ea typeface="Noto Sans Mono CJK SC"/>
+                <a:cs typeface="Noto Sans Mono CJK SC"/>
+              </a:rPr>
+              <a:t>2</a:t>
+            </a:r>
+            <a:r>
+              <a:rPr lang="zh-CN" sz="912" dirty="0">
+                <a:solidFill>
+                  <a:srgbClr val="1A1A18"/>
+                </a:solidFill>
+                <a:latin typeface="Noto Sans Mono CJK SC"/>
+                <a:ea typeface="Noto Sans Mono CJK SC"/>
+                <a:cs typeface="Noto Sans Mono CJK SC"/>
+              </a:rPr>
+              <a:t> + </a:t>
+            </a:r>
+            <a:r>
+              <a:rPr lang="zh-CN" sz="912" dirty="0">
+                <a:solidFill>
+                  <a:srgbClr val="4A5AA8"/>
+                </a:solidFill>
+                <a:latin typeface="Noto Sans Mono CJK SC"/>
+                <a:ea typeface="Noto Sans Mono CJK SC"/>
+                <a:cs typeface="Noto Sans Mono CJK SC"/>
+              </a:rPr>
+              <a:t>1</a:t>
+            </a:r>
+            <a:r>
+              <a:rPr lang="zh-CN" sz="912" dirty="0">
+                <a:solidFill>
+                  <a:srgbClr val="1A1A18"/>
+                </a:solidFill>
+                <a:latin typeface="Noto Sans Mono CJK SC"/>
+                <a:ea typeface="Noto Sans Mono CJK SC"/>
+                <a:cs typeface="Noto Sans Mono CJK SC"/>
+              </a:rPr>
+              <a:t>))</a:t>
+            </a:r>
+          </a:p>
+          <a:p>
+            <a:pPr marL="0" indent="0" lvl="0">
+              <a:lnSpc>
+                <a:spcPct val="104000"/>
+              </a:lnSpc>
+              <a:buNone/>
+            </a:pPr>
+            <a:r>
+              <a:rPr lang="zh-CN" sz="912" dirty="0">
+                <a:solidFill>
+                  <a:srgbClr val="1A1A18"/>
+                </a:solidFill>
+                <a:latin typeface="Noto Sans Mono CJK SC"/>
+                <a:ea typeface="Noto Sans Mono CJK SC"/>
+                <a:cs typeface="Noto Sans Mono CJK SC"/>
+              </a:rPr>
+              <a:t>            node //= </a:t>
+            </a:r>
+            <a:r>
+              <a:rPr lang="zh-CN" sz="912" dirty="0">
+                <a:solidFill>
+                  <a:srgbClr val="4A5AA8"/>
+                </a:solidFill>
+                <a:latin typeface="Noto Sans Mono CJK SC"/>
+                <a:ea typeface="Noto Sans Mono CJK SC"/>
+                <a:cs typeface="Noto Sans Mono CJK SC"/>
+              </a:rPr>
+              <a:t>2</a:t>
+            </a:r>
+          </a:p>
+        </p:txBody>
+      </p:sp>
+      <p:sp>
+        <p:nvSpPr>
+          <p:cNvPr id="6" name="页脚"/>
           <p:cNvSpPr txBox="1"/>
           <p:nvPr/>
         </p:nvSpPr>
@@ -11239,7 +12645,7 @@
       </p:sp>
       <p:sp>
         <p:nvSpPr>
-          <p:cNvPr id="6" name="页码"/>
+          <p:cNvPr id="7" name="页码"/>
           <p:cNvSpPr txBox="1"/>
           <p:nvPr/>
         </p:nvSpPr>
@@ -11274,7 +12680,7 @@
                 <a:ea typeface="Noto Sans CJK SC"/>
                 <a:cs typeface="Segoe UI"/>
               </a:rPr>
-              <a:t>29 / 32</a:t>
+              <a:t>29 / 31</a:t>
             </a:r>
           </a:p>
         </p:txBody>
@@ -11786,7 +13192,7 @@
                 <a:ea typeface="Noto Sans CJK SC"/>
                 <a:cs typeface="Segoe UI"/>
               </a:rPr>
-              <a:t>3 / 32</a:t>
+              <a:t>3 / 31</a:t>
             </a:r>
           </a:p>
         </p:txBody>
@@ -11850,7 +13256,7 @@
                 <a:ea typeface="Noto Sans CJK SC"/>
                 <a:cs typeface="Segoe UI"/>
               </a:rPr>
-              <a:t>Python 算法轨：置换选择与选择树</a:t>
+              <a:t>本章小结</a:t>
             </a:r>
           </a:p>
         </p:txBody>
@@ -11884,14 +13290,14 @@
       </p:sp>
       <p:sp>
         <p:nvSpPr>
-          <p:cNvPr id="4" name="正文"/>
+          <p:cNvPr id="4" name="要点"/>
           <p:cNvSpPr txBox="1"/>
           <p:nvPr/>
         </p:nvSpPr>
         <p:spPr>
           <a:xfrm>
-            <a:off x="566928" y="1171042"/>
-            <a:ext cx="11058144" cy="232806"/>
+            <a:off x="566928" y="1995678"/>
+            <a:ext cx="11058144" cy="2888586"/>
           </a:xfrm>
           <a:prstGeom prst="rect">
             <a:avLst/>
@@ -11904,1426 +13310,265 @@
           </a:bodyPr>
           <a:lstStyle/>
           <a:p>
-            <a:pPr marL="0" indent="0" lvl="0">
-              <a:lnSpc>
-                <a:spcPct val="100000"/>
-              </a:lnSpc>
-              <a:buNone/>
-            </a:pPr>
-            <a:r>
-              <a:rPr lang="zh-CN" sz="1368" dirty="0">
-                <a:solidFill>
-                  <a:srgbClr val="1A1A18"/>
-                </a:solidFill>
-                <a:latin typeface="Segoe UI"/>
-                <a:ea typeface="Noto Sans CJK SC"/>
-                <a:cs typeface="Segoe UI"/>
-              </a:rPr>
-              <a:t>Python 版用于演示顺串生成、多路归并和赢家/败者更新；C++ 版补足文件页、缓冲区和对象所有权等工程实现。</a:t>
-            </a:r>
-          </a:p>
-        </p:txBody>
-      </p:sp>
-      <p:sp>
-        <p:nvSpPr>
-          <p:cNvPr id="5" name="代码"/>
-          <p:cNvSpPr txBox="1"/>
-          <p:nvPr/>
-        </p:nvSpPr>
-        <p:spPr>
-          <a:xfrm>
-            <a:off x="566928" y="1481064"/>
-            <a:ext cx="11058144" cy="4769266"/>
-          </a:xfrm>
-          <a:prstGeom prst="roundRect">
-            <a:avLst>
-              <a:gd name="adj" fmla="val 6000"/>
-            </a:avLst>
-          </a:prstGeom>
-          <a:solidFill>
-            <a:srgbClr val="F5F4F0"/>
-          </a:solidFill>
-          <a:ln w="9525">
-            <a:solidFill>
-              <a:srgbClr val="DCDCD6"/>
-            </a:solidFill>
-          </a:ln>
-        </p:spPr>
-        <p:txBody>
-          <a:bodyPr wrap="square" lIns="100584" tIns="100584" rIns="100584" bIns="100584">
-            <a:noAutofit/>
-          </a:bodyPr>
-          <a:lstStyle/>
-          <a:p>
-            <a:pPr marL="0" indent="0" lvl="0">
-              <a:lnSpc>
-                <a:spcPct val="100000"/>
-              </a:lnSpc>
-              <a:buNone/>
-            </a:pPr>
-            <a:r>
-              <a:rPr lang="zh-CN" sz="711" dirty="0">
-                <a:solidFill>
-                  <a:srgbClr val="6B6B66"/>
-                </a:solidFill>
-                <a:latin typeface="Noto Sans Mono CJK SC"/>
-                <a:ea typeface="Noto Sans Mono CJK SC"/>
-                <a:cs typeface="Noto Sans Mono CJK SC"/>
-              </a:rPr>
-              <a:t>code/ch09/external_sort/modern.py#winner-tree</a:t>
-            </a:r>
-          </a:p>
-          <a:p>
-            <a:pPr marL="0" indent="0" lvl="0">
-              <a:lnSpc>
-                <a:spcPct val="104000"/>
-              </a:lnSpc>
-              <a:buNone/>
-            </a:pPr>
-            <a:r>
-              <a:rPr lang="zh-CN" sz="912" dirty="0">
+            <a:pPr marL="270000" indent="-230000" lvl="0">
+              <a:lnSpc>
+                <a:spcPct val="100000"/>
+              </a:lnSpc>
+              <a:spcBef>
+                <a:spcPts val="655"/>
+              </a:spcBef>
+              <a:buClr>
+                <a:srgbClr val="8A4B2A"/>
+              </a:buClr>
+              <a:buFont typeface="Arial"/>
+              <a:buChar char="●"/>
+            </a:pPr>
+            <a:r>
+              <a:rPr lang="zh-CN" sz="2340" dirty="0">
+                <a:solidFill>
+                  <a:srgbClr val="1A1A18"/>
+                </a:solidFill>
+                <a:latin typeface="Segoe UI"/>
+                <a:ea typeface="Noto Sans CJK SC"/>
+                <a:cs typeface="Segoe UI"/>
+              </a:rPr>
+              <a:t>外排序数的是</a:t>
+            </a:r>
+            <a:r>
+              <a:rPr lang="zh-CN" sz="2340" dirty="0" b="1">
                 <a:solidFill>
                   <a:srgbClr val="8A4B2A"/>
                 </a:solidFill>
-                <a:latin typeface="Noto Sans Mono CJK SC"/>
-                <a:ea typeface="Noto Sans Mono CJK SC"/>
-                <a:cs typeface="Noto Sans Mono CJK SC"/>
-              </a:rPr>
-              <a:t>class</a:t>
-            </a:r>
-            <a:r>
-              <a:rPr lang="zh-CN" sz="912" dirty="0">
-                <a:solidFill>
-                  <a:srgbClr val="1A1A18"/>
-                </a:solidFill>
-                <a:latin typeface="Noto Sans Mono CJK SC"/>
-                <a:ea typeface="Noto Sans Mono CJK SC"/>
-                <a:cs typeface="Noto Sans Mono CJK SC"/>
-              </a:rPr>
-              <a:t> WinnerTree(_Tournament):</a:t>
-            </a:r>
-          </a:p>
-          <a:p>
-            <a:pPr marL="0" indent="0" lvl="0">
-              <a:lnSpc>
-                <a:spcPct val="104000"/>
-              </a:lnSpc>
-              <a:buNone/>
-            </a:pPr>
-            <a:r>
-              <a:rPr lang="zh-CN" sz="912" dirty="0">
-                <a:solidFill>
-                  <a:srgbClr val="1A1A18"/>
-                </a:solidFill>
-                <a:latin typeface="Noto Sans Mono CJK SC"/>
-                <a:ea typeface="Noto Sans Mono CJK SC"/>
-                <a:cs typeface="Noto Sans Mono CJK SC"/>
-              </a:rPr>
-              <a:t>    </a:t>
-            </a:r>
-            <a:r>
-              <a:rPr lang="zh-CN" sz="912" dirty="0">
-                <a:solidFill>
-                  <a:srgbClr val="7A5C1E"/>
-                </a:solidFill>
-                <a:latin typeface="Noto Sans Mono CJK SC"/>
-                <a:ea typeface="Noto Sans Mono CJK SC"/>
-                <a:cs typeface="Noto Sans Mono CJK SC"/>
-              </a:rPr>
-              <a:t>"""代码9.2：内部结点记**赢家**，根就是全局最小的那一路。</a:t>
-            </a:r>
-          </a:p>
-          <a:p>
-            <a:pPr marL="0" indent="0" lvl="0">
-              <a:lnSpc>
-                <a:spcPct val="104000"/>
-              </a:lnSpc>
-              <a:buNone/>
-            </a:pPr>
-            <a:r>
-              <a:rPr lang="zh-CN" sz="912" dirty="0">
-                <a:solidFill>
-                  <a:srgbClr val="1A1A18"/>
-                </a:solidFill>
-                <a:latin typeface="Noto Sans Mono CJK SC"/>
-                <a:ea typeface="Noto Sans Mono CJK SC"/>
-                <a:cs typeface="Noto Sans Mono CJK SC"/>
-              </a:rPr>
-              <a:t> </a:t>
-            </a:r>
-          </a:p>
-          <a:p>
-            <a:pPr marL="0" indent="0" lvl="0">
-              <a:lnSpc>
-                <a:spcPct val="104000"/>
-              </a:lnSpc>
-              <a:buNone/>
-            </a:pPr>
-            <a:r>
-              <a:rPr lang="zh-CN" sz="912" dirty="0">
-                <a:solidFill>
-                  <a:srgbClr val="7A5C1E"/>
-                </a:solidFill>
-                <a:latin typeface="Noto Sans Mono CJK SC"/>
-                <a:ea typeface="Noto Sans Mono CJK SC"/>
-                <a:cs typeface="Noto Sans Mono CJK SC"/>
-              </a:rPr>
-              <a:t>    重建一个结点要看它两个孩子的赢家，所以替换选手后沿路每层各比一次。</a:t>
-            </a:r>
-          </a:p>
-          <a:p>
-            <a:pPr marL="0" indent="0" lvl="0">
-              <a:lnSpc>
-                <a:spcPct val="104000"/>
-              </a:lnSpc>
-              <a:buNone/>
-            </a:pPr>
-            <a:r>
-              <a:rPr lang="zh-CN" sz="912" dirty="0">
-                <a:solidFill>
-                  <a:srgbClr val="7A5C1E"/>
-                </a:solidFill>
-                <a:latin typeface="Noto Sans Mono CJK SC"/>
-                <a:ea typeface="Noto Sans Mono CJK SC"/>
-                <a:cs typeface="Noto Sans Mono CJK SC"/>
-              </a:rPr>
-              <a:t>    """</a:t>
-            </a:r>
-          </a:p>
-          <a:p>
-            <a:pPr marL="0" indent="0" lvl="0">
-              <a:lnSpc>
-                <a:spcPct val="104000"/>
-              </a:lnSpc>
-              <a:buNone/>
-            </a:pPr>
-            <a:r>
-              <a:rPr lang="zh-CN" sz="912" dirty="0">
-                <a:solidFill>
-                  <a:srgbClr val="1A1A18"/>
-                </a:solidFill>
-                <a:latin typeface="Noto Sans Mono CJK SC"/>
-                <a:ea typeface="Noto Sans Mono CJK SC"/>
-                <a:cs typeface="Noto Sans Mono CJK SC"/>
-              </a:rPr>
-              <a:t> </a:t>
-            </a:r>
-          </a:p>
-          <a:p>
-            <a:pPr marL="0" indent="0" lvl="0">
-              <a:lnSpc>
-                <a:spcPct val="104000"/>
-              </a:lnSpc>
-              <a:buNone/>
-            </a:pPr>
-            <a:r>
-              <a:rPr lang="zh-CN" sz="912" dirty="0">
-                <a:solidFill>
-                  <a:srgbClr val="1A1A18"/>
-                </a:solidFill>
-                <a:latin typeface="Noto Sans Mono CJK SC"/>
-                <a:ea typeface="Noto Sans Mono CJK SC"/>
-                <a:cs typeface="Noto Sans Mono CJK SC"/>
-              </a:rPr>
-              <a:t>    </a:t>
-            </a:r>
-            <a:r>
-              <a:rPr lang="zh-CN" sz="912" dirty="0">
+                <a:latin typeface="Segoe UI"/>
+                <a:ea typeface="Noto Sans CJK SC"/>
+                <a:cs typeface="Segoe UI"/>
+              </a:rPr>
+              <a:t>外存访问次数</a:t>
+            </a:r>
+            <a:r>
+              <a:rPr lang="zh-CN" sz="2340" dirty="0">
+                <a:solidFill>
+                  <a:srgbClr val="1A1A18"/>
+                </a:solidFill>
+                <a:latin typeface="Segoe UI"/>
+                <a:ea typeface="Noto Sans CJK SC"/>
+                <a:cs typeface="Segoe UI"/>
+              </a:rPr>
+              <a:t>，不是比较次数</a:t>
+            </a:r>
+          </a:p>
+          <a:p>
+            <a:pPr marL="270000" indent="-230000" lvl="0">
+              <a:lnSpc>
+                <a:spcPct val="100000"/>
+              </a:lnSpc>
+              <a:spcBef>
+                <a:spcPts val="655"/>
+              </a:spcBef>
+              <a:buClr>
+                <a:srgbClr val="8A4B2A"/>
+              </a:buClr>
+              <a:buFont typeface="Arial"/>
+              <a:buChar char="●"/>
+            </a:pPr>
+            <a:r>
+              <a:rPr lang="zh-CN" sz="2340" dirty="0" b="1">
                 <a:solidFill>
                   <a:srgbClr val="8A4B2A"/>
                 </a:solidFill>
-                <a:latin typeface="Noto Sans Mono CJK SC"/>
-                <a:ea typeface="Noto Sans Mono CJK SC"/>
-                <a:cs typeface="Noto Sans Mono CJK SC"/>
-              </a:rPr>
-              <a:t>def</a:t>
-            </a:r>
-            <a:r>
-              <a:rPr lang="zh-CN" sz="912" dirty="0">
-                <a:solidFill>
-                  <a:srgbClr val="1A1A18"/>
-                </a:solidFill>
-                <a:latin typeface="Noto Sans Mono CJK SC"/>
-                <a:ea typeface="Noto Sans Mono CJK SC"/>
-                <a:cs typeface="Noto Sans Mono CJK SC"/>
-              </a:rPr>
-              <a:t> _winner_at(self, node: </a:t>
-            </a:r>
-            <a:r>
-              <a:rPr lang="zh-CN" sz="912" dirty="0">
-                <a:solidFill>
-                  <a:srgbClr val="2C6B57"/>
-                </a:solidFill>
-                <a:latin typeface="Noto Sans Mono CJK SC"/>
-                <a:ea typeface="Noto Sans Mono CJK SC"/>
-                <a:cs typeface="Noto Sans Mono CJK SC"/>
-              </a:rPr>
-              <a:t>int</a:t>
-            </a:r>
-            <a:r>
-              <a:rPr lang="zh-CN" sz="912" dirty="0">
-                <a:solidFill>
-                  <a:srgbClr val="1A1A18"/>
-                </a:solidFill>
-                <a:latin typeface="Noto Sans Mono CJK SC"/>
-                <a:ea typeface="Noto Sans Mono CJK SC"/>
-                <a:cs typeface="Noto Sans Mono CJK SC"/>
-              </a:rPr>
-              <a:t>) -&gt; </a:t>
-            </a:r>
-            <a:r>
-              <a:rPr lang="zh-CN" sz="912" dirty="0">
-                <a:solidFill>
-                  <a:srgbClr val="2C6B57"/>
-                </a:solidFill>
-                <a:latin typeface="Noto Sans Mono CJK SC"/>
-                <a:ea typeface="Noto Sans Mono CJK SC"/>
-                <a:cs typeface="Noto Sans Mono CJK SC"/>
-              </a:rPr>
-              <a:t>int</a:t>
-            </a:r>
-            <a:r>
-              <a:rPr lang="zh-CN" sz="912" dirty="0">
-                <a:solidFill>
-                  <a:srgbClr val="1A1A18"/>
-                </a:solidFill>
-                <a:latin typeface="Noto Sans Mono CJK SC"/>
-                <a:ea typeface="Noto Sans Mono CJK SC"/>
-                <a:cs typeface="Noto Sans Mono CJK SC"/>
-              </a:rPr>
-              <a:t>:</a:t>
-            </a:r>
-          </a:p>
-          <a:p>
-            <a:pPr marL="0" indent="0" lvl="0">
-              <a:lnSpc>
-                <a:spcPct val="104000"/>
-              </a:lnSpc>
-              <a:buNone/>
-            </a:pPr>
-            <a:r>
-              <a:rPr lang="zh-CN" sz="912" dirty="0">
-                <a:solidFill>
-                  <a:srgbClr val="1A1A18"/>
-                </a:solidFill>
-                <a:latin typeface="Noto Sans Mono CJK SC"/>
-                <a:ea typeface="Noto Sans Mono CJK SC"/>
-                <a:cs typeface="Noto Sans Mono CJK SC"/>
-              </a:rPr>
-              <a:t>        </a:t>
-            </a:r>
-            <a:r>
-              <a:rPr lang="zh-CN" sz="912" dirty="0">
-                <a:solidFill>
-                  <a:srgbClr val="8A8A84"/>
-                </a:solidFill>
-                <a:latin typeface="Noto Sans Mono CJK SC"/>
-                <a:ea typeface="Noto Sans Mono CJK SC"/>
-                <a:cs typeface="Noto Sans Mono CJK SC"/>
-              </a:rPr>
-              <a:t># 叶子层不占内部结点的位置：第 j 个选手就在 _size + j 上，它自己是自己的赢家。</a:t>
-            </a:r>
-          </a:p>
-          <a:p>
-            <a:pPr marL="0" indent="0" lvl="0">
-              <a:lnSpc>
-                <a:spcPct val="104000"/>
-              </a:lnSpc>
-              <a:buNone/>
-            </a:pPr>
-            <a:r>
-              <a:rPr lang="zh-CN" sz="912" dirty="0">
-                <a:solidFill>
-                  <a:srgbClr val="1A1A18"/>
-                </a:solidFill>
-                <a:latin typeface="Noto Sans Mono CJK SC"/>
-                <a:ea typeface="Noto Sans Mono CJK SC"/>
-                <a:cs typeface="Noto Sans Mono CJK SC"/>
-              </a:rPr>
-              <a:t>        </a:t>
-            </a:r>
-            <a:r>
-              <a:rPr lang="zh-CN" sz="912" dirty="0">
+                <a:latin typeface="Segoe UI"/>
+                <a:ea typeface="Noto Sans CJK SC"/>
+                <a:cs typeface="Segoe UI"/>
+              </a:rPr>
+              <a:t>顺序读写远比随机读写划算</a:t>
+            </a:r>
+            <a:r>
+              <a:rPr lang="zh-CN" sz="2340" dirty="0">
+                <a:solidFill>
+                  <a:srgbClr val="1A1A18"/>
+                </a:solidFill>
+                <a:latin typeface="Segoe UI"/>
+                <a:ea typeface="Noto Sans CJK SC"/>
+                <a:cs typeface="Segoe UI"/>
+              </a:rPr>
+              <a:t>——所以外排序全靠归并</a:t>
+            </a:r>
+          </a:p>
+          <a:p>
+            <a:pPr marL="270000" indent="-230000" lvl="0">
+              <a:lnSpc>
+                <a:spcPct val="100000"/>
+              </a:lnSpc>
+              <a:spcBef>
+                <a:spcPts val="655"/>
+              </a:spcBef>
+              <a:buClr>
+                <a:srgbClr val="8A4B2A"/>
+              </a:buClr>
+              <a:buFont typeface="Arial"/>
+              <a:buChar char="●"/>
+            </a:pPr>
+            <a:r>
+              <a:rPr lang="zh-CN" sz="2340" dirty="0" b="1">
                 <a:solidFill>
                   <a:srgbClr val="8A4B2A"/>
                 </a:solidFill>
-                <a:latin typeface="Noto Sans Mono CJK SC"/>
-                <a:ea typeface="Noto Sans Mono CJK SC"/>
-                <a:cs typeface="Noto Sans Mono CJK SC"/>
-              </a:rPr>
-              <a:t>return</a:t>
-            </a:r>
-            <a:r>
-              <a:rPr lang="zh-CN" sz="912" dirty="0">
-                <a:solidFill>
-                  <a:srgbClr val="1A1A18"/>
-                </a:solidFill>
-                <a:latin typeface="Noto Sans Mono CJK SC"/>
-                <a:ea typeface="Noto Sans Mono CJK SC"/>
-                <a:cs typeface="Noto Sans Mono CJK SC"/>
-              </a:rPr>
-              <a:t> node - self._size </a:t>
-            </a:r>
-            <a:r>
-              <a:rPr lang="zh-CN" sz="912" dirty="0">
+                <a:latin typeface="Segoe UI"/>
+                <a:ea typeface="Noto Sans CJK SC"/>
+                <a:cs typeface="Segoe UI"/>
+              </a:rPr>
+              <a:t>置换选择</a:t>
+            </a:r>
+            <a:r>
+              <a:rPr lang="zh-CN" sz="2340" dirty="0">
+                <a:solidFill>
+                  <a:srgbClr val="1A1A18"/>
+                </a:solidFill>
+                <a:latin typeface="Segoe UI"/>
+                <a:ea typeface="Noto Sans CJK SC"/>
+                <a:cs typeface="Segoe UI"/>
+              </a:rPr>
+              <a:t>把顺串平均长度从 M 提到 2M，段数减半</a:t>
+            </a:r>
+          </a:p>
+          <a:p>
+            <a:pPr marL="270000" indent="-230000" lvl="0">
+              <a:lnSpc>
+                <a:spcPct val="100000"/>
+              </a:lnSpc>
+              <a:spcBef>
+                <a:spcPts val="655"/>
+              </a:spcBef>
+              <a:buClr>
+                <a:srgbClr val="8A4B2A"/>
+              </a:buClr>
+              <a:buFont typeface="Arial"/>
+              <a:buChar char="●"/>
+            </a:pPr>
+            <a:r>
+              <a:rPr lang="zh-CN" sz="2340" dirty="0">
+                <a:solidFill>
+                  <a:srgbClr val="1A1A18"/>
+                </a:solidFill>
+                <a:latin typeface="Segoe UI"/>
+                <a:ea typeface="Noto Sans CJK SC"/>
+                <a:cs typeface="Segoe UI"/>
+              </a:rPr>
+              <a:t>多路归并降低轮数，但「挑最小」会变贵</a:t>
+            </a:r>
+          </a:p>
+          <a:p>
+            <a:pPr marL="270000" indent="-230000" lvl="0">
+              <a:lnSpc>
+                <a:spcPct val="100000"/>
+              </a:lnSpc>
+              <a:spcBef>
+                <a:spcPts val="655"/>
+              </a:spcBef>
+              <a:buClr>
+                <a:srgbClr val="8A4B2A"/>
+              </a:buClr>
+              <a:buFont typeface="Arial"/>
+              <a:buChar char="●"/>
+            </a:pPr>
+            <a:r>
+              <a:rPr lang="zh-CN" sz="2340" dirty="0" b="1">
                 <a:solidFill>
                   <a:srgbClr val="8A4B2A"/>
                 </a:solidFill>
-                <a:latin typeface="Noto Sans Mono CJK SC"/>
-                <a:ea typeface="Noto Sans Mono CJK SC"/>
-                <a:cs typeface="Noto Sans Mono CJK SC"/>
-              </a:rPr>
-              <a:t>if</a:t>
-            </a:r>
-            <a:r>
-              <a:rPr lang="zh-CN" sz="912" dirty="0">
-                <a:solidFill>
-                  <a:srgbClr val="1A1A18"/>
-                </a:solidFill>
-                <a:latin typeface="Noto Sans Mono CJK SC"/>
-                <a:ea typeface="Noto Sans Mono CJK SC"/>
-                <a:cs typeface="Noto Sans Mono CJK SC"/>
-              </a:rPr>
-              <a:t> node &gt;= self._size </a:t>
-            </a:r>
-            <a:r>
-              <a:rPr lang="zh-CN" sz="912" dirty="0">
+                <a:latin typeface="Segoe UI"/>
+                <a:ea typeface="Noto Sans CJK SC"/>
+                <a:cs typeface="Segoe UI"/>
+              </a:rPr>
+              <a:t>选择树</a:t>
+            </a:r>
+            <a:r>
+              <a:rPr lang="zh-CN" sz="2340" dirty="0">
+                <a:solidFill>
+                  <a:srgbClr val="1A1A18"/>
+                </a:solidFill>
+                <a:latin typeface="Segoe UI"/>
+                <a:ea typeface="Noto Sans CJK SC"/>
+                <a:cs typeface="Segoe UI"/>
+              </a:rPr>
+              <a:t>把挑最小从 </a:t>
+            </a:r>
+            <a:r>
+              <a:rPr lang="zh-CN" sz="2340" dirty="0" i="1">
+                <a:solidFill>
+                  <a:srgbClr val="1A1A18"/>
+                </a:solidFill>
+                <a:latin typeface="Segoe UI"/>
+                <a:ea typeface="Noto Sans CJK SC"/>
+                <a:cs typeface="Segoe UI"/>
+              </a:rPr>
+              <a:t>O(k)</a:t>
+            </a:r>
+            <a:r>
+              <a:rPr lang="zh-CN" sz="2340" dirty="0">
+                <a:solidFill>
+                  <a:srgbClr val="1A1A18"/>
+                </a:solidFill>
+                <a:latin typeface="Segoe UI"/>
+                <a:ea typeface="Noto Sans CJK SC"/>
+                <a:cs typeface="Segoe UI"/>
+              </a:rPr>
+              <a:t> 降到 </a:t>
+            </a:r>
+            <a:r>
+              <a:rPr lang="zh-CN" sz="2340" dirty="0" i="1">
+                <a:solidFill>
+                  <a:srgbClr val="1A1A18"/>
+                </a:solidFill>
+                <a:latin typeface="Segoe UI"/>
+                <a:ea typeface="Noto Sans CJK SC"/>
+                <a:cs typeface="Segoe UI"/>
+              </a:rPr>
+              <a:t>O(log k)</a:t>
+            </a:r>
+          </a:p>
+          <a:p>
+            <a:pPr marL="270000" indent="-230000" lvl="0">
+              <a:lnSpc>
+                <a:spcPct val="100000"/>
+              </a:lnSpc>
+              <a:spcBef>
+                <a:spcPts val="655"/>
+              </a:spcBef>
+              <a:buClr>
+                <a:srgbClr val="8A4B2A"/>
+              </a:buClr>
+              <a:buFont typeface="Arial"/>
+              <a:buChar char="●"/>
+            </a:pPr>
+            <a:r>
+              <a:rPr lang="zh-CN" sz="2340" dirty="0" b="1">
                 <a:solidFill>
                   <a:srgbClr val="8A4B2A"/>
                 </a:solidFill>
-                <a:latin typeface="Noto Sans Mono CJK SC"/>
-                <a:ea typeface="Noto Sans Mono CJK SC"/>
-                <a:cs typeface="Noto Sans Mono CJK SC"/>
-              </a:rPr>
-              <a:t>else</a:t>
-            </a:r>
-            <a:r>
-              <a:rPr lang="zh-CN" sz="912" dirty="0">
-                <a:solidFill>
-                  <a:srgbClr val="1A1A18"/>
-                </a:solidFill>
-                <a:latin typeface="Noto Sans Mono CJK SC"/>
-                <a:ea typeface="Noto Sans Mono CJK SC"/>
-                <a:cs typeface="Noto Sans Mono CJK SC"/>
-              </a:rPr>
-              <a:t> self._tree[node]</a:t>
-            </a:r>
-          </a:p>
-          <a:p>
-            <a:pPr marL="0" indent="0" lvl="0">
-              <a:lnSpc>
-                <a:spcPct val="104000"/>
-              </a:lnSpc>
-              <a:buNone/>
-            </a:pPr>
-            <a:r>
-              <a:rPr lang="zh-CN" sz="912" dirty="0">
-                <a:solidFill>
-                  <a:srgbClr val="1A1A18"/>
-                </a:solidFill>
-                <a:latin typeface="Noto Sans Mono CJK SC"/>
-                <a:ea typeface="Noto Sans Mono CJK SC"/>
-                <a:cs typeface="Noto Sans Mono CJK SC"/>
-              </a:rPr>
-              <a:t> </a:t>
-            </a:r>
-          </a:p>
-          <a:p>
-            <a:pPr marL="0" indent="0" lvl="0">
-              <a:lnSpc>
-                <a:spcPct val="104000"/>
-              </a:lnSpc>
-              <a:buNone/>
-            </a:pPr>
-            <a:r>
-              <a:rPr lang="zh-CN" sz="912" dirty="0">
-                <a:solidFill>
-                  <a:srgbClr val="1A1A18"/>
-                </a:solidFill>
-                <a:latin typeface="Noto Sans Mono CJK SC"/>
-                <a:ea typeface="Noto Sans Mono CJK SC"/>
-                <a:cs typeface="Noto Sans Mono CJK SC"/>
-              </a:rPr>
-              <a:t>    </a:t>
-            </a:r>
-            <a:r>
-              <a:rPr lang="zh-CN" sz="912" dirty="0">
-                <a:solidFill>
-                  <a:srgbClr val="8A4B2A"/>
-                </a:solidFill>
-                <a:latin typeface="Noto Sans Mono CJK SC"/>
-                <a:ea typeface="Noto Sans Mono CJK SC"/>
-                <a:cs typeface="Noto Sans Mono CJK SC"/>
-              </a:rPr>
-              <a:t>def</a:t>
-            </a:r>
-            <a:r>
-              <a:rPr lang="zh-CN" sz="912" dirty="0">
-                <a:solidFill>
-                  <a:srgbClr val="1A1A18"/>
-                </a:solidFill>
-                <a:latin typeface="Noto Sans Mono CJK SC"/>
-                <a:ea typeface="Noto Sans Mono CJK SC"/>
-                <a:cs typeface="Noto Sans Mono CJK SC"/>
-              </a:rPr>
-              <a:t> _build(self) -&gt; </a:t>
-            </a:r>
-            <a:r>
-              <a:rPr lang="zh-CN" sz="912" dirty="0">
-                <a:solidFill>
-                  <a:srgbClr val="8A4B2A"/>
-                </a:solidFill>
-                <a:latin typeface="Noto Sans Mono CJK SC"/>
-                <a:ea typeface="Noto Sans Mono CJK SC"/>
-                <a:cs typeface="Noto Sans Mono CJK SC"/>
-              </a:rPr>
-              <a:t>None</a:t>
-            </a:r>
-            <a:r>
-              <a:rPr lang="zh-CN" sz="912" dirty="0">
-                <a:solidFill>
-                  <a:srgbClr val="1A1A18"/>
-                </a:solidFill>
-                <a:latin typeface="Noto Sans Mono CJK SC"/>
-                <a:ea typeface="Noto Sans Mono CJK SC"/>
-                <a:cs typeface="Noto Sans Mono CJK SC"/>
-              </a:rPr>
-              <a:t>:</a:t>
-            </a:r>
-          </a:p>
-          <a:p>
-            <a:pPr marL="0" indent="0" lvl="0">
-              <a:lnSpc>
-                <a:spcPct val="104000"/>
-              </a:lnSpc>
-              <a:buNone/>
-            </a:pPr>
-            <a:r>
-              <a:rPr lang="zh-CN" sz="912" dirty="0">
-                <a:solidFill>
-                  <a:srgbClr val="1A1A18"/>
-                </a:solidFill>
-                <a:latin typeface="Noto Sans Mono CJK SC"/>
-                <a:ea typeface="Noto Sans Mono CJK SC"/>
-                <a:cs typeface="Noto Sans Mono CJK SC"/>
-              </a:rPr>
-              <a:t>        </a:t>
-            </a:r>
-            <a:r>
-              <a:rPr lang="zh-CN" sz="912" dirty="0">
-                <a:solidFill>
-                  <a:srgbClr val="8A4B2A"/>
-                </a:solidFill>
-                <a:latin typeface="Noto Sans Mono CJK SC"/>
-                <a:ea typeface="Noto Sans Mono CJK SC"/>
-                <a:cs typeface="Noto Sans Mono CJK SC"/>
-              </a:rPr>
-              <a:t>for</a:t>
-            </a:r>
-            <a:r>
-              <a:rPr lang="zh-CN" sz="912" dirty="0">
-                <a:solidFill>
-                  <a:srgbClr val="1A1A18"/>
-                </a:solidFill>
-                <a:latin typeface="Noto Sans Mono CJK SC"/>
-                <a:ea typeface="Noto Sans Mono CJK SC"/>
-                <a:cs typeface="Noto Sans Mono CJK SC"/>
-              </a:rPr>
-              <a:t> node </a:t>
-            </a:r>
-            <a:r>
-              <a:rPr lang="zh-CN" sz="912" dirty="0">
-                <a:solidFill>
-                  <a:srgbClr val="8A4B2A"/>
-                </a:solidFill>
-                <a:latin typeface="Noto Sans Mono CJK SC"/>
-                <a:ea typeface="Noto Sans Mono CJK SC"/>
-                <a:cs typeface="Noto Sans Mono CJK SC"/>
-              </a:rPr>
-              <a:t>in</a:t>
-            </a:r>
-            <a:r>
-              <a:rPr lang="zh-CN" sz="912" dirty="0">
-                <a:solidFill>
-                  <a:srgbClr val="1A1A18"/>
-                </a:solidFill>
-                <a:latin typeface="Noto Sans Mono CJK SC"/>
-                <a:ea typeface="Noto Sans Mono CJK SC"/>
-                <a:cs typeface="Noto Sans Mono CJK SC"/>
-              </a:rPr>
-              <a:t> </a:t>
-            </a:r>
-            <a:r>
-              <a:rPr lang="zh-CN" sz="912" dirty="0">
-                <a:solidFill>
-                  <a:srgbClr val="2C6B57"/>
-                </a:solidFill>
-                <a:latin typeface="Noto Sans Mono CJK SC"/>
-                <a:ea typeface="Noto Sans Mono CJK SC"/>
-                <a:cs typeface="Noto Sans Mono CJK SC"/>
-              </a:rPr>
-              <a:t>range</a:t>
-            </a:r>
-            <a:r>
-              <a:rPr lang="zh-CN" sz="912" dirty="0">
-                <a:solidFill>
-                  <a:srgbClr val="1A1A18"/>
-                </a:solidFill>
-                <a:latin typeface="Noto Sans Mono CJK SC"/>
-                <a:ea typeface="Noto Sans Mono CJK SC"/>
-                <a:cs typeface="Noto Sans Mono CJK SC"/>
-              </a:rPr>
-              <a:t>(self._size - </a:t>
-            </a:r>
-            <a:r>
-              <a:rPr lang="zh-CN" sz="912" dirty="0">
-                <a:solidFill>
-                  <a:srgbClr val="4A5AA8"/>
-                </a:solidFill>
-                <a:latin typeface="Noto Sans Mono CJK SC"/>
-                <a:ea typeface="Noto Sans Mono CJK SC"/>
-                <a:cs typeface="Noto Sans Mono CJK SC"/>
-              </a:rPr>
-              <a:t>1</a:t>
-            </a:r>
-            <a:r>
-              <a:rPr lang="zh-CN" sz="912" dirty="0">
-                <a:solidFill>
-                  <a:srgbClr val="1A1A18"/>
-                </a:solidFill>
-                <a:latin typeface="Noto Sans Mono CJK SC"/>
-                <a:ea typeface="Noto Sans Mono CJK SC"/>
-                <a:cs typeface="Noto Sans Mono CJK SC"/>
-              </a:rPr>
-              <a:t>, </a:t>
-            </a:r>
-            <a:r>
-              <a:rPr lang="zh-CN" sz="912" dirty="0">
-                <a:solidFill>
-                  <a:srgbClr val="4A5AA8"/>
-                </a:solidFill>
-                <a:latin typeface="Noto Sans Mono CJK SC"/>
-                <a:ea typeface="Noto Sans Mono CJK SC"/>
-                <a:cs typeface="Noto Sans Mono CJK SC"/>
-              </a:rPr>
-              <a:t>0</a:t>
-            </a:r>
-            <a:r>
-              <a:rPr lang="zh-CN" sz="912" dirty="0">
-                <a:solidFill>
-                  <a:srgbClr val="1A1A18"/>
-                </a:solidFill>
-                <a:latin typeface="Noto Sans Mono CJK SC"/>
-                <a:ea typeface="Noto Sans Mono CJK SC"/>
-                <a:cs typeface="Noto Sans Mono CJK SC"/>
-              </a:rPr>
-              <a:t>, -</a:t>
-            </a:r>
-            <a:r>
-              <a:rPr lang="zh-CN" sz="912" dirty="0">
-                <a:solidFill>
-                  <a:srgbClr val="4A5AA8"/>
-                </a:solidFill>
-                <a:latin typeface="Noto Sans Mono CJK SC"/>
-                <a:ea typeface="Noto Sans Mono CJK SC"/>
-                <a:cs typeface="Noto Sans Mono CJK SC"/>
-              </a:rPr>
-              <a:t>1</a:t>
-            </a:r>
-            <a:r>
-              <a:rPr lang="zh-CN" sz="912" dirty="0">
-                <a:solidFill>
-                  <a:srgbClr val="1A1A18"/>
-                </a:solidFill>
-                <a:latin typeface="Noto Sans Mono CJK SC"/>
-                <a:ea typeface="Noto Sans Mono CJK SC"/>
-                <a:cs typeface="Noto Sans Mono CJK SC"/>
-              </a:rPr>
-              <a:t>):</a:t>
-            </a:r>
-          </a:p>
-          <a:p>
-            <a:pPr marL="0" indent="0" lvl="0">
-              <a:lnSpc>
-                <a:spcPct val="104000"/>
-              </a:lnSpc>
-              <a:buNone/>
-            </a:pPr>
-            <a:r>
-              <a:rPr lang="zh-CN" sz="912" dirty="0">
-                <a:solidFill>
-                  <a:srgbClr val="1A1A18"/>
-                </a:solidFill>
-                <a:latin typeface="Noto Sans Mono CJK SC"/>
-                <a:ea typeface="Noto Sans Mono CJK SC"/>
-                <a:cs typeface="Noto Sans Mono CJK SC"/>
-              </a:rPr>
-              <a:t>            self._tree[node] = self._better(self._winner_at(node * </a:t>
-            </a:r>
-            <a:r>
-              <a:rPr lang="zh-CN" sz="912" dirty="0">
-                <a:solidFill>
-                  <a:srgbClr val="4A5AA8"/>
-                </a:solidFill>
-                <a:latin typeface="Noto Sans Mono CJK SC"/>
-                <a:ea typeface="Noto Sans Mono CJK SC"/>
-                <a:cs typeface="Noto Sans Mono CJK SC"/>
-              </a:rPr>
-              <a:t>2</a:t>
-            </a:r>
-            <a:r>
-              <a:rPr lang="zh-CN" sz="912" dirty="0">
-                <a:solidFill>
-                  <a:srgbClr val="1A1A18"/>
-                </a:solidFill>
-                <a:latin typeface="Noto Sans Mono CJK SC"/>
-                <a:ea typeface="Noto Sans Mono CJK SC"/>
-                <a:cs typeface="Noto Sans Mono CJK SC"/>
-              </a:rPr>
-              <a:t>),</a:t>
-            </a:r>
-          </a:p>
-          <a:p>
-            <a:pPr marL="0" indent="0" lvl="0">
-              <a:lnSpc>
-                <a:spcPct val="104000"/>
-              </a:lnSpc>
-              <a:buNone/>
-            </a:pPr>
-            <a:r>
-              <a:rPr lang="zh-CN" sz="912" dirty="0">
-                <a:solidFill>
-                  <a:srgbClr val="1A1A18"/>
-                </a:solidFill>
-                <a:latin typeface="Noto Sans Mono CJK SC"/>
-                <a:ea typeface="Noto Sans Mono CJK SC"/>
-                <a:cs typeface="Noto Sans Mono CJK SC"/>
-              </a:rPr>
-              <a:t>                                            self._winner_at(node * </a:t>
-            </a:r>
-            <a:r>
-              <a:rPr lang="zh-CN" sz="912" dirty="0">
-                <a:solidFill>
-                  <a:srgbClr val="4A5AA8"/>
-                </a:solidFill>
-                <a:latin typeface="Noto Sans Mono CJK SC"/>
-                <a:ea typeface="Noto Sans Mono CJK SC"/>
-                <a:cs typeface="Noto Sans Mono CJK SC"/>
-              </a:rPr>
-              <a:t>2</a:t>
-            </a:r>
-            <a:r>
-              <a:rPr lang="zh-CN" sz="912" dirty="0">
-                <a:solidFill>
-                  <a:srgbClr val="1A1A18"/>
-                </a:solidFill>
-                <a:latin typeface="Noto Sans Mono CJK SC"/>
-                <a:ea typeface="Noto Sans Mono CJK SC"/>
-                <a:cs typeface="Noto Sans Mono CJK SC"/>
-              </a:rPr>
-              <a:t> + </a:t>
-            </a:r>
-            <a:r>
-              <a:rPr lang="zh-CN" sz="912" dirty="0">
-                <a:solidFill>
-                  <a:srgbClr val="4A5AA8"/>
-                </a:solidFill>
-                <a:latin typeface="Noto Sans Mono CJK SC"/>
-                <a:ea typeface="Noto Sans Mono CJK SC"/>
-                <a:cs typeface="Noto Sans Mono CJK SC"/>
-              </a:rPr>
-              <a:t>1</a:t>
-            </a:r>
-            <a:r>
-              <a:rPr lang="zh-CN" sz="912" dirty="0">
-                <a:solidFill>
-                  <a:srgbClr val="1A1A18"/>
-                </a:solidFill>
-                <a:latin typeface="Noto Sans Mono CJK SC"/>
-                <a:ea typeface="Noto Sans Mono CJK SC"/>
-                <a:cs typeface="Noto Sans Mono CJK SC"/>
-              </a:rPr>
-              <a:t>))</a:t>
-            </a:r>
-          </a:p>
-          <a:p>
-            <a:pPr marL="0" indent="0" lvl="0">
-              <a:lnSpc>
-                <a:spcPct val="104000"/>
-              </a:lnSpc>
-              <a:buNone/>
-            </a:pPr>
-            <a:r>
-              <a:rPr lang="zh-CN" sz="912" dirty="0">
-                <a:solidFill>
-                  <a:srgbClr val="1A1A18"/>
-                </a:solidFill>
-                <a:latin typeface="Noto Sans Mono CJK SC"/>
-                <a:ea typeface="Noto Sans Mono CJK SC"/>
-                <a:cs typeface="Noto Sans Mono CJK SC"/>
-              </a:rPr>
-              <a:t> </a:t>
-            </a:r>
-          </a:p>
-          <a:p>
-            <a:pPr marL="0" indent="0" lvl="0">
-              <a:lnSpc>
-                <a:spcPct val="104000"/>
-              </a:lnSpc>
-              <a:buNone/>
-            </a:pPr>
-            <a:r>
-              <a:rPr lang="zh-CN" sz="912" dirty="0">
-                <a:solidFill>
-                  <a:srgbClr val="1A1A18"/>
-                </a:solidFill>
-                <a:latin typeface="Noto Sans Mono CJK SC"/>
-                <a:ea typeface="Noto Sans Mono CJK SC"/>
-                <a:cs typeface="Noto Sans Mono CJK SC"/>
-              </a:rPr>
-              <a:t>    </a:t>
-            </a:r>
-            <a:r>
-              <a:rPr lang="zh-CN" sz="912" dirty="0">
-                <a:solidFill>
-                  <a:srgbClr val="8A4B2A"/>
-                </a:solidFill>
-                <a:latin typeface="Noto Sans Mono CJK SC"/>
-                <a:ea typeface="Noto Sans Mono CJK SC"/>
-                <a:cs typeface="Noto Sans Mono CJK SC"/>
-              </a:rPr>
-              <a:t>def</a:t>
-            </a:r>
-            <a:r>
-              <a:rPr lang="zh-CN" sz="912" dirty="0">
-                <a:solidFill>
-                  <a:srgbClr val="1A1A18"/>
-                </a:solidFill>
-                <a:latin typeface="Noto Sans Mono CJK SC"/>
-                <a:ea typeface="Noto Sans Mono CJK SC"/>
-                <a:cs typeface="Noto Sans Mono CJK SC"/>
-              </a:rPr>
-              <a:t> winner_index(self) -&gt; </a:t>
-            </a:r>
-            <a:r>
-              <a:rPr lang="zh-CN" sz="912" dirty="0">
-                <a:solidFill>
-                  <a:srgbClr val="2C6B57"/>
-                </a:solidFill>
-                <a:latin typeface="Noto Sans Mono CJK SC"/>
-                <a:ea typeface="Noto Sans Mono CJK SC"/>
-                <a:cs typeface="Noto Sans Mono CJK SC"/>
-              </a:rPr>
-              <a:t>int</a:t>
-            </a:r>
-            <a:r>
-              <a:rPr lang="zh-CN" sz="912" dirty="0">
-                <a:solidFill>
-                  <a:srgbClr val="1A1A18"/>
-                </a:solidFill>
-                <a:latin typeface="Noto Sans Mono CJK SC"/>
-                <a:ea typeface="Noto Sans Mono CJK SC"/>
-                <a:cs typeface="Noto Sans Mono CJK SC"/>
-              </a:rPr>
-              <a:t> | </a:t>
-            </a:r>
-            <a:r>
-              <a:rPr lang="zh-CN" sz="912" dirty="0">
-                <a:solidFill>
-                  <a:srgbClr val="8A4B2A"/>
-                </a:solidFill>
-                <a:latin typeface="Noto Sans Mono CJK SC"/>
-                <a:ea typeface="Noto Sans Mono CJK SC"/>
-                <a:cs typeface="Noto Sans Mono CJK SC"/>
-              </a:rPr>
-              <a:t>None</a:t>
-            </a:r>
-            <a:r>
-              <a:rPr lang="zh-CN" sz="912" dirty="0">
-                <a:solidFill>
-                  <a:srgbClr val="1A1A18"/>
-                </a:solidFill>
-                <a:latin typeface="Noto Sans Mono CJK SC"/>
-                <a:ea typeface="Noto Sans Mono CJK SC"/>
-                <a:cs typeface="Noto Sans Mono CJK SC"/>
-              </a:rPr>
-              <a:t>:</a:t>
-            </a:r>
-          </a:p>
-          <a:p>
-            <a:pPr marL="0" indent="0" lvl="0">
-              <a:lnSpc>
-                <a:spcPct val="104000"/>
-              </a:lnSpc>
-              <a:buNone/>
-            </a:pPr>
-            <a:r>
-              <a:rPr lang="zh-CN" sz="912" dirty="0">
-                <a:solidFill>
-                  <a:srgbClr val="1A1A18"/>
-                </a:solidFill>
-                <a:latin typeface="Noto Sans Mono CJK SC"/>
-                <a:ea typeface="Noto Sans Mono CJK SC"/>
-                <a:cs typeface="Noto Sans Mono CJK SC"/>
-              </a:rPr>
-              <a:t>        </a:t>
-            </a:r>
-            <a:r>
-              <a:rPr lang="zh-CN" sz="912" dirty="0">
-                <a:solidFill>
-                  <a:srgbClr val="8A4B2A"/>
-                </a:solidFill>
-                <a:latin typeface="Noto Sans Mono CJK SC"/>
-                <a:ea typeface="Noto Sans Mono CJK SC"/>
-                <a:cs typeface="Noto Sans Mono CJK SC"/>
-              </a:rPr>
-              <a:t>if</a:t>
-            </a:r>
-            <a:r>
-              <a:rPr lang="zh-CN" sz="912" dirty="0">
-                <a:solidFill>
-                  <a:srgbClr val="1A1A18"/>
-                </a:solidFill>
-                <a:latin typeface="Noto Sans Mono CJK SC"/>
-                <a:ea typeface="Noto Sans Mono CJK SC"/>
-                <a:cs typeface="Noto Sans Mono CJK SC"/>
-              </a:rPr>
-              <a:t> </a:t>
-            </a:r>
-            <a:r>
-              <a:rPr lang="zh-CN" sz="912" dirty="0">
-                <a:solidFill>
-                  <a:srgbClr val="8A4B2A"/>
-                </a:solidFill>
-                <a:latin typeface="Noto Sans Mono CJK SC"/>
-                <a:ea typeface="Noto Sans Mono CJK SC"/>
-                <a:cs typeface="Noto Sans Mono CJK SC"/>
-              </a:rPr>
-              <a:t>not</a:t>
-            </a:r>
-            <a:r>
-              <a:rPr lang="zh-CN" sz="912" dirty="0">
-                <a:solidFill>
-                  <a:srgbClr val="1A1A18"/>
-                </a:solidFill>
-                <a:latin typeface="Noto Sans Mono CJK SC"/>
-                <a:ea typeface="Noto Sans Mono CJK SC"/>
-                <a:cs typeface="Noto Sans Mono CJK SC"/>
-              </a:rPr>
-              <a:t> self.players:</a:t>
-            </a:r>
-          </a:p>
-          <a:p>
-            <a:pPr marL="0" indent="0" lvl="0">
-              <a:lnSpc>
-                <a:spcPct val="104000"/>
-              </a:lnSpc>
-              <a:buNone/>
-            </a:pPr>
-            <a:r>
-              <a:rPr lang="zh-CN" sz="912" dirty="0">
-                <a:solidFill>
-                  <a:srgbClr val="1A1A18"/>
-                </a:solidFill>
-                <a:latin typeface="Noto Sans Mono CJK SC"/>
-                <a:ea typeface="Noto Sans Mono CJK SC"/>
-                <a:cs typeface="Noto Sans Mono CJK SC"/>
-              </a:rPr>
-              <a:t>            </a:t>
-            </a:r>
-            <a:r>
-              <a:rPr lang="zh-CN" sz="912" dirty="0">
-                <a:solidFill>
-                  <a:srgbClr val="8A4B2A"/>
-                </a:solidFill>
-                <a:latin typeface="Noto Sans Mono CJK SC"/>
-                <a:ea typeface="Noto Sans Mono CJK SC"/>
-                <a:cs typeface="Noto Sans Mono CJK SC"/>
-              </a:rPr>
-              <a:t>return</a:t>
-            </a:r>
-            <a:r>
-              <a:rPr lang="zh-CN" sz="912" dirty="0">
-                <a:solidFill>
-                  <a:srgbClr val="1A1A18"/>
-                </a:solidFill>
-                <a:latin typeface="Noto Sans Mono CJK SC"/>
-                <a:ea typeface="Noto Sans Mono CJK SC"/>
-                <a:cs typeface="Noto Sans Mono CJK SC"/>
-              </a:rPr>
-              <a:t> </a:t>
-            </a:r>
-            <a:r>
-              <a:rPr lang="zh-CN" sz="912" dirty="0">
-                <a:solidFill>
-                  <a:srgbClr val="8A4B2A"/>
-                </a:solidFill>
-                <a:latin typeface="Noto Sans Mono CJK SC"/>
-                <a:ea typeface="Noto Sans Mono CJK SC"/>
-                <a:cs typeface="Noto Sans Mono CJK SC"/>
-              </a:rPr>
-              <a:t>None</a:t>
-            </a:r>
-          </a:p>
-          <a:p>
-            <a:pPr marL="0" indent="0" lvl="0">
-              <a:lnSpc>
-                <a:spcPct val="104000"/>
-              </a:lnSpc>
-              <a:buNone/>
-            </a:pPr>
-            <a:r>
-              <a:rPr lang="zh-CN" sz="912" dirty="0">
-                <a:solidFill>
-                  <a:srgbClr val="1A1A18"/>
-                </a:solidFill>
-                <a:latin typeface="Noto Sans Mono CJK SC"/>
-                <a:ea typeface="Noto Sans Mono CJK SC"/>
-                <a:cs typeface="Noto Sans Mono CJK SC"/>
-              </a:rPr>
-              <a:t>        </a:t>
-            </a:r>
-            <a:r>
-              <a:rPr lang="zh-CN" sz="912" dirty="0">
-                <a:solidFill>
-                  <a:srgbClr val="8A4B2A"/>
-                </a:solidFill>
-                <a:latin typeface="Noto Sans Mono CJK SC"/>
-                <a:ea typeface="Noto Sans Mono CJK SC"/>
-                <a:cs typeface="Noto Sans Mono CJK SC"/>
-              </a:rPr>
-              <a:t>return</a:t>
-            </a:r>
-            <a:r>
-              <a:rPr lang="zh-CN" sz="912" dirty="0">
-                <a:solidFill>
-                  <a:srgbClr val="1A1A18"/>
-                </a:solidFill>
-                <a:latin typeface="Noto Sans Mono CJK SC"/>
-                <a:ea typeface="Noto Sans Mono CJK SC"/>
-                <a:cs typeface="Noto Sans Mono CJK SC"/>
-              </a:rPr>
-              <a:t> self._winner_at(</a:t>
-            </a:r>
-            <a:r>
-              <a:rPr lang="zh-CN" sz="912" dirty="0">
-                <a:solidFill>
-                  <a:srgbClr val="4A5AA8"/>
-                </a:solidFill>
-                <a:latin typeface="Noto Sans Mono CJK SC"/>
-                <a:ea typeface="Noto Sans Mono CJK SC"/>
-                <a:cs typeface="Noto Sans Mono CJK SC"/>
-              </a:rPr>
-              <a:t>1</a:t>
-            </a:r>
-            <a:r>
-              <a:rPr lang="zh-CN" sz="912" dirty="0">
-                <a:solidFill>
-                  <a:srgbClr val="1A1A18"/>
-                </a:solidFill>
-                <a:latin typeface="Noto Sans Mono CJK SC"/>
-                <a:ea typeface="Noto Sans Mono CJK SC"/>
-                <a:cs typeface="Noto Sans Mono CJK SC"/>
-              </a:rPr>
-              <a:t>)</a:t>
-            </a:r>
-          </a:p>
-          <a:p>
-            <a:pPr marL="0" indent="0" lvl="0">
-              <a:lnSpc>
-                <a:spcPct val="104000"/>
-              </a:lnSpc>
-              <a:buNone/>
-            </a:pPr>
-            <a:r>
-              <a:rPr lang="zh-CN" sz="912" dirty="0">
-                <a:solidFill>
-                  <a:srgbClr val="1A1A18"/>
-                </a:solidFill>
-                <a:latin typeface="Noto Sans Mono CJK SC"/>
-                <a:ea typeface="Noto Sans Mono CJK SC"/>
-                <a:cs typeface="Noto Sans Mono CJK SC"/>
-              </a:rPr>
-              <a:t> </a:t>
-            </a:r>
-          </a:p>
-          <a:p>
-            <a:pPr marL="0" indent="0" lvl="0">
-              <a:lnSpc>
-                <a:spcPct val="104000"/>
-              </a:lnSpc>
-              <a:buNone/>
-            </a:pPr>
-            <a:r>
-              <a:rPr lang="zh-CN" sz="912" dirty="0">
-                <a:solidFill>
-                  <a:srgbClr val="1A1A18"/>
-                </a:solidFill>
-                <a:latin typeface="Noto Sans Mono CJK SC"/>
-                <a:ea typeface="Noto Sans Mono CJK SC"/>
-                <a:cs typeface="Noto Sans Mono CJK SC"/>
-              </a:rPr>
-              <a:t>    </a:t>
-            </a:r>
-            <a:r>
-              <a:rPr lang="zh-CN" sz="912" dirty="0">
-                <a:solidFill>
-                  <a:srgbClr val="8A4B2A"/>
-                </a:solidFill>
-                <a:latin typeface="Noto Sans Mono CJK SC"/>
-                <a:ea typeface="Noto Sans Mono CJK SC"/>
-                <a:cs typeface="Noto Sans Mono CJK SC"/>
-              </a:rPr>
-              <a:t>def</a:t>
-            </a:r>
-            <a:r>
-              <a:rPr lang="zh-CN" sz="912" dirty="0">
-                <a:solidFill>
-                  <a:srgbClr val="1A1A18"/>
-                </a:solidFill>
-                <a:latin typeface="Noto Sans Mono CJK SC"/>
-                <a:ea typeface="Noto Sans Mono CJK SC"/>
-                <a:cs typeface="Noto Sans Mono CJK SC"/>
-              </a:rPr>
-              <a:t> replace(self, player: </a:t>
-            </a:r>
-            <a:r>
-              <a:rPr lang="zh-CN" sz="912" dirty="0">
-                <a:solidFill>
-                  <a:srgbClr val="2C6B57"/>
-                </a:solidFill>
-                <a:latin typeface="Noto Sans Mono CJK SC"/>
-                <a:ea typeface="Noto Sans Mono CJK SC"/>
-                <a:cs typeface="Noto Sans Mono CJK SC"/>
-              </a:rPr>
-              <a:t>int</a:t>
-            </a:r>
-            <a:r>
-              <a:rPr lang="zh-CN" sz="912" dirty="0">
-                <a:solidFill>
-                  <a:srgbClr val="1A1A18"/>
-                </a:solidFill>
-                <a:latin typeface="Noto Sans Mono CJK SC"/>
-                <a:ea typeface="Noto Sans Mono CJK SC"/>
-                <a:cs typeface="Noto Sans Mono CJK SC"/>
-              </a:rPr>
-              <a:t>, value: </a:t>
-            </a:r>
-            <a:r>
-              <a:rPr lang="zh-CN" sz="912" dirty="0">
-                <a:solidFill>
-                  <a:srgbClr val="2C6B57"/>
-                </a:solidFill>
-                <a:latin typeface="Noto Sans Mono CJK SC"/>
-                <a:ea typeface="Noto Sans Mono CJK SC"/>
-                <a:cs typeface="Noto Sans Mono CJK SC"/>
-              </a:rPr>
-              <a:t>int</a:t>
-            </a:r>
-            <a:r>
-              <a:rPr lang="zh-CN" sz="912" dirty="0">
-                <a:solidFill>
-                  <a:srgbClr val="1A1A18"/>
-                </a:solidFill>
-                <a:latin typeface="Noto Sans Mono CJK SC"/>
-                <a:ea typeface="Noto Sans Mono CJK SC"/>
-                <a:cs typeface="Noto Sans Mono CJK SC"/>
-              </a:rPr>
-              <a:t>) -&gt; </a:t>
-            </a:r>
-            <a:r>
-              <a:rPr lang="zh-CN" sz="912" dirty="0">
-                <a:solidFill>
-                  <a:srgbClr val="8A4B2A"/>
-                </a:solidFill>
-                <a:latin typeface="Noto Sans Mono CJK SC"/>
-                <a:ea typeface="Noto Sans Mono CJK SC"/>
-                <a:cs typeface="Noto Sans Mono CJK SC"/>
-              </a:rPr>
-              <a:t>None</a:t>
-            </a:r>
-            <a:r>
-              <a:rPr lang="zh-CN" sz="912" dirty="0">
-                <a:solidFill>
-                  <a:srgbClr val="1A1A18"/>
-                </a:solidFill>
-                <a:latin typeface="Noto Sans Mono CJK SC"/>
-                <a:ea typeface="Noto Sans Mono CJK SC"/>
-                <a:cs typeface="Noto Sans Mono CJK SC"/>
-              </a:rPr>
-              <a:t>:</a:t>
-            </a:r>
-          </a:p>
-          <a:p>
-            <a:pPr marL="0" indent="0" lvl="0">
-              <a:lnSpc>
-                <a:spcPct val="104000"/>
-              </a:lnSpc>
-              <a:buNone/>
-            </a:pPr>
-            <a:r>
-              <a:rPr lang="zh-CN" sz="912" dirty="0">
-                <a:solidFill>
-                  <a:srgbClr val="1A1A18"/>
-                </a:solidFill>
-                <a:latin typeface="Noto Sans Mono CJK SC"/>
-                <a:ea typeface="Noto Sans Mono CJK SC"/>
-                <a:cs typeface="Noto Sans Mono CJK SC"/>
-              </a:rPr>
-              <a:t>        self._check_player(player)</a:t>
-            </a:r>
-          </a:p>
-          <a:p>
-            <a:pPr marL="0" indent="0" lvl="0">
-              <a:lnSpc>
-                <a:spcPct val="104000"/>
-              </a:lnSpc>
-              <a:buNone/>
-            </a:pPr>
-            <a:r>
-              <a:rPr lang="zh-CN" sz="912" dirty="0">
-                <a:solidFill>
-                  <a:srgbClr val="1A1A18"/>
-                </a:solidFill>
-                <a:latin typeface="Noto Sans Mono CJK SC"/>
-                <a:ea typeface="Noto Sans Mono CJK SC"/>
-                <a:cs typeface="Noto Sans Mono CJK SC"/>
-              </a:rPr>
-              <a:t>        self.players[player] = value</a:t>
-            </a:r>
-          </a:p>
-          <a:p>
-            <a:pPr marL="0" indent="0" lvl="0">
-              <a:lnSpc>
-                <a:spcPct val="104000"/>
-              </a:lnSpc>
-              <a:buNone/>
-            </a:pPr>
-            <a:r>
-              <a:rPr lang="zh-CN" sz="912" dirty="0">
-                <a:solidFill>
-                  <a:srgbClr val="1A1A18"/>
-                </a:solidFill>
-                <a:latin typeface="Noto Sans Mono CJK SC"/>
-                <a:ea typeface="Noto Sans Mono CJK SC"/>
-                <a:cs typeface="Noto Sans Mono CJK SC"/>
-              </a:rPr>
-              <a:t>        node = (self._size + player) // </a:t>
-            </a:r>
-            <a:r>
-              <a:rPr lang="zh-CN" sz="912" dirty="0">
-                <a:solidFill>
-                  <a:srgbClr val="4A5AA8"/>
-                </a:solidFill>
-                <a:latin typeface="Noto Sans Mono CJK SC"/>
-                <a:ea typeface="Noto Sans Mono CJK SC"/>
-                <a:cs typeface="Noto Sans Mono CJK SC"/>
-              </a:rPr>
-              <a:t>2</a:t>
-            </a:r>
-          </a:p>
-          <a:p>
-            <a:pPr marL="0" indent="0" lvl="0">
-              <a:lnSpc>
-                <a:spcPct val="104000"/>
-              </a:lnSpc>
-              <a:buNone/>
-            </a:pPr>
-            <a:r>
-              <a:rPr lang="zh-CN" sz="912" dirty="0">
-                <a:solidFill>
-                  <a:srgbClr val="1A1A18"/>
-                </a:solidFill>
-                <a:latin typeface="Noto Sans Mono CJK SC"/>
-                <a:ea typeface="Noto Sans Mono CJK SC"/>
-                <a:cs typeface="Noto Sans Mono CJK SC"/>
-              </a:rPr>
-              <a:t>        </a:t>
-            </a:r>
-            <a:r>
-              <a:rPr lang="zh-CN" sz="912" dirty="0">
-                <a:solidFill>
-                  <a:srgbClr val="8A4B2A"/>
-                </a:solidFill>
-                <a:latin typeface="Noto Sans Mono CJK SC"/>
-                <a:ea typeface="Noto Sans Mono CJK SC"/>
-                <a:cs typeface="Noto Sans Mono CJK SC"/>
-              </a:rPr>
-              <a:t>while</a:t>
-            </a:r>
-            <a:r>
-              <a:rPr lang="zh-CN" sz="912" dirty="0">
-                <a:solidFill>
-                  <a:srgbClr val="1A1A18"/>
-                </a:solidFill>
-                <a:latin typeface="Noto Sans Mono CJK SC"/>
-                <a:ea typeface="Noto Sans Mono CJK SC"/>
-                <a:cs typeface="Noto Sans Mono CJK SC"/>
-              </a:rPr>
-              <a:t> node &gt;= </a:t>
-            </a:r>
-            <a:r>
-              <a:rPr lang="zh-CN" sz="912" dirty="0">
-                <a:solidFill>
-                  <a:srgbClr val="4A5AA8"/>
-                </a:solidFill>
-                <a:latin typeface="Noto Sans Mono CJK SC"/>
-                <a:ea typeface="Noto Sans Mono CJK SC"/>
-                <a:cs typeface="Noto Sans Mono CJK SC"/>
-              </a:rPr>
-              <a:t>1</a:t>
-            </a:r>
-            <a:r>
-              <a:rPr lang="zh-CN" sz="912" dirty="0">
-                <a:solidFill>
-                  <a:srgbClr val="1A1A18"/>
-                </a:solidFill>
-                <a:latin typeface="Noto Sans Mono CJK SC"/>
-                <a:ea typeface="Noto Sans Mono CJK SC"/>
-                <a:cs typeface="Noto Sans Mono CJK SC"/>
-              </a:rPr>
-              <a:t>:</a:t>
-            </a:r>
-          </a:p>
-          <a:p>
-            <a:pPr marL="0" indent="0" lvl="0">
-              <a:lnSpc>
-                <a:spcPct val="104000"/>
-              </a:lnSpc>
-              <a:buNone/>
-            </a:pPr>
-            <a:r>
-              <a:rPr lang="zh-CN" sz="912" dirty="0">
-                <a:solidFill>
-                  <a:srgbClr val="1A1A18"/>
-                </a:solidFill>
-                <a:latin typeface="Noto Sans Mono CJK SC"/>
-                <a:ea typeface="Noto Sans Mono CJK SC"/>
-                <a:cs typeface="Noto Sans Mono CJK SC"/>
-              </a:rPr>
-              <a:t>            self._tree[node] = self._better(self._winner_at(node * </a:t>
-            </a:r>
-            <a:r>
-              <a:rPr lang="zh-CN" sz="912" dirty="0">
-                <a:solidFill>
-                  <a:srgbClr val="4A5AA8"/>
-                </a:solidFill>
-                <a:latin typeface="Noto Sans Mono CJK SC"/>
-                <a:ea typeface="Noto Sans Mono CJK SC"/>
-                <a:cs typeface="Noto Sans Mono CJK SC"/>
-              </a:rPr>
-              <a:t>2</a:t>
-            </a:r>
-            <a:r>
-              <a:rPr lang="zh-CN" sz="912" dirty="0">
-                <a:solidFill>
-                  <a:srgbClr val="1A1A18"/>
-                </a:solidFill>
-                <a:latin typeface="Noto Sans Mono CJK SC"/>
-                <a:ea typeface="Noto Sans Mono CJK SC"/>
-                <a:cs typeface="Noto Sans Mono CJK SC"/>
-              </a:rPr>
-              <a:t>),</a:t>
-            </a:r>
-          </a:p>
-          <a:p>
-            <a:pPr marL="0" indent="0" lvl="0">
-              <a:lnSpc>
-                <a:spcPct val="104000"/>
-              </a:lnSpc>
-              <a:buNone/>
-            </a:pPr>
-            <a:r>
-              <a:rPr lang="zh-CN" sz="912" dirty="0">
-                <a:solidFill>
-                  <a:srgbClr val="1A1A18"/>
-                </a:solidFill>
-                <a:latin typeface="Noto Sans Mono CJK SC"/>
-                <a:ea typeface="Noto Sans Mono CJK SC"/>
-                <a:cs typeface="Noto Sans Mono CJK SC"/>
-              </a:rPr>
-              <a:t>                                            self._winner_at(node * </a:t>
-            </a:r>
-            <a:r>
-              <a:rPr lang="zh-CN" sz="912" dirty="0">
-                <a:solidFill>
-                  <a:srgbClr val="4A5AA8"/>
-                </a:solidFill>
-                <a:latin typeface="Noto Sans Mono CJK SC"/>
-                <a:ea typeface="Noto Sans Mono CJK SC"/>
-                <a:cs typeface="Noto Sans Mono CJK SC"/>
-              </a:rPr>
-              <a:t>2</a:t>
-            </a:r>
-            <a:r>
-              <a:rPr lang="zh-CN" sz="912" dirty="0">
-                <a:solidFill>
-                  <a:srgbClr val="1A1A18"/>
-                </a:solidFill>
-                <a:latin typeface="Noto Sans Mono CJK SC"/>
-                <a:ea typeface="Noto Sans Mono CJK SC"/>
-                <a:cs typeface="Noto Sans Mono CJK SC"/>
-              </a:rPr>
-              <a:t> + </a:t>
-            </a:r>
-            <a:r>
-              <a:rPr lang="zh-CN" sz="912" dirty="0">
-                <a:solidFill>
-                  <a:srgbClr val="4A5AA8"/>
-                </a:solidFill>
-                <a:latin typeface="Noto Sans Mono CJK SC"/>
-                <a:ea typeface="Noto Sans Mono CJK SC"/>
-                <a:cs typeface="Noto Sans Mono CJK SC"/>
-              </a:rPr>
-              <a:t>1</a:t>
-            </a:r>
-            <a:r>
-              <a:rPr lang="zh-CN" sz="912" dirty="0">
-                <a:solidFill>
-                  <a:srgbClr val="1A1A18"/>
-                </a:solidFill>
-                <a:latin typeface="Noto Sans Mono CJK SC"/>
-                <a:ea typeface="Noto Sans Mono CJK SC"/>
-                <a:cs typeface="Noto Sans Mono CJK SC"/>
-              </a:rPr>
-              <a:t>))</a:t>
-            </a:r>
-          </a:p>
-          <a:p>
-            <a:pPr marL="0" indent="0" lvl="0">
-              <a:lnSpc>
-                <a:spcPct val="104000"/>
-              </a:lnSpc>
-              <a:buNone/>
-            </a:pPr>
-            <a:r>
-              <a:rPr lang="zh-CN" sz="912" dirty="0">
-                <a:solidFill>
-                  <a:srgbClr val="1A1A18"/>
-                </a:solidFill>
-                <a:latin typeface="Noto Sans Mono CJK SC"/>
-                <a:ea typeface="Noto Sans Mono CJK SC"/>
-                <a:cs typeface="Noto Sans Mono CJK SC"/>
-              </a:rPr>
-              <a:t>            node //= </a:t>
-            </a:r>
-            <a:r>
-              <a:rPr lang="zh-CN" sz="912" dirty="0">
-                <a:solidFill>
-                  <a:srgbClr val="4A5AA8"/>
-                </a:solidFill>
-                <a:latin typeface="Noto Sans Mono CJK SC"/>
-                <a:ea typeface="Noto Sans Mono CJK SC"/>
-                <a:cs typeface="Noto Sans Mono CJK SC"/>
-              </a:rPr>
-              <a:t>2</a:t>
-            </a:r>
-          </a:p>
-        </p:txBody>
-      </p:sp>
-      <p:sp>
-        <p:nvSpPr>
-          <p:cNvPr id="6" name="页脚"/>
+                <a:latin typeface="Segoe UI"/>
+                <a:ea typeface="Noto Sans CJK SC"/>
+                <a:cs typeface="Segoe UI"/>
+              </a:rPr>
+              <a:t>败者树</a:t>
+            </a:r>
+            <a:r>
+              <a:rPr lang="zh-CN" sz="2340" dirty="0">
+                <a:solidFill>
+                  <a:srgbClr val="1A1A18"/>
+                </a:solidFill>
+                <a:latin typeface="Segoe UI"/>
+                <a:ea typeface="Noto Sans CJK SC"/>
+                <a:cs typeface="Segoe UI"/>
+              </a:rPr>
+              <a:t>比赢者树少一次访存：重构时不必读兄弟</a:t>
+            </a:r>
+          </a:p>
+        </p:txBody>
+      </p:sp>
+      <p:sp>
+        <p:nvSpPr>
+          <p:cNvPr id="5" name="页脚"/>
           <p:cNvSpPr txBox="1"/>
           <p:nvPr/>
         </p:nvSpPr>
@@ -13365,7 +13610,7 @@
       </p:sp>
       <p:sp>
         <p:nvSpPr>
-          <p:cNvPr id="7" name="页码"/>
+          <p:cNvPr id="6" name="页码"/>
           <p:cNvSpPr txBox="1"/>
           <p:nvPr/>
         </p:nvSpPr>
@@ -13400,7 +13645,7 @@
                 <a:ea typeface="Noto Sans CJK SC"/>
                 <a:cs typeface="Segoe UI"/>
               </a:rPr>
-              <a:t>30 / 32</a:t>
+              <a:t>30 / 31</a:t>
             </a:r>
           </a:p>
         </p:txBody>
@@ -13464,7 +13709,7 @@
                 <a:ea typeface="Noto Sans CJK SC"/>
                 <a:cs typeface="Segoe UI"/>
               </a:rPr>
-              <a:t>本章小结</a:t>
+              <a:t>上机</a:t>
             </a:r>
           </a:p>
         </p:txBody>
@@ -13498,14 +13743,65 @@
       </p:sp>
       <p:sp>
         <p:nvSpPr>
-          <p:cNvPr id="4" name="要点"/>
+          <p:cNvPr id="4" name="代码"/>
           <p:cNvSpPr txBox="1"/>
           <p:nvPr/>
         </p:nvSpPr>
         <p:spPr>
           <a:xfrm>
-            <a:off x="566928" y="1995678"/>
-            <a:ext cx="11058144" cy="2888586"/>
+            <a:off x="566928" y="2012188"/>
+            <a:ext cx="11058144" cy="470611"/>
+          </a:xfrm>
+          <a:prstGeom prst="roundRect">
+            <a:avLst>
+              <a:gd name="adj" fmla="val 6000"/>
+            </a:avLst>
+          </a:prstGeom>
+          <a:solidFill>
+            <a:srgbClr val="F5F4F0"/>
+          </a:solidFill>
+          <a:ln w="9525">
+            <a:solidFill>
+              <a:srgbClr val="DCDCD6"/>
+            </a:solidFill>
+          </a:ln>
+        </p:spPr>
+        <p:txBody>
+          <a:bodyPr wrap="square" lIns="100584" tIns="100584" rIns="100584" bIns="100584">
+            <a:noAutofit/>
+          </a:bodyPr>
+          <a:lstStyle/>
+          <a:p>
+            <a:pPr marL="0" indent="0" lvl="0">
+              <a:lnSpc>
+                <a:spcPct val="104000"/>
+              </a:lnSpc>
+              <a:buNone/>
+            </a:pPr>
+            <a:r>
+              <a:rPr lang="zh-CN" sz="1560" dirty="0">
+                <a:solidFill>
+                  <a:srgbClr val="1A1A18"/>
+                </a:solidFill>
+                <a:latin typeface="Noto Sans Mono CJK SC"/>
+                <a:ea typeface="Noto Sans Mono CJK SC"/>
+                <a:cs typeface="Noto Sans Mono CJK SC"/>
+              </a:rPr>
+              <a:t>python3 tools/check_code.py code/ch09/external_sort</a:t>
+            </a:r>
+          </a:p>
+        </p:txBody>
+      </p:sp>
+      <p:sp>
+        <p:nvSpPr>
+          <p:cNvPr id="5" name="要点"/>
+          <p:cNvSpPr txBox="1"/>
+          <p:nvPr/>
+        </p:nvSpPr>
+        <p:spPr>
+          <a:xfrm>
+            <a:off x="566928" y="2598369"/>
+            <a:ext cx="11058144" cy="1444293"/>
           </a:xfrm>
           <a:prstGeom prst="rect">
             <a:avLst/>
@@ -13540,29 +13836,7 @@
                 <a:ea typeface="Noto Sans CJK SC"/>
                 <a:cs typeface="Segoe UI"/>
               </a:rPr>
-              <a:t>外排序数的是</a:t>
-            </a:r>
-            <a:r>
-              <a:rPr lang="zh-CN" sz="2340" dirty="0" b="1">
-                <a:solidFill>
-                  <a:srgbClr val="8A4B2A"/>
-                </a:solidFill>
-                <a:latin typeface="Segoe UI"/>
-                <a:ea typeface="Noto Sans CJK SC"/>
-                <a:cs typeface="Segoe UI"/>
-              </a:rPr>
-              <a:t>外存访问次数</a:t>
-            </a:r>
-            <a:r>
-              <a:rPr lang="zh-CN" sz="2340" dirty="0">
-                <a:solidFill>
-                  <a:srgbClr val="1A1A18"/>
-                </a:solidFill>
-                <a:latin typeface="Segoe UI"/>
-                <a:ea typeface="Noto Sans CJK SC"/>
-                <a:cs typeface="Segoe UI"/>
-              </a:rPr>
-              <a:t>，不是比较次数</a:t>
+              <a:t>用一组随机数据跑置换选择，量一下顺串的实际长度分布</a:t>
             </a:r>
           </a:p>
           <a:p>
@@ -13580,17 +13854,6 @@
               <a:buChar char="●"/>
             </a:pPr>
             <a:r>
-              <a:rPr lang="zh-CN" sz="2340" dirty="0" b="1">
-                <a:solidFill>
-                  <a:srgbClr val="8A4B2A"/>
-                </a:solidFill>
-                <a:latin typeface="Segoe UI"/>
-                <a:ea typeface="Noto Sans CJK SC"/>
-                <a:cs typeface="Segoe UI"/>
-              </a:rPr>
-              <a:t>顺序读写远比随机读写划算</a:t>
-            </a:r>
-            <a:r>
               <a:rPr lang="zh-CN" sz="2340" dirty="0">
                 <a:solidFill>
                   <a:srgbClr val="1A1A18"/>
@@ -13599,7 +13862,7 @@
                 <a:ea typeface="Noto Sans CJK SC"/>
                 <a:cs typeface="Segoe UI"/>
               </a:rPr>
-              <a:t>——所以外排序全靠归并</a:t>
+              <a:t>把败者树的重构改成「读兄弟」，确认结果不变但访存变多</a:t>
             </a:r>
           </a:p>
           <a:p>
@@ -13617,477 +13880,6 @@
               <a:buChar char="●"/>
             </a:pPr>
             <a:r>
-              <a:rPr lang="zh-CN" sz="2340" dirty="0" b="1">
-                <a:solidFill>
-                  <a:srgbClr val="8A4B2A"/>
-                </a:solidFill>
-                <a:latin typeface="Segoe UI"/>
-                <a:ea typeface="Noto Sans CJK SC"/>
-                <a:cs typeface="Segoe UI"/>
-              </a:rPr>
-              <a:t>置换选择</a:t>
-            </a:r>
-            <a:r>
-              <a:rPr lang="zh-CN" sz="2340" dirty="0">
-                <a:solidFill>
-                  <a:srgbClr val="1A1A18"/>
-                </a:solidFill>
-                <a:latin typeface="Segoe UI"/>
-                <a:ea typeface="Noto Sans CJK SC"/>
-                <a:cs typeface="Segoe UI"/>
-              </a:rPr>
-              <a:t>把顺串平均长度从 M 提到 2M，段数减半</a:t>
-            </a:r>
-          </a:p>
-          <a:p>
-            <a:pPr marL="270000" indent="-230000" lvl="0">
-              <a:lnSpc>
-                <a:spcPct val="100000"/>
-              </a:lnSpc>
-              <a:spcBef>
-                <a:spcPts val="655"/>
-              </a:spcBef>
-              <a:buClr>
-                <a:srgbClr val="8A4B2A"/>
-              </a:buClr>
-              <a:buFont typeface="Arial"/>
-              <a:buChar char="●"/>
-            </a:pPr>
-            <a:r>
-              <a:rPr lang="zh-CN" sz="2340" dirty="0">
-                <a:solidFill>
-                  <a:srgbClr val="1A1A18"/>
-                </a:solidFill>
-                <a:latin typeface="Segoe UI"/>
-                <a:ea typeface="Noto Sans CJK SC"/>
-                <a:cs typeface="Segoe UI"/>
-              </a:rPr>
-              <a:t>多路归并降低轮数，但「挑最小」会变贵</a:t>
-            </a:r>
-          </a:p>
-          <a:p>
-            <a:pPr marL="270000" indent="-230000" lvl="0">
-              <a:lnSpc>
-                <a:spcPct val="100000"/>
-              </a:lnSpc>
-              <a:spcBef>
-                <a:spcPts val="655"/>
-              </a:spcBef>
-              <a:buClr>
-                <a:srgbClr val="8A4B2A"/>
-              </a:buClr>
-              <a:buFont typeface="Arial"/>
-              <a:buChar char="●"/>
-            </a:pPr>
-            <a:r>
-              <a:rPr lang="zh-CN" sz="2340" dirty="0" b="1">
-                <a:solidFill>
-                  <a:srgbClr val="8A4B2A"/>
-                </a:solidFill>
-                <a:latin typeface="Segoe UI"/>
-                <a:ea typeface="Noto Sans CJK SC"/>
-                <a:cs typeface="Segoe UI"/>
-              </a:rPr>
-              <a:t>选择树</a:t>
-            </a:r>
-            <a:r>
-              <a:rPr lang="zh-CN" sz="2340" dirty="0">
-                <a:solidFill>
-                  <a:srgbClr val="1A1A18"/>
-                </a:solidFill>
-                <a:latin typeface="Segoe UI"/>
-                <a:ea typeface="Noto Sans CJK SC"/>
-                <a:cs typeface="Segoe UI"/>
-              </a:rPr>
-              <a:t>把挑最小从 </a:t>
-            </a:r>
-            <a:r>
-              <a:rPr lang="zh-CN" sz="2340" dirty="0" i="1">
-                <a:solidFill>
-                  <a:srgbClr val="1A1A18"/>
-                </a:solidFill>
-                <a:latin typeface="Segoe UI"/>
-                <a:ea typeface="Noto Sans CJK SC"/>
-                <a:cs typeface="Segoe UI"/>
-              </a:rPr>
-              <a:t>O(k)</a:t>
-            </a:r>
-            <a:r>
-              <a:rPr lang="zh-CN" sz="2340" dirty="0">
-                <a:solidFill>
-                  <a:srgbClr val="1A1A18"/>
-                </a:solidFill>
-                <a:latin typeface="Segoe UI"/>
-                <a:ea typeface="Noto Sans CJK SC"/>
-                <a:cs typeface="Segoe UI"/>
-              </a:rPr>
-              <a:t> 降到 </a:t>
-            </a:r>
-            <a:r>
-              <a:rPr lang="zh-CN" sz="2340" dirty="0" i="1">
-                <a:solidFill>
-                  <a:srgbClr val="1A1A18"/>
-                </a:solidFill>
-                <a:latin typeface="Segoe UI"/>
-                <a:ea typeface="Noto Sans CJK SC"/>
-                <a:cs typeface="Segoe UI"/>
-              </a:rPr>
-              <a:t>O(log k)</a:t>
-            </a:r>
-          </a:p>
-          <a:p>
-            <a:pPr marL="270000" indent="-230000" lvl="0">
-              <a:lnSpc>
-                <a:spcPct val="100000"/>
-              </a:lnSpc>
-              <a:spcBef>
-                <a:spcPts val="655"/>
-              </a:spcBef>
-              <a:buClr>
-                <a:srgbClr val="8A4B2A"/>
-              </a:buClr>
-              <a:buFont typeface="Arial"/>
-              <a:buChar char="●"/>
-            </a:pPr>
-            <a:r>
-              <a:rPr lang="zh-CN" sz="2340" dirty="0" b="1">
-                <a:solidFill>
-                  <a:srgbClr val="8A4B2A"/>
-                </a:solidFill>
-                <a:latin typeface="Segoe UI"/>
-                <a:ea typeface="Noto Sans CJK SC"/>
-                <a:cs typeface="Segoe UI"/>
-              </a:rPr>
-              <a:t>败者树</a:t>
-            </a:r>
-            <a:r>
-              <a:rPr lang="zh-CN" sz="2340" dirty="0">
-                <a:solidFill>
-                  <a:srgbClr val="1A1A18"/>
-                </a:solidFill>
-                <a:latin typeface="Segoe UI"/>
-                <a:ea typeface="Noto Sans CJK SC"/>
-                <a:cs typeface="Segoe UI"/>
-              </a:rPr>
-              <a:t>比赢者树少一次访存：重构时不必读兄弟</a:t>
-            </a:r>
-          </a:p>
-        </p:txBody>
-      </p:sp>
-      <p:sp>
-        <p:nvSpPr>
-          <p:cNvPr id="5" name="页脚"/>
-          <p:cNvSpPr txBox="1"/>
-          <p:nvPr/>
-        </p:nvSpPr>
-        <p:spPr>
-          <a:xfrm>
-            <a:off x="566928" y="6419088"/>
-            <a:ext cx="7740700" cy="274320"/>
-          </a:xfrm>
-          <a:prstGeom prst="rect">
-            <a:avLst/>
-          </a:prstGeom>
-          <a:noFill/>
-        </p:spPr>
-        <p:txBody>
-          <a:bodyPr wrap="square" lIns="0" tIns="0" rIns="0" bIns="0">
-            <a:noAutofit/>
-          </a:bodyPr>
-          <a:lstStyle/>
-          <a:p>
-            <a:pPr marL="0" indent="0" lvl="0">
-              <a:lnSpc>
-                <a:spcPct val="100000"/>
-              </a:lnSpc>
-              <a:buNone/>
-            </a:pPr>
-            <a:r>
-              <a:rPr lang="zh-CN" sz="1000" dirty="0">
-                <a:solidFill>
-                  <a:srgbClr val="6B6B66"/>
-                </a:solidFill>
-                <a:latin typeface="Segoe UI"/>
-                <a:ea typeface="Noto Sans CJK SC"/>
-                <a:cs typeface="Segoe UI"/>
-              </a:rPr>
-              <a:t>第9章 文件管理和外排序</a:t>
-            </a:r>
-          </a:p>
-        </p:txBody>
-      </p:sp>
-      <p:sp>
-        <p:nvSpPr>
-          <p:cNvPr id="6" name="页码"/>
-          <p:cNvSpPr txBox="1"/>
-          <p:nvPr/>
-        </p:nvSpPr>
-        <p:spPr>
-          <a:xfrm>
-            <a:off x="8307628" y="6419088"/>
-            <a:ext cx="3317443" cy="274320"/>
-          </a:xfrm>
-          <a:prstGeom prst="rect">
-            <a:avLst/>
-          </a:prstGeom>
-          <a:noFill/>
-        </p:spPr>
-        <p:txBody>
-          <a:bodyPr wrap="square" lIns="0" tIns="0" rIns="0" bIns="0">
-            <a:noAutofit/>
-          </a:bodyPr>
-          <a:lstStyle/>
-          <a:p>
-            <a:pPr marL="0" indent="0" lvl="0" algn="r">
-              <a:lnSpc>
-                <a:spcPct val="100000"/>
-              </a:lnSpc>
-              <a:buNone/>
-            </a:pPr>
-            <a:r>
-              <a:rPr lang="zh-CN" sz="1000" dirty="0">
-                <a:solidFill>
-                  <a:srgbClr val="6B6B66"/>
-                </a:solidFill>
-                <a:latin typeface="Segoe UI"/>
-                <a:ea typeface="Noto Sans CJK SC"/>
-                <a:cs typeface="Segoe UI"/>
-              </a:rPr>
-              <a:t>31 / 32</a:t>
-            </a:r>
-          </a:p>
-        </p:txBody>
-      </p:sp>
-    </p:spTree>
-  </p:cSld>
-</p:sld>
-</file>
-
-<file path=ppt/slides/slide32.xml><?xml version="1.0" encoding="utf-8"?>
-<p:sld xmlns:a="http://schemas.openxmlformats.org/drawingml/2006/main" xmlns:r="http://schemas.openxmlformats.org/officeDocument/2006/relationships" xmlns:p="http://schemas.openxmlformats.org/presentationml/2006/main">
-  <p:cSld>
-    <p:spTree>
-      <p:nvGrpSpPr>
-        <p:cNvPr id="1" name=""/>
-        <p:cNvGrpSpPr/>
-        <p:nvPr/>
-      </p:nvGrpSpPr>
-      <p:grpSpPr>
-        <a:xfrm>
-          <a:off x="0" y="0"/>
-          <a:ext cx="0" cy="0"/>
-          <a:chOff x="0" y="0"/>
-          <a:chExt cx="0" cy="0"/>
-        </a:xfrm>
-      </p:grpSpPr>
-      <p:sp>
-        <p:nvSpPr>
-          <p:cNvPr id="2" name="标题"/>
-          <p:cNvSpPr txBox="1"/>
-          <p:nvPr/>
-        </p:nvSpPr>
-        <p:spPr>
-          <a:xfrm>
-            <a:off x="566928" y="384048"/>
-            <a:ext cx="11058144" cy="487680"/>
-          </a:xfrm>
-          <a:prstGeom prst="rect">
-            <a:avLst/>
-          </a:prstGeom>
-          <a:noFill/>
-        </p:spPr>
-        <p:txBody>
-          <a:bodyPr wrap="square" lIns="0" tIns="0" rIns="0" bIns="0">
-            <a:noAutofit/>
-          </a:bodyPr>
-          <a:lstStyle/>
-          <a:p>
-            <a:pPr marL="0" indent="0" lvl="0">
-              <a:lnSpc>
-                <a:spcPct val="100000"/>
-              </a:lnSpc>
-              <a:buNone/>
-            </a:pPr>
-            <a:r>
-              <a:rPr lang="zh-CN" sz="3200" dirty="0" b="1">
-                <a:solidFill>
-                  <a:srgbClr val="1A1A18"/>
-                </a:solidFill>
-                <a:latin typeface="Segoe UI"/>
-                <a:ea typeface="Noto Sans CJK SC"/>
-                <a:cs typeface="Segoe UI"/>
-              </a:rPr>
-              <a:t>上机</a:t>
-            </a:r>
-          </a:p>
-        </p:txBody>
-      </p:sp>
-      <p:sp>
-        <p:nvSpPr>
-          <p:cNvPr id="3" name="标题线"/>
-          <p:cNvSpPr/>
-          <p:nvPr/>
-        </p:nvSpPr>
-        <p:spPr>
-          <a:xfrm>
-            <a:off x="566928" y="935736"/>
-            <a:ext cx="11058144" cy="32004"/>
-          </a:xfrm>
-          <a:prstGeom prst="rect">
-            <a:avLst/>
-          </a:prstGeom>
-          <a:solidFill>
-            <a:srgbClr val="8A4B2A"/>
-          </a:solidFill>
-          <a:ln>
-            <a:noFill/>
-          </a:ln>
-        </p:spPr>
-        <p:txBody>
-          <a:bodyPr/>
-          <a:lstStyle/>
-          <a:p/>
-        </p:txBody>
-      </p:sp>
-      <p:sp>
-        <p:nvSpPr>
-          <p:cNvPr id="4" name="代码"/>
-          <p:cNvSpPr txBox="1"/>
-          <p:nvPr/>
-        </p:nvSpPr>
-        <p:spPr>
-          <a:xfrm>
-            <a:off x="566928" y="2012188"/>
-            <a:ext cx="11058144" cy="470611"/>
-          </a:xfrm>
-          <a:prstGeom prst="roundRect">
-            <a:avLst>
-              <a:gd name="adj" fmla="val 6000"/>
-            </a:avLst>
-          </a:prstGeom>
-          <a:solidFill>
-            <a:srgbClr val="F5F4F0"/>
-          </a:solidFill>
-          <a:ln w="9525">
-            <a:solidFill>
-              <a:srgbClr val="DCDCD6"/>
-            </a:solidFill>
-          </a:ln>
-        </p:spPr>
-        <p:txBody>
-          <a:bodyPr wrap="square" lIns="100584" tIns="100584" rIns="100584" bIns="100584">
-            <a:noAutofit/>
-          </a:bodyPr>
-          <a:lstStyle/>
-          <a:p>
-            <a:pPr marL="0" indent="0" lvl="0">
-              <a:lnSpc>
-                <a:spcPct val="104000"/>
-              </a:lnSpc>
-              <a:buNone/>
-            </a:pPr>
-            <a:r>
-              <a:rPr lang="zh-CN" sz="1560" dirty="0">
-                <a:solidFill>
-                  <a:srgbClr val="1A1A18"/>
-                </a:solidFill>
-                <a:latin typeface="Noto Sans Mono CJK SC"/>
-                <a:ea typeface="Noto Sans Mono CJK SC"/>
-                <a:cs typeface="Noto Sans Mono CJK SC"/>
-              </a:rPr>
-              <a:t>python3 tools/check_code.py code/ch09/external_sort</a:t>
-            </a:r>
-          </a:p>
-        </p:txBody>
-      </p:sp>
-      <p:sp>
-        <p:nvSpPr>
-          <p:cNvPr id="5" name="要点"/>
-          <p:cNvSpPr txBox="1"/>
-          <p:nvPr/>
-        </p:nvSpPr>
-        <p:spPr>
-          <a:xfrm>
-            <a:off x="566928" y="2598369"/>
-            <a:ext cx="11058144" cy="1444293"/>
-          </a:xfrm>
-          <a:prstGeom prst="rect">
-            <a:avLst/>
-          </a:prstGeom>
-          <a:noFill/>
-        </p:spPr>
-        <p:txBody>
-          <a:bodyPr wrap="square" lIns="0" tIns="0" rIns="0" bIns="0">
-            <a:noAutofit/>
-          </a:bodyPr>
-          <a:lstStyle/>
-          <a:p>
-            <a:pPr marL="270000" indent="-230000" lvl="0">
-              <a:lnSpc>
-                <a:spcPct val="100000"/>
-              </a:lnSpc>
-              <a:spcBef>
-                <a:spcPts val="655"/>
-              </a:spcBef>
-              <a:buClr>
-                <a:srgbClr val="8A4B2A"/>
-              </a:buClr>
-              <a:buFont typeface="Arial"/>
-              <a:buChar char="●"/>
-            </a:pPr>
-            <a:r>
-              <a:rPr lang="zh-CN" sz="2340" dirty="0">
-                <a:solidFill>
-                  <a:srgbClr val="1A1A18"/>
-                </a:solidFill>
-                <a:latin typeface="Segoe UI"/>
-                <a:ea typeface="Noto Sans CJK SC"/>
-                <a:cs typeface="Segoe UI"/>
-              </a:rPr>
-              <a:t>用一组随机数据跑置换选择，量一下顺串的实际长度分布</a:t>
-            </a:r>
-          </a:p>
-          <a:p>
-            <a:pPr marL="270000" indent="-230000" lvl="0">
-              <a:lnSpc>
-                <a:spcPct val="100000"/>
-              </a:lnSpc>
-              <a:spcBef>
-                <a:spcPts val="655"/>
-              </a:spcBef>
-              <a:buClr>
-                <a:srgbClr val="8A4B2A"/>
-              </a:buClr>
-              <a:buFont typeface="Arial"/>
-              <a:buChar char="●"/>
-            </a:pPr>
-            <a:r>
-              <a:rPr lang="zh-CN" sz="2340" dirty="0">
-                <a:solidFill>
-                  <a:srgbClr val="1A1A18"/>
-                </a:solidFill>
-                <a:latin typeface="Segoe UI"/>
-                <a:ea typeface="Noto Sans CJK SC"/>
-                <a:cs typeface="Segoe UI"/>
-              </a:rPr>
-              <a:t>把败者树的重构改成「读兄弟」，确认结果不变但访存变多</a:t>
-            </a:r>
-          </a:p>
-          <a:p>
-            <a:pPr marL="270000" indent="-230000" lvl="0">
-              <a:lnSpc>
-                <a:spcPct val="100000"/>
-              </a:lnSpc>
-              <a:spcBef>
-                <a:spcPts val="655"/>
-              </a:spcBef>
-              <a:buClr>
-                <a:srgbClr val="8A4B2A"/>
-              </a:buClr>
-              <a:buFont typeface="Arial"/>
-              <a:buChar char="●"/>
-            </a:pPr>
-            <a:r>
               <a:rPr lang="zh-CN" sz="2340" dirty="0">
                 <a:solidFill>
                   <a:srgbClr val="1A1A18"/>
@@ -14271,7 +14063,7 @@
                 <a:ea typeface="Noto Sans CJK SC"/>
                 <a:cs typeface="Segoe UI"/>
               </a:rPr>
-              <a:t>32 / 32</a:t>
+              <a:t>31 / 31</a:t>
             </a:r>
           </a:p>
         </p:txBody>
@@ -15086,7 +14878,7 @@
                 <a:ea typeface="Noto Sans CJK SC"/>
                 <a:cs typeface="Segoe UI"/>
               </a:rPr>
-              <a:t>4 / 32</a:t>
+              <a:t>4 / 31</a:t>
             </a:r>
           </a:p>
         </p:txBody>
@@ -16110,7 +15902,7 @@
                 <a:ea typeface="Noto Sans CJK SC"/>
                 <a:cs typeface="Segoe UI"/>
               </a:rPr>
-              <a:t>5 / 32</a:t>
+              <a:t>5 / 31</a:t>
             </a:r>
           </a:p>
         </p:txBody>
@@ -16722,7 +16514,7 @@
                 <a:ea typeface="Noto Sans CJK SC"/>
                 <a:cs typeface="Segoe UI"/>
               </a:rPr>
-              <a:t>6 / 32</a:t>
+              <a:t>6 / 31</a:t>
             </a:r>
           </a:p>
         </p:txBody>
@@ -17128,7 +16920,7 @@
                 <a:ea typeface="Noto Sans CJK SC"/>
                 <a:cs typeface="Segoe UI"/>
               </a:rPr>
-              <a:t>7 / 32</a:t>
+              <a:t>7 / 31</a:t>
             </a:r>
           </a:p>
         </p:txBody>
@@ -17453,7 +17245,7 @@
                 <a:ea typeface="Noto Sans CJK SC"/>
                 <a:cs typeface="Segoe UI"/>
               </a:rPr>
-              <a:t>8 / 32</a:t>
+              <a:t>8 / 31</a:t>
             </a:r>
           </a:p>
         </p:txBody>
@@ -17865,7 +17657,7 @@
                 <a:ea typeface="Noto Sans CJK SC"/>
                 <a:cs typeface="Segoe UI"/>
               </a:rPr>
-              <a:t>9 / 32</a:t>
+              <a:t>9 / 31</a:t>
             </a:r>
           </a:p>
         </p:txBody>

--- a/book/slides/pptx/ch09-external-sort.pptx
+++ b/book/slides/pptx/ch09-external-sort.pptx
@@ -5078,7 +5078,7 @@
                 <a:ea typeface="Noto Sans CJK SC"/>
                 <a:cs typeface="Segoe UI"/>
               </a:rPr>
-              <a:t>赢者树的重构</a:t>
+              <a:t>赢者树的重构（续）</a:t>
             </a:r>
           </a:p>
         </p:txBody>
@@ -7086,7 +7086,7 @@
                 <a:ea typeface="Noto Sans CJK SC"/>
                 <a:cs typeface="Segoe UI"/>
               </a:rPr>
-              <a:t>败者树：省掉「看兄弟」</a:t>
+              <a:t>败者树：省掉「看兄弟」（续）</a:t>
             </a:r>
           </a:p>
         </p:txBody>
